--- a/ds18_GBM_Autosegmentation.pptx
+++ b/ds18_GBM_Autosegmentation.pptx
@@ -5,7 +5,7 @@
     <p:sldMasterId id="2147483648" r:id="rId1"/>
   </p:sldMasterIdLst>
   <p:notesMasterIdLst>
-    <p:notesMasterId r:id="rId15"/>
+    <p:notesMasterId r:id="rId21"/>
   </p:notesMasterIdLst>
   <p:sldIdLst>
     <p:sldId id="256" r:id="rId2"/>
@@ -16,11 +16,17 @@
     <p:sldId id="262" r:id="rId7"/>
     <p:sldId id="263" r:id="rId8"/>
     <p:sldId id="264" r:id="rId9"/>
-    <p:sldId id="266" r:id="rId10"/>
-    <p:sldId id="258" r:id="rId11"/>
-    <p:sldId id="260" r:id="rId12"/>
-    <p:sldId id="267" r:id="rId13"/>
-    <p:sldId id="268" r:id="rId14"/>
+    <p:sldId id="269" r:id="rId10"/>
+    <p:sldId id="266" r:id="rId11"/>
+    <p:sldId id="258" r:id="rId12"/>
+    <p:sldId id="270" r:id="rId13"/>
+    <p:sldId id="271" r:id="rId14"/>
+    <p:sldId id="272" r:id="rId15"/>
+    <p:sldId id="274" r:id="rId16"/>
+    <p:sldId id="273" r:id="rId17"/>
+    <p:sldId id="275" r:id="rId18"/>
+    <p:sldId id="267" r:id="rId19"/>
+    <p:sldId id="268" r:id="rId20"/>
   </p:sldIdLst>
   <p:sldSz cx="9144000" cy="5143500" type="screen16x9"/>
   <p:notesSz cx="6858000" cy="9144000"/>
@@ -531,7 +537,7 @@
           <a:bodyPr/>
           <a:lstStyle/>
           <a:p>
-            <a:endParaRPr lang="en-US"/>
+            <a:endParaRPr lang="en-US" dirty="0"/>
           </a:p>
         </p:txBody>
       </p:sp>
@@ -542,7 +548,7 @@
             <a:spLocks noGrp="1"/>
           </p:cNvSpPr>
           <p:nvPr>
-            <p:ph type="sldNum" sz="quarter" idx="10"/>
+            <p:ph type="sldNum" sz="quarter" idx="5"/>
           </p:nvPr>
         </p:nvSpPr>
         <p:spPr/>
@@ -550,9 +556,9 @@
           <a:bodyPr/>
           <a:lstStyle/>
           <a:p>
-            <a:fld id="{87350B06-B074-48FC-8CFD-53D2CD8FB95F}" type="slidenum">
+            <a:fld id="{AF533E96-F078-4B3D-A8F4-F1AF21EBC357}" type="slidenum">
               <a:rPr lang="en-US" smtClean="0"/>
-              <a:t>11</a:t>
+              <a:t>14</a:t>
             </a:fld>
             <a:endParaRPr lang="en-US"/>
           </a:p>
@@ -561,7 +567,7 @@
     </p:spTree>
     <p:extLst>
       <p:ext uri="{BB962C8B-B14F-4D97-AF65-F5344CB8AC3E}">
-        <p14:creationId xmlns:p14="http://schemas.microsoft.com/office/powerpoint/2010/main" val="1284596819"/>
+        <p14:creationId xmlns:p14="http://schemas.microsoft.com/office/powerpoint/2010/main" val="112814355"/>
       </p:ext>
     </p:extLst>
   </p:cSld>
@@ -4101,7 +4107,7 @@
         </p:nvSpPr>
         <p:spPr>
           <a:xfrm>
-            <a:off x="448965" y="3946094"/>
+            <a:off x="438879" y="4098800"/>
             <a:ext cx="8266242" cy="1159893"/>
           </a:xfrm>
         </p:spPr>
@@ -4128,7 +4134,7 @@
         </p:nvSpPr>
         <p:spPr>
           <a:xfrm>
-            <a:off x="1517900" y="3182570"/>
+            <a:off x="1517900" y="3564332"/>
             <a:ext cx="7280955" cy="763524"/>
           </a:xfrm>
         </p:spPr>
@@ -4143,6 +4149,42 @@
           </a:p>
         </p:txBody>
       </p:sp>
+      <p:pic>
+        <p:nvPicPr>
+          <p:cNvPr id="7" name="Picture 6">
+            <a:extLst>
+              <a:ext uri="{FF2B5EF4-FFF2-40B4-BE49-F238E27FC236}">
+                <a16:creationId xmlns:a16="http://schemas.microsoft.com/office/drawing/2014/main" id="{C9680EC1-E53E-6BA8-F3C9-B34727B44AF2}"/>
+              </a:ext>
+            </a:extLst>
+          </p:cNvPr>
+          <p:cNvPicPr>
+            <a:picLocks noChangeAspect="1"/>
+          </p:cNvPicPr>
+          <p:nvPr/>
+        </p:nvPicPr>
+        <p:blipFill>
+          <a:blip r:embed="rId2"/>
+          <a:stretch>
+            <a:fillRect/>
+          </a:stretch>
+        </p:blipFill>
+        <p:spPr>
+          <a:xfrm>
+            <a:off x="143555" y="355778"/>
+            <a:ext cx="4669320" cy="2277717"/>
+          </a:xfrm>
+          <a:prstGeom prst="rect">
+            <a:avLst/>
+          </a:prstGeom>
+          <a:ln>
+            <a:noFill/>
+          </a:ln>
+          <a:effectLst>
+            <a:softEdge rad="112500"/>
+          </a:effectLst>
+        </p:spPr>
+      </p:pic>
     </p:spTree>
     <p:extLst>
       <p:ext uri="{BB962C8B-B14F-4D97-AF65-F5344CB8AC3E}">
@@ -4161,7 +4203,13 @@
   <p:cSld>
     <p:spTree>
       <p:nvGrpSpPr>
-        <p:cNvPr id="1" name=""/>
+        <p:cNvPr id="1" name="">
+          <a:extLst>
+            <a:ext uri="{FF2B5EF4-FFF2-40B4-BE49-F238E27FC236}">
+              <a16:creationId xmlns:a16="http://schemas.microsoft.com/office/drawing/2014/main" id="{7AB8C7C4-54CF-8E9B-694C-007692ED8173}"/>
+            </a:ext>
+          </a:extLst>
+        </p:cNvPr>
         <p:cNvGrpSpPr/>
         <p:nvPr/>
       </p:nvGrpSpPr>
@@ -4175,40 +4223,10 @@
       </p:grpSpPr>
       <p:sp>
         <p:nvSpPr>
-          <p:cNvPr id="4" name="Title 3"/>
-          <p:cNvSpPr>
-            <a:spLocks noGrp="1"/>
-          </p:cNvSpPr>
-          <p:nvPr>
-            <p:ph type="title"/>
-          </p:nvPr>
-        </p:nvSpPr>
-        <p:spPr>
-          <a:xfrm>
-            <a:off x="3655770" y="433879"/>
-            <a:ext cx="4951349" cy="734703"/>
-          </a:xfrm>
-        </p:spPr>
-        <p:txBody>
-          <a:bodyPr>
-            <a:normAutofit/>
-          </a:bodyPr>
-          <a:lstStyle/>
-          <a:p>
-            <a:pPr algn="l"/>
-            <a:r>
-              <a:rPr lang="en-US" dirty="0"/>
-              <a:t>3D UNET Architecture</a:t>
-            </a:r>
-          </a:p>
-        </p:txBody>
-      </p:sp>
-      <p:sp>
-        <p:nvSpPr>
-          <p:cNvPr id="10" name="Content Placeholder 9">
+          <p:cNvPr id="4" name="Title 3">
             <a:extLst>
               <a:ext uri="{FF2B5EF4-FFF2-40B4-BE49-F238E27FC236}">
-                <a16:creationId xmlns:a16="http://schemas.microsoft.com/office/drawing/2014/main" id="{11E009A5-546A-B813-9D67-6E6A47FB401E}"/>
+                <a16:creationId xmlns:a16="http://schemas.microsoft.com/office/drawing/2014/main" id="{7E658B1E-112C-252B-A435-16CB0A4B7CCE}"/>
               </a:ext>
             </a:extLst>
           </p:cNvPr>
@@ -4216,35 +4234,66 @@
             <a:spLocks noGrp="1"/>
           </p:cNvSpPr>
           <p:nvPr>
-            <p:ph sz="half" idx="2"/>
+            <p:ph type="title"/>
           </p:nvPr>
         </p:nvSpPr>
         <p:spPr>
           <a:xfrm>
-            <a:off x="601670" y="1197405"/>
-            <a:ext cx="7482545" cy="3664920"/>
-          </a:xfrm>
-        </p:spPr>
-        <p:txBody>
-          <a:bodyPr/>
-          <a:lstStyle/>
-          <a:p>
-            <a:pPr algn="l"/>
+            <a:off x="2434130" y="-24235"/>
+            <a:ext cx="6396095" cy="506666"/>
+          </a:xfrm>
+        </p:spPr>
+        <p:txBody>
+          <a:bodyPr>
+            <a:normAutofit fontScale="90000"/>
+          </a:bodyPr>
+          <a:lstStyle/>
+          <a:p>
             <a:r>
               <a:rPr lang="en-US" dirty="0" err="1"/>
-              <a:t>Orignally</a:t>
+              <a:t>Supevised</a:t>
             </a:r>
             <a:r>
               <a:rPr lang="en-US" dirty="0"/>
-              <a:t> designed for biomedical segmentation.</a:t>
-            </a:r>
-          </a:p>
-        </p:txBody>
-      </p:sp>
+              <a:t> – 3D UNET Architecture</a:t>
+            </a:r>
+          </a:p>
+        </p:txBody>
+      </p:sp>
+      <p:pic>
+        <p:nvPicPr>
+          <p:cNvPr id="6" name="Picture 5">
+            <a:extLst>
+              <a:ext uri="{FF2B5EF4-FFF2-40B4-BE49-F238E27FC236}">
+                <a16:creationId xmlns:a16="http://schemas.microsoft.com/office/drawing/2014/main" id="{27D4179C-084D-B1E1-6911-60DC55DDCBD8}"/>
+              </a:ext>
+            </a:extLst>
+          </p:cNvPr>
+          <p:cNvPicPr>
+            <a:picLocks noChangeAspect="1"/>
+          </p:cNvPicPr>
+          <p:nvPr/>
+        </p:nvPicPr>
+        <p:blipFill>
+          <a:blip r:embed="rId2"/>
+          <a:stretch>
+            <a:fillRect/>
+          </a:stretch>
+        </p:blipFill>
+        <p:spPr>
+          <a:xfrm>
+            <a:off x="601670" y="474568"/>
+            <a:ext cx="8389625" cy="4608774"/>
+          </a:xfrm>
+          <a:prstGeom prst="rect">
+            <a:avLst/>
+          </a:prstGeom>
+        </p:spPr>
+      </p:pic>
     </p:spTree>
     <p:extLst>
       <p:ext uri="{BB962C8B-B14F-4D97-AF65-F5344CB8AC3E}">
-        <p14:creationId xmlns:p14="http://schemas.microsoft.com/office/powerpoint/2010/main" val="4170783713"/>
+        <p14:creationId xmlns:p14="http://schemas.microsoft.com/office/powerpoint/2010/main" val="4254301780"/>
       </p:ext>
     </p:extLst>
   </p:cSld>
@@ -4271,30 +4320,64 @@
           <a:chExt cx="0" cy="0"/>
         </a:xfrm>
       </p:grpSpPr>
-      <p:pic>
-        <p:nvPicPr>
-          <p:cNvPr id="3" name="Picture 2" descr="E:\websites\free-power-point-templates\2012\logos.png"/>
-          <p:cNvPicPr>
-            <a:picLocks noChangeAspect="1" noChangeArrowheads="1"/>
-          </p:cNvPicPr>
-          <p:nvPr/>
-        </p:nvPicPr>
-        <p:blipFill>
-          <a:blip r:embed="rId3">
+      <p:sp>
+        <p:nvSpPr>
+          <p:cNvPr id="4" name="Title 3"/>
+          <p:cNvSpPr>
+            <a:spLocks noGrp="1"/>
+          </p:cNvSpPr>
+          <p:nvPr>
+            <p:ph type="title"/>
+          </p:nvPr>
+        </p:nvSpPr>
+        <p:spPr>
+          <a:xfrm>
+            <a:off x="3503066" y="233644"/>
+            <a:ext cx="5395404" cy="734703"/>
+          </a:xfrm>
+          <a:noFill/>
+        </p:spPr>
+        <p:txBody>
+          <a:bodyPr>
+            <a:normAutofit fontScale="90000"/>
+          </a:bodyPr>
+          <a:lstStyle/>
+          <a:p>
+            <a:pPr algn="l"/>
+            <a:r>
+              <a:rPr lang="en-US" dirty="0">
+                <a:solidFill>
+                  <a:schemeClr val="accent1">
+                    <a:lumMod val="20000"/>
+                    <a:lumOff val="80000"/>
+                  </a:schemeClr>
+                </a:solidFill>
+              </a:rPr>
+              <a:t>3D UNET Packages &amp; libraries</a:t>
+            </a:r>
+          </a:p>
+        </p:txBody>
+      </p:sp>
+      <p:sp>
+        <p:nvSpPr>
+          <p:cNvPr id="26" name="Rectangle 6">
             <a:extLst>
-              <a:ext uri="{28A0092B-C50C-407E-A947-70E740481C1C}">
-                <a14:useLocalDpi xmlns:a14="http://schemas.microsoft.com/office/drawing/2010/main" val="0"/>
+              <a:ext uri="{FF2B5EF4-FFF2-40B4-BE49-F238E27FC236}">
+                <a16:creationId xmlns:a16="http://schemas.microsoft.com/office/drawing/2014/main" id="{01783AC0-E789-D6E3-56DB-1BB246DA1D93}"/>
               </a:ext>
             </a:extLst>
-          </a:blip>
-          <a:stretch>
-            <a:fillRect/>
-          </a:stretch>
-        </p:blipFill>
+          </p:cNvPr>
+          <p:cNvSpPr>
+            <a:spLocks noGrp="1" noChangeArrowheads="1"/>
+          </p:cNvSpPr>
+          <p:nvPr>
+            <p:ph sz="half" idx="2"/>
+          </p:nvPr>
+        </p:nvSpPr>
         <p:spPr bwMode="auto">
           <a:xfrm>
-            <a:off x="3808475" y="2326213"/>
-            <a:ext cx="1463784" cy="526961"/>
+            <a:off x="296260" y="1101522"/>
+            <a:ext cx="8361894" cy="3785652"/>
           </a:xfrm>
           <a:prstGeom prst="rect">
             <a:avLst/>
@@ -4303,21 +4386,482 @@
           <a:ln>
             <a:noFill/>
           </a:ln>
+          <a:effectLst/>
           <a:extLst>
             <a:ext uri="{909E8E84-426E-40DD-AFC4-6F175D3DCCD1}">
               <a14:hiddenFill xmlns:a14="http://schemas.microsoft.com/office/drawing/2010/main">
                 <a:solidFill>
-                  <a:srgbClr val="FFFFFF"/>
+                  <a:schemeClr val="accent1"/>
                 </a:solidFill>
               </a14:hiddenFill>
             </a:ext>
+            <a:ext uri="{91240B29-F687-4F45-9708-019B960494DF}">
+              <a14:hiddenLine xmlns:a14="http://schemas.microsoft.com/office/drawing/2010/main" w="9525">
+                <a:solidFill>
+                  <a:schemeClr val="tx1"/>
+                </a:solidFill>
+                <a:miter lim="800000"/>
+                <a:headEnd/>
+                <a:tailEnd/>
+              </a14:hiddenLine>
+            </a:ext>
+            <a:ext uri="{AF507438-7753-43E0-B8FC-AC1667EBCBE1}">
+              <a14:hiddenEffects xmlns:a14="http://schemas.microsoft.com/office/drawing/2010/main">
+                <a:effectLst>
+                  <a:outerShdw dist="35921" dir="2700000" algn="ctr" rotWithShape="0">
+                    <a:schemeClr val="bg2"/>
+                  </a:outerShdw>
+                </a:effectLst>
+              </a14:hiddenEffects>
+            </a:ext>
           </a:extLst>
         </p:spPr>
-      </p:pic>
+        <p:txBody>
+          <a:bodyPr vert="horz" wrap="square" lIns="91440" tIns="45720" rIns="91440" bIns="45720" numCol="1" anchor="ctr" anchorCtr="0" compatLnSpc="1">
+            <a:prstTxWarp prst="textNoShape">
+              <a:avLst/>
+            </a:prstTxWarp>
+            <a:spAutoFit/>
+          </a:bodyPr>
+          <a:lstStyle/>
+          <a:p>
+            <a:pPr marL="0" marR="0" lvl="0" indent="0" algn="l" defTabSz="914400" rtl="0" eaLnBrk="0" fontAlgn="base" latinLnBrk="0" hangingPunct="0">
+              <a:lnSpc>
+                <a:spcPct val="100000"/>
+              </a:lnSpc>
+              <a:spcBef>
+                <a:spcPct val="0"/>
+              </a:spcBef>
+              <a:spcAft>
+                <a:spcPct val="0"/>
+              </a:spcAft>
+              <a:buClrTx/>
+              <a:buSzTx/>
+              <a:buFontTx/>
+              <a:buChar char="•"/>
+              <a:tabLst/>
+            </a:pPr>
+            <a:r>
+              <a:rPr lang="en-US" altLang="en-US" sz="1600" b="1" dirty="0"/>
+              <a:t> </a:t>
+            </a:r>
+            <a:r>
+              <a:rPr kumimoji="0" lang="en-US" altLang="en-US" sz="1600" b="1" i="0" u="none" strike="noStrike" cap="none" normalizeH="0" baseline="0" dirty="0" err="1">
+                <a:ln>
+                  <a:noFill/>
+                </a:ln>
+                <a:effectLst/>
+              </a:rPr>
+              <a:t>PyTorch</a:t>
+            </a:r>
+            <a:r>
+              <a:rPr kumimoji="0" lang="en-US" altLang="en-US" sz="1600" b="0" i="0" u="none" strike="noStrike" cap="none" normalizeH="0" baseline="0" dirty="0">
+                <a:ln>
+                  <a:noFill/>
+                </a:ln>
+                <a:effectLst/>
+              </a:rPr>
+              <a:t>: </a:t>
+            </a:r>
+          </a:p>
+          <a:p>
+            <a:pPr marL="400050" lvl="1" indent="0" algn="l" eaLnBrk="0" fontAlgn="base" hangingPunct="0">
+              <a:spcBef>
+                <a:spcPct val="0"/>
+              </a:spcBef>
+              <a:spcAft>
+                <a:spcPct val="0"/>
+              </a:spcAft>
+              <a:buFontTx/>
+              <a:buChar char="•"/>
+            </a:pPr>
+            <a:r>
+              <a:rPr lang="en-US" altLang="en-US" sz="1600" dirty="0"/>
+              <a:t>L</a:t>
+            </a:r>
+            <a:r>
+              <a:rPr kumimoji="0" lang="en-US" altLang="en-US" sz="1600" b="0" i="0" u="none" strike="noStrike" cap="none" normalizeH="0" baseline="0" dirty="0">
+                <a:ln>
+                  <a:noFill/>
+                </a:ln>
+                <a:effectLst/>
+              </a:rPr>
+              <a:t>ibrary for tensor operations and GPU acceleration.</a:t>
+            </a:r>
+          </a:p>
+          <a:p>
+            <a:pPr marL="400050" lvl="1" indent="0" algn="l" eaLnBrk="0" fontAlgn="base" hangingPunct="0">
+              <a:spcBef>
+                <a:spcPct val="0"/>
+              </a:spcBef>
+              <a:spcAft>
+                <a:spcPct val="0"/>
+              </a:spcAft>
+              <a:buFontTx/>
+              <a:buChar char="•"/>
+            </a:pPr>
+            <a:r>
+              <a:rPr kumimoji="0" lang="en-US" altLang="en-US" sz="1600" b="1" i="0" u="none" strike="noStrike" cap="none" normalizeH="0" baseline="0" dirty="0">
+                <a:ln>
+                  <a:noFill/>
+                </a:ln>
+                <a:effectLst/>
+              </a:rPr>
+              <a:t>Dataset, </a:t>
+            </a:r>
+            <a:r>
+              <a:rPr kumimoji="0" lang="en-US" altLang="en-US" sz="1600" b="1" i="0" u="none" strike="noStrike" cap="none" normalizeH="0" baseline="0" dirty="0" err="1">
+                <a:ln>
+                  <a:noFill/>
+                </a:ln>
+                <a:effectLst/>
+              </a:rPr>
+              <a:t>DataLoader</a:t>
+            </a:r>
+            <a:r>
+              <a:rPr lang="en-US" altLang="en-US" sz="1600" dirty="0"/>
+              <a:t>: </a:t>
+            </a:r>
+            <a:r>
+              <a:rPr kumimoji="0" lang="en-US" altLang="en-US" sz="1600" b="0" i="0" u="none" strike="noStrike" cap="none" normalizeH="0" baseline="0" dirty="0">
+                <a:ln>
+                  <a:noFill/>
+                </a:ln>
+                <a:effectLst/>
+              </a:rPr>
+              <a:t>abstractions to wrap your data and batch/shuffle it efficiently during training.</a:t>
+            </a:r>
+          </a:p>
+          <a:p>
+            <a:pPr marL="400050" lvl="1" indent="0" algn="l" eaLnBrk="0" fontAlgn="base" hangingPunct="0">
+              <a:spcBef>
+                <a:spcPct val="0"/>
+              </a:spcBef>
+              <a:spcAft>
+                <a:spcPct val="0"/>
+              </a:spcAft>
+              <a:buFontTx/>
+              <a:buChar char="•"/>
+            </a:pPr>
+            <a:r>
+              <a:rPr kumimoji="0" lang="en-US" altLang="en-US" sz="1600" b="1" i="0" u="none" strike="noStrike" cap="none" normalizeH="0" baseline="0" dirty="0" err="1">
+                <a:ln>
+                  <a:noFill/>
+                </a:ln>
+                <a:effectLst/>
+              </a:rPr>
+              <a:t>nn</a:t>
+            </a:r>
+            <a:r>
+              <a:rPr kumimoji="0" lang="en-US" altLang="en-US" sz="1600" b="0" i="0" u="none" strike="noStrike" cap="none" normalizeH="0" baseline="0" dirty="0">
+                <a:ln>
+                  <a:noFill/>
+                </a:ln>
+                <a:effectLst/>
+              </a:rPr>
+              <a:t>: </a:t>
+            </a:r>
+            <a:r>
+              <a:rPr kumimoji="0" lang="en-US" altLang="en-US" sz="1600" b="0" i="0" u="none" strike="noStrike" cap="none" normalizeH="0" baseline="0" dirty="0" err="1">
+                <a:ln>
+                  <a:noFill/>
+                </a:ln>
+                <a:effectLst/>
+              </a:rPr>
+              <a:t>PyTorch’s</a:t>
+            </a:r>
+            <a:r>
+              <a:rPr kumimoji="0" lang="en-US" altLang="en-US" sz="1600" b="0" i="0" u="none" strike="noStrike" cap="none" normalizeH="0" baseline="0" dirty="0">
+                <a:ln>
+                  <a:noFill/>
+                </a:ln>
+                <a:effectLst/>
+              </a:rPr>
+              <a:t> module for building neural‐network layers and models.</a:t>
+            </a:r>
+          </a:p>
+          <a:p>
+            <a:pPr marL="400050" lvl="1" indent="0" algn="l" eaLnBrk="0" fontAlgn="base" hangingPunct="0">
+              <a:spcBef>
+                <a:spcPct val="0"/>
+              </a:spcBef>
+              <a:spcAft>
+                <a:spcPct val="0"/>
+              </a:spcAft>
+              <a:buFontTx/>
+              <a:buChar char="•"/>
+            </a:pPr>
+            <a:r>
+              <a:rPr kumimoji="0" lang="en-US" altLang="en-US" sz="1600" b="1" i="0" u="none" strike="noStrike" cap="none" normalizeH="0" baseline="0" dirty="0" err="1">
+                <a:ln>
+                  <a:noFill/>
+                </a:ln>
+                <a:effectLst/>
+              </a:rPr>
+              <a:t>optim</a:t>
+            </a:r>
+            <a:r>
+              <a:rPr kumimoji="0" lang="en-US" altLang="en-US" sz="1600" b="0" i="0" u="none" strike="noStrike" cap="none" normalizeH="0" baseline="0" dirty="0">
+                <a:ln>
+                  <a:noFill/>
+                </a:ln>
+                <a:effectLst/>
+              </a:rPr>
+              <a:t>: Provides optimizers (e.g. Adam), to update model weights via backpropagation (</a:t>
+            </a:r>
+            <a:r>
+              <a:rPr lang="en-US" sz="1600" dirty="0" err="1"/>
+              <a:t>nn.CrossEntropyLoss</a:t>
+            </a:r>
+            <a:r>
+              <a:rPr kumimoji="0" lang="en-US" altLang="en-US" sz="1600" b="0" i="0" u="none" strike="noStrike" cap="none" normalizeH="0" baseline="0" dirty="0">
+                <a:ln>
+                  <a:noFill/>
+                </a:ln>
+                <a:effectLst/>
+              </a:rPr>
+              <a:t>).</a:t>
+            </a:r>
+          </a:p>
+          <a:p>
+            <a:pPr marL="0" marR="0" lvl="0" indent="0" algn="l" defTabSz="914400" rtl="0" eaLnBrk="0" fontAlgn="base" latinLnBrk="0" hangingPunct="0">
+              <a:lnSpc>
+                <a:spcPct val="100000"/>
+              </a:lnSpc>
+              <a:spcBef>
+                <a:spcPct val="0"/>
+              </a:spcBef>
+              <a:spcAft>
+                <a:spcPct val="0"/>
+              </a:spcAft>
+              <a:buClrTx/>
+              <a:buSzTx/>
+              <a:buFontTx/>
+              <a:buChar char="•"/>
+              <a:tabLst/>
+            </a:pPr>
+            <a:r>
+              <a:rPr kumimoji="0" lang="en-US" altLang="en-US" sz="1600" b="1" i="0" u="none" strike="noStrike" cap="none" normalizeH="0" baseline="0" dirty="0" err="1">
+                <a:ln>
+                  <a:noFill/>
+                </a:ln>
+                <a:effectLst/>
+              </a:rPr>
+              <a:t>SimpleITK</a:t>
+            </a:r>
+            <a:r>
+              <a:rPr kumimoji="0" lang="en-US" altLang="en-US" sz="1600" b="1" i="0" u="none" strike="noStrike" cap="none" normalizeH="0" baseline="0" dirty="0">
+                <a:ln>
+                  <a:noFill/>
+                </a:ln>
+                <a:effectLst/>
+              </a:rPr>
+              <a:t> (</a:t>
+            </a:r>
+            <a:r>
+              <a:rPr kumimoji="0" lang="en-US" altLang="en-US" sz="1600" b="1" i="0" u="none" strike="noStrike" cap="none" normalizeH="0" baseline="0" dirty="0" err="1">
+                <a:ln>
+                  <a:noFill/>
+                </a:ln>
+                <a:effectLst/>
+              </a:rPr>
+              <a:t>sitk</a:t>
+            </a:r>
+            <a:r>
+              <a:rPr kumimoji="0" lang="en-US" altLang="en-US" sz="1600" b="1" i="0" u="none" strike="noStrike" cap="none" normalizeH="0" baseline="0" dirty="0">
+                <a:ln>
+                  <a:noFill/>
+                </a:ln>
+                <a:effectLst/>
+              </a:rPr>
+              <a:t>)</a:t>
+            </a:r>
+            <a:r>
+              <a:rPr kumimoji="0" lang="en-US" altLang="en-US" sz="1600" b="0" i="0" u="none" strike="noStrike" cap="none" normalizeH="0" baseline="0" dirty="0">
+                <a:ln>
+                  <a:noFill/>
+                </a:ln>
+                <a:effectLst/>
+              </a:rPr>
+              <a:t>: Utility for reading, writing, and preprocessing medical‐image volumes (e.g. </a:t>
+            </a:r>
+            <a:r>
+              <a:rPr kumimoji="0" lang="en-US" altLang="en-US" sz="1600" b="0" i="0" u="none" strike="noStrike" cap="none" normalizeH="0" baseline="0" dirty="0" err="1">
+                <a:ln>
+                  <a:noFill/>
+                </a:ln>
+                <a:effectLst/>
+              </a:rPr>
+              <a:t>NIfTI</a:t>
+            </a:r>
+            <a:r>
+              <a:rPr kumimoji="0" lang="en-US" altLang="en-US" sz="1600" b="0" i="0" u="none" strike="noStrike" cap="none" normalizeH="0" baseline="0" dirty="0">
+                <a:ln>
+                  <a:noFill/>
+                </a:ln>
+                <a:effectLst/>
+              </a:rPr>
+              <a:t>).</a:t>
+            </a:r>
+          </a:p>
+          <a:p>
+            <a:pPr marL="0" marR="0" lvl="0" indent="0" algn="l" defTabSz="914400" rtl="0" eaLnBrk="0" fontAlgn="base" latinLnBrk="0" hangingPunct="0">
+              <a:lnSpc>
+                <a:spcPct val="100000"/>
+              </a:lnSpc>
+              <a:spcBef>
+                <a:spcPct val="0"/>
+              </a:spcBef>
+              <a:spcAft>
+                <a:spcPct val="0"/>
+              </a:spcAft>
+              <a:buClrTx/>
+              <a:buSzTx/>
+              <a:buFontTx/>
+              <a:buChar char="•"/>
+              <a:tabLst/>
+            </a:pPr>
+            <a:r>
+              <a:rPr kumimoji="0" lang="en-US" altLang="en-US" sz="1600" b="1" i="0" u="none" strike="noStrike" cap="none" normalizeH="0" baseline="0" dirty="0">
+                <a:ln>
+                  <a:noFill/>
+                </a:ln>
+                <a:effectLst/>
+              </a:rPr>
+              <a:t>Scikit-learn:</a:t>
+            </a:r>
+          </a:p>
+          <a:p>
+            <a:pPr marL="400050" lvl="1" indent="0" algn="l" eaLnBrk="0" fontAlgn="base" hangingPunct="0">
+              <a:spcBef>
+                <a:spcPct val="0"/>
+              </a:spcBef>
+              <a:spcAft>
+                <a:spcPct val="0"/>
+              </a:spcAft>
+              <a:buFontTx/>
+              <a:buChar char="•"/>
+            </a:pPr>
+            <a:r>
+              <a:rPr lang="en-US" altLang="en-US" sz="1600" b="1" dirty="0" err="1"/>
+              <a:t>train_test_split</a:t>
+            </a:r>
+            <a:r>
+              <a:rPr lang="en-US" altLang="en-US" sz="1600" dirty="0"/>
+              <a:t>:</a:t>
+            </a:r>
+            <a:r>
+              <a:rPr kumimoji="0" lang="en-US" altLang="en-US" sz="1600" b="0" i="0" u="none" strike="noStrike" cap="none" normalizeH="0" baseline="0" dirty="0">
+                <a:ln>
+                  <a:noFill/>
+                </a:ln>
+                <a:effectLst/>
+              </a:rPr>
+              <a:t> helper to split file lists or arrays into training and validation sets.</a:t>
+            </a:r>
+          </a:p>
+          <a:p>
+            <a:pPr marL="0" marR="0" lvl="0" indent="0" algn="l" defTabSz="914400" rtl="0" eaLnBrk="0" fontAlgn="base" latinLnBrk="0" hangingPunct="0">
+              <a:lnSpc>
+                <a:spcPct val="100000"/>
+              </a:lnSpc>
+              <a:spcBef>
+                <a:spcPct val="0"/>
+              </a:spcBef>
+              <a:spcAft>
+                <a:spcPct val="0"/>
+              </a:spcAft>
+              <a:buClrTx/>
+              <a:buSzTx/>
+              <a:buFontTx/>
+              <a:buChar char="•"/>
+              <a:tabLst/>
+            </a:pPr>
+            <a:r>
+              <a:rPr kumimoji="0" lang="en-US" altLang="en-US" sz="1600" b="1" i="0" u="none" strike="noStrike" cap="none" normalizeH="0" baseline="0" dirty="0" err="1">
+                <a:ln>
+                  <a:noFill/>
+                </a:ln>
+                <a:effectLst/>
+              </a:rPr>
+              <a:t>UNet</a:t>
+            </a:r>
+            <a:r>
+              <a:rPr kumimoji="0" lang="en-US" altLang="en-US" sz="1600" b="1" i="0" u="none" strike="noStrike" cap="none" normalizeH="0" baseline="0" dirty="0">
+                <a:ln>
+                  <a:noFill/>
+                </a:ln>
+                <a:effectLst/>
+              </a:rPr>
+              <a:t> (from MONAI)</a:t>
+            </a:r>
+            <a:r>
+              <a:rPr kumimoji="0" lang="en-US" altLang="en-US" sz="1600" b="0" i="0" u="none" strike="noStrike" cap="none" normalizeH="0" baseline="0" dirty="0">
+                <a:ln>
+                  <a:noFill/>
+                </a:ln>
+                <a:effectLst/>
+              </a:rPr>
+              <a:t>: </a:t>
+            </a:r>
+          </a:p>
+          <a:p>
+            <a:pPr marL="400050" lvl="1" indent="0" algn="l" eaLnBrk="0" fontAlgn="base" hangingPunct="0">
+              <a:spcBef>
+                <a:spcPct val="0"/>
+              </a:spcBef>
+              <a:spcAft>
+                <a:spcPct val="0"/>
+              </a:spcAft>
+              <a:buFontTx/>
+              <a:buChar char="•"/>
+            </a:pPr>
+            <a:r>
+              <a:rPr kumimoji="0" lang="en-US" altLang="en-US" sz="1600" b="0" i="0" u="none" strike="noStrike" cap="none" normalizeH="0" baseline="0" dirty="0">
+                <a:ln>
+                  <a:noFill/>
+                </a:ln>
+                <a:effectLst/>
+              </a:rPr>
+              <a:t>Off‐the‐shelf 3D U-Net implementation tailored for medical segmentation.</a:t>
+            </a:r>
+          </a:p>
+          <a:p>
+            <a:pPr marL="400050" lvl="1" indent="0" algn="l" eaLnBrk="0" fontAlgn="base" hangingPunct="0">
+              <a:spcBef>
+                <a:spcPct val="0"/>
+              </a:spcBef>
+              <a:spcAft>
+                <a:spcPct val="0"/>
+              </a:spcAft>
+              <a:buFontTx/>
+              <a:buChar char="•"/>
+            </a:pPr>
+            <a:r>
+              <a:rPr kumimoji="0" lang="en-US" altLang="en-US" sz="1600" b="1" i="0" u="none" strike="noStrike" cap="none" normalizeH="0" baseline="0" dirty="0" err="1">
+                <a:ln>
+                  <a:noFill/>
+                </a:ln>
+                <a:effectLst/>
+              </a:rPr>
+              <a:t>DiceLoss</a:t>
+            </a:r>
+            <a:r>
+              <a:rPr kumimoji="0" lang="en-US" altLang="en-US" sz="1600" b="0" i="0" u="none" strike="noStrike" cap="none" normalizeH="0" baseline="0" dirty="0">
+                <a:ln>
+                  <a:noFill/>
+                </a:ln>
+                <a:effectLst/>
+              </a:rPr>
+              <a:t>: A segmentation loss function that maximizes overlap (Dice coefficient) between prediction and ground truth</a:t>
+            </a:r>
+          </a:p>
+        </p:txBody>
+      </p:sp>
     </p:spTree>
     <p:extLst>
       <p:ext uri="{BB962C8B-B14F-4D97-AF65-F5344CB8AC3E}">
-        <p14:creationId xmlns:p14="http://schemas.microsoft.com/office/powerpoint/2010/main" val="109100692"/>
+        <p14:creationId xmlns:p14="http://schemas.microsoft.com/office/powerpoint/2010/main" val="4170783713"/>
       </p:ext>
     </p:extLst>
   </p:cSld>
@@ -4328,6 +4872,3843 @@
 </file>
 
 <file path=ppt/slides/slide12.xml><?xml version="1.0" encoding="utf-8"?>
+<p:sld xmlns:a="http://schemas.openxmlformats.org/drawingml/2006/main" xmlns:r="http://schemas.openxmlformats.org/officeDocument/2006/relationships" xmlns:p="http://schemas.openxmlformats.org/presentationml/2006/main">
+  <p:cSld>
+    <p:spTree>
+      <p:nvGrpSpPr>
+        <p:cNvPr id="1" name="">
+          <a:extLst>
+            <a:ext uri="{FF2B5EF4-FFF2-40B4-BE49-F238E27FC236}">
+              <a16:creationId xmlns:a16="http://schemas.microsoft.com/office/drawing/2014/main" id="{9E5C0107-A9A3-1D74-8431-7D532DB8E4C4}"/>
+            </a:ext>
+          </a:extLst>
+        </p:cNvPr>
+        <p:cNvGrpSpPr/>
+        <p:nvPr/>
+      </p:nvGrpSpPr>
+      <p:grpSpPr>
+        <a:xfrm>
+          <a:off x="0" y="0"/>
+          <a:ext cx="0" cy="0"/>
+          <a:chOff x="0" y="0"/>
+          <a:chExt cx="0" cy="0"/>
+        </a:xfrm>
+      </p:grpSpPr>
+      <p:sp>
+        <p:nvSpPr>
+          <p:cNvPr id="4" name="Title 3">
+            <a:extLst>
+              <a:ext uri="{FF2B5EF4-FFF2-40B4-BE49-F238E27FC236}">
+                <a16:creationId xmlns:a16="http://schemas.microsoft.com/office/drawing/2014/main" id="{CB0BD1E1-5204-F240-A71E-85EFC2F47F21}"/>
+              </a:ext>
+            </a:extLst>
+          </p:cNvPr>
+          <p:cNvSpPr>
+            <a:spLocks noGrp="1"/>
+          </p:cNvSpPr>
+          <p:nvPr>
+            <p:ph type="title"/>
+          </p:nvPr>
+        </p:nvSpPr>
+        <p:spPr>
+          <a:xfrm>
+            <a:off x="3947120" y="233644"/>
+            <a:ext cx="4951349" cy="734703"/>
+          </a:xfrm>
+          <a:noFill/>
+        </p:spPr>
+        <p:txBody>
+          <a:bodyPr>
+            <a:normAutofit/>
+          </a:bodyPr>
+          <a:lstStyle/>
+          <a:p>
+            <a:pPr algn="l"/>
+            <a:r>
+              <a:rPr lang="en-US" dirty="0">
+                <a:solidFill>
+                  <a:schemeClr val="accent1">
+                    <a:lumMod val="20000"/>
+                    <a:lumOff val="80000"/>
+                  </a:schemeClr>
+                </a:solidFill>
+              </a:rPr>
+              <a:t>3D UNET with Monai</a:t>
+            </a:r>
+          </a:p>
+        </p:txBody>
+      </p:sp>
+      <p:sp>
+        <p:nvSpPr>
+          <p:cNvPr id="19" name="Rectangle 1">
+            <a:extLst>
+              <a:ext uri="{FF2B5EF4-FFF2-40B4-BE49-F238E27FC236}">
+                <a16:creationId xmlns:a16="http://schemas.microsoft.com/office/drawing/2014/main" id="{5F146879-FF3A-F60B-D8F3-9D8301F27C62}"/>
+              </a:ext>
+            </a:extLst>
+          </p:cNvPr>
+          <p:cNvSpPr>
+            <a:spLocks noGrp="1" noChangeArrowheads="1"/>
+          </p:cNvSpPr>
+          <p:nvPr>
+            <p:ph sz="half" idx="2"/>
+          </p:nvPr>
+        </p:nvSpPr>
+        <p:spPr bwMode="auto">
+          <a:xfrm>
+            <a:off x="108279" y="1398058"/>
+            <a:ext cx="8927441" cy="3416320"/>
+          </a:xfrm>
+          <a:prstGeom prst="rect">
+            <a:avLst/>
+          </a:prstGeom>
+          <a:solidFill>
+            <a:srgbClr val="001836"/>
+          </a:solidFill>
+          <a:ln>
+            <a:noFill/>
+          </a:ln>
+          <a:effectLst/>
+        </p:spPr>
+        <p:txBody>
+          <a:bodyPr vert="horz" wrap="square" lIns="91440" tIns="45720" rIns="91440" bIns="45720" numCol="1" anchor="ctr" anchorCtr="0" compatLnSpc="1">
+            <a:prstTxWarp prst="textNoShape">
+              <a:avLst/>
+            </a:prstTxWarp>
+            <a:spAutoFit/>
+          </a:bodyPr>
+          <a:lstStyle/>
+          <a:p>
+            <a:pPr marL="0" marR="0" lvl="0" indent="0" algn="l" defTabSz="914400" rtl="0" eaLnBrk="0" fontAlgn="base" latinLnBrk="0" hangingPunct="0">
+              <a:lnSpc>
+                <a:spcPct val="100000"/>
+              </a:lnSpc>
+              <a:spcBef>
+                <a:spcPct val="0"/>
+              </a:spcBef>
+              <a:spcAft>
+                <a:spcPct val="0"/>
+              </a:spcAft>
+              <a:buClrTx/>
+              <a:buSzTx/>
+              <a:buFontTx/>
+              <a:buChar char="•"/>
+              <a:tabLst/>
+            </a:pPr>
+            <a:r>
+              <a:rPr kumimoji="0" lang="en-US" altLang="en-US" sz="1800" b="1" i="0" u="none" strike="noStrike" cap="none" normalizeH="0" baseline="0" dirty="0">
+                <a:ln>
+                  <a:noFill/>
+                </a:ln>
+                <a:effectLst/>
+                <a:latin typeface="Arial" panose="020B0604020202020204" pitchFamily="34" charset="0"/>
+              </a:rPr>
+              <a:t>Encoder</a:t>
+            </a:r>
+            <a:r>
+              <a:rPr kumimoji="0" lang="en-US" altLang="en-US" sz="1800" b="0" i="0" u="none" strike="noStrike" cap="none" normalizeH="0" baseline="0" dirty="0">
+                <a:ln>
+                  <a:noFill/>
+                </a:ln>
+                <a:effectLst/>
+                <a:latin typeface="Arial" panose="020B0604020202020204" pitchFamily="34" charset="0"/>
+              </a:rPr>
+              <a:t>:</a:t>
+            </a:r>
+          </a:p>
+          <a:p>
+            <a:pPr marL="400050" lvl="1" indent="0" algn="l" eaLnBrk="0" fontAlgn="base" hangingPunct="0">
+              <a:spcBef>
+                <a:spcPct val="0"/>
+              </a:spcBef>
+              <a:spcAft>
+                <a:spcPct val="0"/>
+              </a:spcAft>
+              <a:buFontTx/>
+              <a:buChar char="•"/>
+            </a:pPr>
+            <a:r>
+              <a:rPr kumimoji="0" lang="en-US" altLang="en-US" sz="1400" b="0" i="0" u="none" strike="noStrike" cap="none" normalizeH="0" baseline="0" dirty="0">
+                <a:ln>
+                  <a:noFill/>
+                </a:ln>
+                <a:effectLst/>
+                <a:latin typeface="Arial" panose="020B0604020202020204" pitchFamily="34" charset="0"/>
+              </a:rPr>
+              <a:t> Input → 2×ResUnit @16 → ↓</a:t>
+            </a:r>
+          </a:p>
+          <a:p>
+            <a:pPr marL="400050" lvl="1" indent="0" algn="l" eaLnBrk="0" fontAlgn="base" hangingPunct="0">
+              <a:spcBef>
+                <a:spcPct val="0"/>
+              </a:spcBef>
+              <a:spcAft>
+                <a:spcPct val="0"/>
+              </a:spcAft>
+              <a:buFontTx/>
+              <a:buChar char="•"/>
+            </a:pPr>
+            <a:r>
+              <a:rPr kumimoji="0" lang="en-US" altLang="en-US" sz="1400" b="0" i="0" u="none" strike="noStrike" cap="none" normalizeH="0" baseline="0" dirty="0">
+                <a:ln>
+                  <a:noFill/>
+                </a:ln>
+                <a:effectLst/>
+                <a:latin typeface="Arial" panose="020B0604020202020204" pitchFamily="34" charset="0"/>
+              </a:rPr>
+              <a:t> 16 → 2×ResUnit @32 → ↓</a:t>
+            </a:r>
+          </a:p>
+          <a:p>
+            <a:pPr marL="400050" lvl="1" indent="0" algn="l" eaLnBrk="0" fontAlgn="base" hangingPunct="0">
+              <a:spcBef>
+                <a:spcPct val="0"/>
+              </a:spcBef>
+              <a:spcAft>
+                <a:spcPct val="0"/>
+              </a:spcAft>
+              <a:buFontTx/>
+              <a:buChar char="•"/>
+            </a:pPr>
+            <a:r>
+              <a:rPr kumimoji="0" lang="en-US" altLang="en-US" sz="1400" b="0" i="0" u="none" strike="noStrike" cap="none" normalizeH="0" baseline="0" dirty="0">
+                <a:ln>
+                  <a:noFill/>
+                </a:ln>
+                <a:effectLst/>
+                <a:latin typeface="Arial" panose="020B0604020202020204" pitchFamily="34" charset="0"/>
+              </a:rPr>
+              <a:t> 32 → 2×ResUnit @64 → ↓</a:t>
+            </a:r>
+          </a:p>
+          <a:p>
+            <a:pPr marL="400050" lvl="1" indent="0" algn="l" eaLnBrk="0" fontAlgn="base" hangingPunct="0">
+              <a:spcBef>
+                <a:spcPct val="0"/>
+              </a:spcBef>
+              <a:spcAft>
+                <a:spcPct val="0"/>
+              </a:spcAft>
+              <a:buFontTx/>
+              <a:buChar char="•"/>
+            </a:pPr>
+            <a:r>
+              <a:rPr kumimoji="0" lang="en-US" altLang="en-US" sz="1400" b="0" i="0" u="none" strike="noStrike" cap="none" normalizeH="0" baseline="0" dirty="0">
+                <a:ln>
+                  <a:noFill/>
+                </a:ln>
+                <a:effectLst/>
+                <a:latin typeface="Arial" panose="020B0604020202020204" pitchFamily="34" charset="0"/>
+              </a:rPr>
+              <a:t> 64 → 2×ResUnit @128 → ↓</a:t>
+            </a:r>
+          </a:p>
+          <a:p>
+            <a:pPr marL="0" marR="0" lvl="0" indent="0" algn="l" defTabSz="914400" rtl="0" eaLnBrk="0" fontAlgn="base" latinLnBrk="0" hangingPunct="0">
+              <a:lnSpc>
+                <a:spcPct val="100000"/>
+              </a:lnSpc>
+              <a:spcBef>
+                <a:spcPct val="0"/>
+              </a:spcBef>
+              <a:spcAft>
+                <a:spcPct val="0"/>
+              </a:spcAft>
+              <a:buClrTx/>
+              <a:buSzTx/>
+              <a:buFontTx/>
+              <a:buChar char="•"/>
+              <a:tabLst/>
+            </a:pPr>
+            <a:r>
+              <a:rPr kumimoji="0" lang="en-US" altLang="en-US" sz="1800" b="1" i="0" u="none" strike="noStrike" cap="none" normalizeH="0" baseline="0" dirty="0">
+                <a:ln>
+                  <a:noFill/>
+                </a:ln>
+                <a:effectLst/>
+                <a:latin typeface="Arial" panose="020B0604020202020204" pitchFamily="34" charset="0"/>
+              </a:rPr>
+              <a:t>Bottleneck</a:t>
+            </a:r>
+            <a:r>
+              <a:rPr kumimoji="0" lang="en-US" altLang="en-US" sz="1800" b="0" i="0" u="none" strike="noStrike" cap="none" normalizeH="0" baseline="0" dirty="0">
+                <a:ln>
+                  <a:noFill/>
+                </a:ln>
+                <a:effectLst/>
+                <a:latin typeface="Arial" panose="020B0604020202020204" pitchFamily="34" charset="0"/>
+              </a:rPr>
+              <a:t> :</a:t>
+            </a:r>
+          </a:p>
+          <a:p>
+            <a:pPr marL="400050" lvl="1" indent="0" algn="l" eaLnBrk="0" fontAlgn="base" hangingPunct="0">
+              <a:spcBef>
+                <a:spcPct val="0"/>
+              </a:spcBef>
+              <a:spcAft>
+                <a:spcPct val="0"/>
+              </a:spcAft>
+              <a:buFontTx/>
+              <a:buChar char="•"/>
+            </a:pPr>
+            <a:r>
+              <a:rPr kumimoji="0" lang="en-US" altLang="en-US" sz="1400" b="0" i="0" u="none" strike="noStrike" cap="none" normalizeH="0" baseline="0" dirty="0">
+                <a:ln>
+                  <a:noFill/>
+                </a:ln>
+                <a:effectLst/>
+                <a:latin typeface="Arial" panose="020B0604020202020204" pitchFamily="34" charset="0"/>
+              </a:rPr>
+              <a:t> 2×ResUnit @256</a:t>
+            </a:r>
+          </a:p>
+          <a:p>
+            <a:pPr marL="0" marR="0" lvl="0" indent="0" algn="l" defTabSz="914400" rtl="0" eaLnBrk="0" fontAlgn="base" latinLnBrk="0" hangingPunct="0">
+              <a:lnSpc>
+                <a:spcPct val="100000"/>
+              </a:lnSpc>
+              <a:spcBef>
+                <a:spcPct val="0"/>
+              </a:spcBef>
+              <a:spcAft>
+                <a:spcPct val="0"/>
+              </a:spcAft>
+              <a:buClrTx/>
+              <a:buSzTx/>
+              <a:buFontTx/>
+              <a:buChar char="•"/>
+              <a:tabLst/>
+            </a:pPr>
+            <a:r>
+              <a:rPr kumimoji="0" lang="en-US" altLang="en-US" sz="1800" b="1" i="0" u="none" strike="noStrike" cap="none" normalizeH="0" baseline="0" dirty="0">
+                <a:ln>
+                  <a:noFill/>
+                </a:ln>
+                <a:effectLst/>
+                <a:latin typeface="Arial" panose="020B0604020202020204" pitchFamily="34" charset="0"/>
+              </a:rPr>
+              <a:t>Decoder</a:t>
+            </a:r>
+            <a:r>
+              <a:rPr kumimoji="0" lang="en-US" altLang="en-US" sz="1800" b="0" i="0" u="none" strike="noStrike" cap="none" normalizeH="0" baseline="0" dirty="0">
+                <a:ln>
+                  <a:noFill/>
+                </a:ln>
+                <a:effectLst/>
+                <a:latin typeface="Arial" panose="020B0604020202020204" pitchFamily="34" charset="0"/>
+              </a:rPr>
+              <a:t>:</a:t>
+            </a:r>
+          </a:p>
+          <a:p>
+            <a:pPr marL="400050" lvl="1" indent="0" algn="l" eaLnBrk="0" fontAlgn="base" hangingPunct="0">
+              <a:spcBef>
+                <a:spcPct val="0"/>
+              </a:spcBef>
+              <a:spcAft>
+                <a:spcPct val="0"/>
+              </a:spcAft>
+              <a:buFontTx/>
+              <a:buChar char="•"/>
+            </a:pPr>
+            <a:r>
+              <a:rPr kumimoji="0" lang="en-US" altLang="en-US" sz="1400" b="0" i="0" u="none" strike="noStrike" cap="none" normalizeH="0" baseline="0" dirty="0">
+                <a:ln>
+                  <a:noFill/>
+                </a:ln>
+                <a:effectLst/>
+                <a:latin typeface="Arial" panose="020B0604020202020204" pitchFamily="34" charset="0"/>
+              </a:rPr>
+              <a:t> ↑ 2×ResUnit @128 ← Skip from step 4</a:t>
+            </a:r>
+          </a:p>
+          <a:p>
+            <a:pPr marL="400050" lvl="1" indent="0" algn="l" eaLnBrk="0" fontAlgn="base" hangingPunct="0">
+              <a:spcBef>
+                <a:spcPct val="0"/>
+              </a:spcBef>
+              <a:spcAft>
+                <a:spcPct val="0"/>
+              </a:spcAft>
+              <a:buFontTx/>
+              <a:buChar char="•"/>
+            </a:pPr>
+            <a:r>
+              <a:rPr kumimoji="0" lang="en-US" altLang="en-US" sz="1400" b="0" i="0" u="none" strike="noStrike" cap="none" normalizeH="0" baseline="0" dirty="0">
+                <a:ln>
+                  <a:noFill/>
+                </a:ln>
+                <a:effectLst/>
+                <a:latin typeface="Arial" panose="020B0604020202020204" pitchFamily="34" charset="0"/>
+              </a:rPr>
+              <a:t> ↑ 2×ResUnit @64 ← Skip from step 3</a:t>
+            </a:r>
+          </a:p>
+          <a:p>
+            <a:pPr marL="400050" lvl="1" indent="0" algn="l" eaLnBrk="0" fontAlgn="base" hangingPunct="0">
+              <a:spcBef>
+                <a:spcPct val="0"/>
+              </a:spcBef>
+              <a:spcAft>
+                <a:spcPct val="0"/>
+              </a:spcAft>
+              <a:buFontTx/>
+              <a:buChar char="•"/>
+            </a:pPr>
+            <a:r>
+              <a:rPr kumimoji="0" lang="en-US" altLang="en-US" sz="1400" b="0" i="0" u="none" strike="noStrike" cap="none" normalizeH="0" baseline="0" dirty="0">
+                <a:ln>
+                  <a:noFill/>
+                </a:ln>
+                <a:effectLst/>
+                <a:latin typeface="Arial" panose="020B0604020202020204" pitchFamily="34" charset="0"/>
+              </a:rPr>
+              <a:t> ↑ 2×ResUnit @32 ← Skip from step 2</a:t>
+            </a:r>
+          </a:p>
+          <a:p>
+            <a:pPr marL="400050" lvl="1" indent="0" algn="l" eaLnBrk="0" fontAlgn="base" hangingPunct="0">
+              <a:spcBef>
+                <a:spcPct val="0"/>
+              </a:spcBef>
+              <a:spcAft>
+                <a:spcPct val="0"/>
+              </a:spcAft>
+              <a:buFontTx/>
+              <a:buChar char="•"/>
+            </a:pPr>
+            <a:r>
+              <a:rPr kumimoji="0" lang="en-US" altLang="en-US" sz="1400" b="0" i="0" u="none" strike="noStrike" cap="none" normalizeH="0" baseline="0" dirty="0">
+                <a:ln>
+                  <a:noFill/>
+                </a:ln>
+                <a:effectLst/>
+                <a:latin typeface="Arial" panose="020B0604020202020204" pitchFamily="34" charset="0"/>
+              </a:rPr>
+              <a:t> ↑ 2×ResUnit @16 ← Skip from step 1</a:t>
+            </a:r>
+          </a:p>
+          <a:p>
+            <a:pPr marL="0" marR="0" lvl="0" indent="0" algn="l" defTabSz="914400" rtl="0" eaLnBrk="0" fontAlgn="base" latinLnBrk="0" hangingPunct="0">
+              <a:lnSpc>
+                <a:spcPct val="100000"/>
+              </a:lnSpc>
+              <a:spcBef>
+                <a:spcPct val="0"/>
+              </a:spcBef>
+              <a:spcAft>
+                <a:spcPct val="0"/>
+              </a:spcAft>
+              <a:buClrTx/>
+              <a:buSzTx/>
+              <a:buFontTx/>
+              <a:buChar char="•"/>
+              <a:tabLst/>
+            </a:pPr>
+            <a:r>
+              <a:rPr kumimoji="0" lang="en-US" altLang="en-US" sz="1800" b="1" i="0" u="none" strike="noStrike" cap="none" normalizeH="0" baseline="0" dirty="0">
+                <a:ln>
+                  <a:noFill/>
+                </a:ln>
+                <a:effectLst/>
+                <a:latin typeface="Arial" panose="020B0604020202020204" pitchFamily="34" charset="0"/>
+              </a:rPr>
+              <a:t>Final</a:t>
+            </a:r>
+            <a:r>
+              <a:rPr kumimoji="0" lang="en-US" altLang="en-US" sz="1800" b="0" i="0" u="none" strike="noStrike" cap="none" normalizeH="0" baseline="0" dirty="0">
+                <a:ln>
+                  <a:noFill/>
+                </a:ln>
+                <a:effectLst/>
+                <a:latin typeface="Arial" panose="020B0604020202020204" pitchFamily="34" charset="0"/>
+              </a:rPr>
+              <a:t>: </a:t>
+            </a:r>
+          </a:p>
+          <a:p>
+            <a:pPr marL="400050" lvl="1" indent="0" algn="l" eaLnBrk="0" fontAlgn="base" hangingPunct="0">
+              <a:spcBef>
+                <a:spcPct val="0"/>
+              </a:spcBef>
+              <a:spcAft>
+                <a:spcPct val="0"/>
+              </a:spcAft>
+              <a:buFontTx/>
+              <a:buChar char="•"/>
+            </a:pPr>
+            <a:r>
+              <a:rPr kumimoji="0" lang="en-US" altLang="en-US" sz="1400" b="0" i="0" u="none" strike="noStrike" cap="none" normalizeH="0" baseline="0" dirty="0">
+                <a:ln>
+                  <a:noFill/>
+                </a:ln>
+                <a:effectLst/>
+                <a:latin typeface="Arial" panose="020B0604020202020204" pitchFamily="34" charset="0"/>
+              </a:rPr>
+              <a:t> 1×1×1 Conv → </a:t>
+            </a:r>
+            <a:r>
+              <a:rPr kumimoji="0" lang="en-US" altLang="en-US" sz="1400" b="0" i="0" u="none" strike="noStrike" cap="none" normalizeH="0" baseline="0" dirty="0" err="1">
+                <a:ln>
+                  <a:noFill/>
+                </a:ln>
+                <a:effectLst/>
+                <a:latin typeface="Arial" panose="020B0604020202020204" pitchFamily="34" charset="0"/>
+              </a:rPr>
+              <a:t>num_classes</a:t>
+            </a:r>
+            <a:r>
+              <a:rPr kumimoji="0" lang="en-US" altLang="en-US" sz="1400" b="0" i="0" u="none" strike="noStrike" cap="none" normalizeH="0" baseline="0" dirty="0">
+                <a:ln>
+                  <a:noFill/>
+                </a:ln>
+                <a:effectLst/>
+                <a:latin typeface="Arial" panose="020B0604020202020204" pitchFamily="34" charset="0"/>
+              </a:rPr>
+              <a:t> (=4) channel output</a:t>
+            </a:r>
+          </a:p>
+        </p:txBody>
+      </p:sp>
+      <p:pic>
+        <p:nvPicPr>
+          <p:cNvPr id="16" name="Picture 15">
+            <a:extLst>
+              <a:ext uri="{FF2B5EF4-FFF2-40B4-BE49-F238E27FC236}">
+                <a16:creationId xmlns:a16="http://schemas.microsoft.com/office/drawing/2014/main" id="{9BEE861B-1757-25ED-AC26-B03BDFA75436}"/>
+              </a:ext>
+            </a:extLst>
+          </p:cNvPr>
+          <p:cNvPicPr>
+            <a:picLocks noChangeAspect="1"/>
+          </p:cNvPicPr>
+          <p:nvPr/>
+        </p:nvPicPr>
+        <p:blipFill>
+          <a:blip r:embed="rId2"/>
+          <a:stretch>
+            <a:fillRect/>
+          </a:stretch>
+        </p:blipFill>
+        <p:spPr>
+          <a:xfrm>
+            <a:off x="6422794" y="1044700"/>
+            <a:ext cx="2494009" cy="1679755"/>
+          </a:xfrm>
+          <a:prstGeom prst="rect">
+            <a:avLst/>
+          </a:prstGeom>
+        </p:spPr>
+      </p:pic>
+    </p:spTree>
+    <p:extLst>
+      <p:ext uri="{BB962C8B-B14F-4D97-AF65-F5344CB8AC3E}">
+        <p14:creationId xmlns:p14="http://schemas.microsoft.com/office/powerpoint/2010/main" val="474185227"/>
+      </p:ext>
+    </p:extLst>
+  </p:cSld>
+  <p:clrMapOvr>
+    <a:masterClrMapping/>
+  </p:clrMapOvr>
+</p:sld>
+</file>
+
+<file path=ppt/slides/slide13.xml><?xml version="1.0" encoding="utf-8"?>
+<p:sld xmlns:a="http://schemas.openxmlformats.org/drawingml/2006/main" xmlns:r="http://schemas.openxmlformats.org/officeDocument/2006/relationships" xmlns:p="http://schemas.openxmlformats.org/presentationml/2006/main">
+  <p:cSld>
+    <p:spTree>
+      <p:nvGrpSpPr>
+        <p:cNvPr id="1" name="">
+          <a:extLst>
+            <a:ext uri="{FF2B5EF4-FFF2-40B4-BE49-F238E27FC236}">
+              <a16:creationId xmlns:a16="http://schemas.microsoft.com/office/drawing/2014/main" id="{E1D8746B-E09B-F776-18FE-35BCDC90844D}"/>
+            </a:ext>
+          </a:extLst>
+        </p:cNvPr>
+        <p:cNvGrpSpPr/>
+        <p:nvPr/>
+      </p:nvGrpSpPr>
+      <p:grpSpPr>
+        <a:xfrm>
+          <a:off x="0" y="0"/>
+          <a:ext cx="0" cy="0"/>
+          <a:chOff x="0" y="0"/>
+          <a:chExt cx="0" cy="0"/>
+        </a:xfrm>
+      </p:grpSpPr>
+      <p:sp>
+        <p:nvSpPr>
+          <p:cNvPr id="4" name="Title 3">
+            <a:extLst>
+              <a:ext uri="{FF2B5EF4-FFF2-40B4-BE49-F238E27FC236}">
+                <a16:creationId xmlns:a16="http://schemas.microsoft.com/office/drawing/2014/main" id="{CE9D7C6F-8439-5969-DD85-6C1064B51455}"/>
+              </a:ext>
+            </a:extLst>
+          </p:cNvPr>
+          <p:cNvSpPr>
+            <a:spLocks noGrp="1"/>
+          </p:cNvSpPr>
+          <p:nvPr>
+            <p:ph type="title"/>
+          </p:nvPr>
+        </p:nvSpPr>
+        <p:spPr>
+          <a:xfrm>
+            <a:off x="3350360" y="233644"/>
+            <a:ext cx="5548109" cy="734703"/>
+          </a:xfrm>
+          <a:noFill/>
+        </p:spPr>
+        <p:txBody>
+          <a:bodyPr>
+            <a:normAutofit fontScale="90000"/>
+          </a:bodyPr>
+          <a:lstStyle/>
+          <a:p>
+            <a:pPr algn="l"/>
+            <a:r>
+              <a:rPr lang="en-US" dirty="0">
+                <a:solidFill>
+                  <a:schemeClr val="accent1">
+                    <a:lumMod val="20000"/>
+                    <a:lumOff val="80000"/>
+                  </a:schemeClr>
+                </a:solidFill>
+              </a:rPr>
+              <a:t>Monai 3D UNET Batch </a:t>
+            </a:r>
+            <a:r>
+              <a:rPr lang="en-US" dirty="0" err="1">
+                <a:solidFill>
+                  <a:schemeClr val="accent1">
+                    <a:lumMod val="20000"/>
+                    <a:lumOff val="80000"/>
+                  </a:schemeClr>
+                </a:solidFill>
+              </a:rPr>
+              <a:t>Inefrence</a:t>
+            </a:r>
+            <a:endParaRPr lang="en-US" dirty="0">
+              <a:solidFill>
+                <a:schemeClr val="accent1">
+                  <a:lumMod val="20000"/>
+                  <a:lumOff val="80000"/>
+                </a:schemeClr>
+              </a:solidFill>
+            </a:endParaRPr>
+          </a:p>
+        </p:txBody>
+      </p:sp>
+      <p:sp>
+        <p:nvSpPr>
+          <p:cNvPr id="3" name="Content Placeholder 2">
+            <a:extLst>
+              <a:ext uri="{FF2B5EF4-FFF2-40B4-BE49-F238E27FC236}">
+                <a16:creationId xmlns:a16="http://schemas.microsoft.com/office/drawing/2014/main" id="{8DA30D09-91D0-5ACA-2061-7FA54D5DB596}"/>
+              </a:ext>
+            </a:extLst>
+          </p:cNvPr>
+          <p:cNvSpPr>
+            <a:spLocks noGrp="1" noChangeArrowheads="1"/>
+          </p:cNvSpPr>
+          <p:nvPr>
+            <p:ph sz="half" idx="2"/>
+          </p:nvPr>
+        </p:nvSpPr>
+        <p:spPr bwMode="auto">
+          <a:xfrm>
+            <a:off x="125752" y="845237"/>
+            <a:ext cx="8892495" cy="4278094"/>
+          </a:xfrm>
+          <a:prstGeom prst="rect">
+            <a:avLst/>
+          </a:prstGeom>
+          <a:noFill/>
+          <a:ln>
+            <a:noFill/>
+          </a:ln>
+          <a:effectLst/>
+          <a:extLst>
+            <a:ext uri="{909E8E84-426E-40DD-AFC4-6F175D3DCCD1}">
+              <a14:hiddenFill xmlns:a14="http://schemas.microsoft.com/office/drawing/2010/main">
+                <a:solidFill>
+                  <a:schemeClr val="accent1"/>
+                </a:solidFill>
+              </a14:hiddenFill>
+            </a:ext>
+            <a:ext uri="{91240B29-F687-4F45-9708-019B960494DF}">
+              <a14:hiddenLine xmlns:a14="http://schemas.microsoft.com/office/drawing/2010/main" w="9525">
+                <a:solidFill>
+                  <a:schemeClr val="tx1"/>
+                </a:solidFill>
+                <a:miter lim="800000"/>
+                <a:headEnd/>
+                <a:tailEnd/>
+              </a14:hiddenLine>
+            </a:ext>
+            <a:ext uri="{AF507438-7753-43E0-B8FC-AC1667EBCBE1}">
+              <a14:hiddenEffects xmlns:a14="http://schemas.microsoft.com/office/drawing/2010/main">
+                <a:effectLst>
+                  <a:outerShdw dist="35921" dir="2700000" algn="ctr" rotWithShape="0">
+                    <a:schemeClr val="bg2"/>
+                  </a:outerShdw>
+                </a:effectLst>
+              </a14:hiddenEffects>
+            </a:ext>
+          </a:extLst>
+        </p:spPr>
+        <p:txBody>
+          <a:bodyPr vert="horz" wrap="square" lIns="91440" tIns="45720" rIns="91440" bIns="45720" numCol="1" anchor="ctr" anchorCtr="0" compatLnSpc="1">
+            <a:prstTxWarp prst="textNoShape">
+              <a:avLst/>
+            </a:prstTxWarp>
+            <a:spAutoFit/>
+          </a:bodyPr>
+          <a:lstStyle/>
+          <a:p>
+            <a:pPr marL="0" marR="0" lvl="0" indent="0" algn="l" defTabSz="914400" rtl="0" eaLnBrk="0" fontAlgn="base" latinLnBrk="0" hangingPunct="0">
+              <a:lnSpc>
+                <a:spcPct val="100000"/>
+              </a:lnSpc>
+              <a:spcBef>
+                <a:spcPct val="0"/>
+              </a:spcBef>
+              <a:spcAft>
+                <a:spcPct val="0"/>
+              </a:spcAft>
+              <a:buClrTx/>
+              <a:buSzTx/>
+              <a:buFontTx/>
+              <a:buChar char="•"/>
+              <a:tabLst/>
+            </a:pPr>
+            <a:endParaRPr lang="en-US" altLang="en-US" sz="1600" b="1" dirty="0">
+              <a:latin typeface="Arial" panose="020B0604020202020204" pitchFamily="34" charset="0"/>
+            </a:endParaRPr>
+          </a:p>
+          <a:p>
+            <a:pPr marL="0" marR="0" lvl="0" indent="0" algn="l" defTabSz="914400" rtl="0" eaLnBrk="0" fontAlgn="base" latinLnBrk="0" hangingPunct="0">
+              <a:lnSpc>
+                <a:spcPct val="100000"/>
+              </a:lnSpc>
+              <a:spcBef>
+                <a:spcPct val="0"/>
+              </a:spcBef>
+              <a:spcAft>
+                <a:spcPct val="0"/>
+              </a:spcAft>
+              <a:buClrTx/>
+              <a:buSzTx/>
+              <a:buFontTx/>
+              <a:buChar char="•"/>
+              <a:tabLst/>
+            </a:pPr>
+            <a:r>
+              <a:rPr lang="en-US" altLang="en-US" sz="1600" b="1" dirty="0">
+                <a:latin typeface="Arial" panose="020B0604020202020204" pitchFamily="34" charset="0"/>
+              </a:rPr>
+              <a:t> Se</a:t>
+            </a:r>
+            <a:r>
+              <a:rPr kumimoji="0" lang="en-US" altLang="en-US" sz="1600" b="1" i="0" u="none" strike="noStrike" cap="none" normalizeH="0" baseline="0" dirty="0">
+                <a:ln>
+                  <a:noFill/>
+                </a:ln>
+                <a:effectLst/>
+                <a:latin typeface="Arial" panose="020B0604020202020204" pitchFamily="34" charset="0"/>
+              </a:rPr>
+              <a:t>tup directories</a:t>
+            </a:r>
+            <a:r>
+              <a:rPr kumimoji="0" lang="en-US" altLang="en-US" sz="1600" b="0" i="0" u="none" strike="noStrike" cap="none" normalizeH="0" baseline="0" dirty="0">
+                <a:ln>
+                  <a:noFill/>
+                </a:ln>
+                <a:effectLst/>
+                <a:latin typeface="Arial" panose="020B0604020202020204" pitchFamily="34" charset="0"/>
+              </a:rPr>
+              <a:t> for tumor or healthy test scans and their corresponding output folders, creating them if needed.</a:t>
+            </a:r>
+          </a:p>
+          <a:p>
+            <a:pPr marL="0" marR="0" lvl="0" indent="0" algn="l" defTabSz="914400" rtl="0" eaLnBrk="0" fontAlgn="base" latinLnBrk="0" hangingPunct="0">
+              <a:lnSpc>
+                <a:spcPct val="100000"/>
+              </a:lnSpc>
+              <a:spcBef>
+                <a:spcPct val="0"/>
+              </a:spcBef>
+              <a:spcAft>
+                <a:spcPct val="0"/>
+              </a:spcAft>
+              <a:buClrTx/>
+              <a:buSzTx/>
+              <a:buFontTx/>
+              <a:buChar char="•"/>
+              <a:tabLst/>
+            </a:pPr>
+            <a:endParaRPr kumimoji="0" lang="en-US" altLang="en-US" sz="1600" b="0" i="0" u="none" strike="noStrike" cap="none" normalizeH="0" baseline="0" dirty="0">
+              <a:ln>
+                <a:noFill/>
+              </a:ln>
+              <a:effectLst/>
+              <a:latin typeface="Arial" panose="020B0604020202020204" pitchFamily="34" charset="0"/>
+            </a:endParaRPr>
+          </a:p>
+          <a:p>
+            <a:pPr marL="0" marR="0" lvl="0" indent="0" algn="l" defTabSz="914400" rtl="0" eaLnBrk="0" fontAlgn="base" latinLnBrk="0" hangingPunct="0">
+              <a:lnSpc>
+                <a:spcPct val="100000"/>
+              </a:lnSpc>
+              <a:spcBef>
+                <a:spcPct val="0"/>
+              </a:spcBef>
+              <a:spcAft>
+                <a:spcPct val="0"/>
+              </a:spcAft>
+              <a:buClrTx/>
+              <a:buSzTx/>
+              <a:buFontTx/>
+              <a:buChar char="•"/>
+              <a:tabLst/>
+            </a:pPr>
+            <a:r>
+              <a:rPr kumimoji="0" lang="en-US" altLang="en-US" sz="1600" b="1" i="0" u="none" strike="noStrike" cap="none" normalizeH="0" baseline="0" dirty="0">
+                <a:ln>
+                  <a:noFill/>
+                </a:ln>
+                <a:effectLst/>
+                <a:latin typeface="Arial" panose="020B0604020202020204" pitchFamily="34" charset="0"/>
+              </a:rPr>
+              <a:t> Load the trained model</a:t>
+            </a:r>
+            <a:r>
+              <a:rPr kumimoji="0" lang="en-US" altLang="en-US" sz="1600" b="0" i="0" u="none" strike="noStrike" cap="none" normalizeH="0" baseline="0" dirty="0">
+                <a:ln>
+                  <a:noFill/>
+                </a:ln>
+                <a:effectLst/>
+                <a:latin typeface="Arial" panose="020B0604020202020204" pitchFamily="34" charset="0"/>
+              </a:rPr>
+              <a:t> once from </a:t>
+            </a:r>
+            <a:r>
+              <a:rPr kumimoji="0" lang="en-US" altLang="en-US" sz="1600" b="1" i="0" u="none" strike="noStrike" cap="none" normalizeH="0" baseline="0" dirty="0" err="1">
+                <a:ln>
+                  <a:noFill/>
+                </a:ln>
+                <a:effectLst/>
+                <a:latin typeface="Arial Unicode MS"/>
+              </a:rPr>
+              <a:t>checkpoint_path</a:t>
+            </a:r>
+            <a:r>
+              <a:rPr kumimoji="0" lang="en-US" altLang="en-US" sz="1600" b="1" i="0" u="none" strike="noStrike" cap="none" normalizeH="0" baseline="0" dirty="0">
+                <a:ln>
+                  <a:noFill/>
+                </a:ln>
+                <a:effectLst/>
+              </a:rPr>
+              <a:t> </a:t>
+            </a:r>
+            <a:r>
+              <a:rPr kumimoji="0" lang="en-US" altLang="en-US" sz="1600" b="0" i="0" u="none" strike="noStrike" cap="none" normalizeH="0" baseline="0" dirty="0">
+                <a:ln>
+                  <a:noFill/>
+                </a:ln>
+                <a:effectLst/>
+              </a:rPr>
+              <a:t>and switch to evaluation mode.</a:t>
+            </a:r>
+          </a:p>
+          <a:p>
+            <a:pPr marL="0" marR="0" lvl="0" indent="0" algn="l" defTabSz="914400" rtl="0" eaLnBrk="0" fontAlgn="base" latinLnBrk="0" hangingPunct="0">
+              <a:lnSpc>
+                <a:spcPct val="100000"/>
+              </a:lnSpc>
+              <a:spcBef>
+                <a:spcPct val="0"/>
+              </a:spcBef>
+              <a:spcAft>
+                <a:spcPct val="0"/>
+              </a:spcAft>
+              <a:buClrTx/>
+              <a:buSzTx/>
+              <a:buFontTx/>
+              <a:buChar char="•"/>
+              <a:tabLst/>
+            </a:pPr>
+            <a:endParaRPr kumimoji="0" lang="en-US" altLang="en-US" sz="1600" b="0" i="0" u="none" strike="noStrike" cap="none" normalizeH="0" baseline="0" dirty="0">
+              <a:ln>
+                <a:noFill/>
+              </a:ln>
+              <a:effectLst/>
+              <a:latin typeface="Arial" panose="020B0604020202020204" pitchFamily="34" charset="0"/>
+            </a:endParaRPr>
+          </a:p>
+          <a:p>
+            <a:pPr marL="0" marR="0" lvl="0" indent="0" algn="l" defTabSz="914400" rtl="0" eaLnBrk="0" fontAlgn="base" latinLnBrk="0" hangingPunct="0">
+              <a:lnSpc>
+                <a:spcPct val="100000"/>
+              </a:lnSpc>
+              <a:spcBef>
+                <a:spcPct val="0"/>
+              </a:spcBef>
+              <a:spcAft>
+                <a:spcPct val="0"/>
+              </a:spcAft>
+              <a:buClrTx/>
+              <a:buSzTx/>
+              <a:buFontTx/>
+              <a:buChar char="•"/>
+              <a:tabLst/>
+            </a:pPr>
+            <a:r>
+              <a:rPr kumimoji="0" lang="en-US" altLang="en-US" sz="1600" b="1" i="0" u="none" strike="noStrike" cap="none" normalizeH="0" baseline="0" dirty="0">
+                <a:ln>
+                  <a:noFill/>
+                </a:ln>
+                <a:effectLst/>
+                <a:latin typeface="Arial" panose="020B0604020202020204" pitchFamily="34" charset="0"/>
+              </a:rPr>
+              <a:t> Loop over all </a:t>
+            </a:r>
+            <a:r>
+              <a:rPr kumimoji="0" lang="en-US" altLang="en-US" sz="1600" b="1" i="0" u="none" strike="noStrike" cap="none" normalizeH="0" baseline="0" dirty="0">
+                <a:ln>
+                  <a:noFill/>
+                </a:ln>
+                <a:effectLst/>
+                <a:latin typeface="Arial Unicode MS"/>
+              </a:rPr>
+              <a:t>*-T1.nii.gz</a:t>
+            </a:r>
+            <a:r>
+              <a:rPr kumimoji="0" lang="en-US" altLang="en-US" sz="1600" b="1" i="0" u="none" strike="noStrike" cap="none" normalizeH="0" baseline="0" dirty="0">
+                <a:ln>
+                  <a:noFill/>
+                </a:ln>
+                <a:effectLst/>
+              </a:rPr>
+              <a:t> files</a:t>
+            </a:r>
+            <a:r>
+              <a:rPr kumimoji="0" lang="en-US" altLang="en-US" sz="1600" b="0" i="0" u="none" strike="noStrike" cap="none" normalizeH="0" baseline="0" dirty="0">
+                <a:ln>
+                  <a:noFill/>
+                </a:ln>
+                <a:effectLst/>
+                <a:latin typeface="Arial" panose="020B0604020202020204" pitchFamily="34" charset="0"/>
+              </a:rPr>
+              <a:t> in </a:t>
+            </a:r>
+            <a:r>
+              <a:rPr kumimoji="0" lang="en-US" altLang="en-US" sz="1600" b="0" i="0" u="none" strike="noStrike" cap="none" normalizeH="0" baseline="0" dirty="0" err="1">
+                <a:ln>
+                  <a:noFill/>
+                </a:ln>
+                <a:effectLst/>
+                <a:latin typeface="Arial Unicode MS"/>
+              </a:rPr>
+              <a:t>input_dir</a:t>
+            </a:r>
+            <a:r>
+              <a:rPr kumimoji="0" lang="en-US" altLang="en-US" sz="1600" b="0" i="0" u="none" strike="noStrike" cap="none" normalizeH="0" baseline="0" dirty="0">
+                <a:ln>
+                  <a:noFill/>
+                </a:ln>
+                <a:effectLst/>
+              </a:rPr>
+              <a:t>, stripping the suffix to build each output filename.</a:t>
+            </a:r>
+          </a:p>
+          <a:p>
+            <a:pPr marL="0" marR="0" lvl="0" indent="0" algn="l" defTabSz="914400" rtl="0" eaLnBrk="0" fontAlgn="base" latinLnBrk="0" hangingPunct="0">
+              <a:lnSpc>
+                <a:spcPct val="100000"/>
+              </a:lnSpc>
+              <a:spcBef>
+                <a:spcPct val="0"/>
+              </a:spcBef>
+              <a:spcAft>
+                <a:spcPct val="0"/>
+              </a:spcAft>
+              <a:buClrTx/>
+              <a:buSzTx/>
+              <a:buFontTx/>
+              <a:buChar char="•"/>
+              <a:tabLst/>
+            </a:pPr>
+            <a:endParaRPr kumimoji="0" lang="en-US" altLang="en-US" sz="1600" b="0" i="0" u="none" strike="noStrike" cap="none" normalizeH="0" baseline="0" dirty="0">
+              <a:ln>
+                <a:noFill/>
+              </a:ln>
+              <a:effectLst/>
+              <a:latin typeface="Arial" panose="020B0604020202020204" pitchFamily="34" charset="0"/>
+            </a:endParaRPr>
+          </a:p>
+          <a:p>
+            <a:pPr marL="0" marR="0" lvl="0" indent="0" algn="l" defTabSz="914400" rtl="0" eaLnBrk="0" fontAlgn="base" latinLnBrk="0" hangingPunct="0">
+              <a:lnSpc>
+                <a:spcPct val="100000"/>
+              </a:lnSpc>
+              <a:spcBef>
+                <a:spcPct val="0"/>
+              </a:spcBef>
+              <a:spcAft>
+                <a:spcPct val="0"/>
+              </a:spcAft>
+              <a:buClrTx/>
+              <a:buSzTx/>
+              <a:buFontTx/>
+              <a:buChar char="•"/>
+              <a:tabLst/>
+            </a:pPr>
+            <a:r>
+              <a:rPr kumimoji="0" lang="en-US" altLang="en-US" sz="1600" b="1" i="0" u="none" strike="noStrike" cap="none" normalizeH="0" baseline="0" dirty="0">
+                <a:ln>
+                  <a:noFill/>
+                </a:ln>
+                <a:effectLst/>
+                <a:latin typeface="Arial" panose="020B0604020202020204" pitchFamily="34" charset="0"/>
+              </a:rPr>
+              <a:t> Read each volume</a:t>
+            </a:r>
+            <a:r>
+              <a:rPr kumimoji="0" lang="en-US" altLang="en-US" sz="1600" b="0" i="0" u="none" strike="noStrike" cap="none" normalizeH="0" baseline="0" dirty="0">
+                <a:ln>
+                  <a:noFill/>
+                </a:ln>
+                <a:effectLst/>
+                <a:latin typeface="Arial" panose="020B0604020202020204" pitchFamily="34" charset="0"/>
+              </a:rPr>
+              <a:t> with </a:t>
+            </a:r>
+            <a:r>
+              <a:rPr kumimoji="0" lang="en-US" altLang="en-US" sz="1600" b="0" i="0" u="none" strike="noStrike" cap="none" normalizeH="0" baseline="0" dirty="0" err="1">
+                <a:ln>
+                  <a:noFill/>
+                </a:ln>
+                <a:effectLst/>
+                <a:latin typeface="Arial" panose="020B0604020202020204" pitchFamily="34" charset="0"/>
+              </a:rPr>
+              <a:t>SimpleITK</a:t>
+            </a:r>
+            <a:r>
+              <a:rPr kumimoji="0" lang="en-US" altLang="en-US" sz="1600" b="0" i="0" u="none" strike="noStrike" cap="none" normalizeH="0" baseline="0" dirty="0">
+                <a:ln>
+                  <a:noFill/>
+                </a:ln>
+                <a:effectLst/>
+                <a:latin typeface="Arial" panose="020B0604020202020204" pitchFamily="34" charset="0"/>
+              </a:rPr>
+              <a:t>, convert to a NumPy array, and </a:t>
+            </a:r>
+            <a:r>
+              <a:rPr kumimoji="0" lang="en-US" altLang="en-US" sz="1600" b="1" i="0" u="none" strike="noStrike" cap="none" normalizeH="0" baseline="0" dirty="0">
+                <a:ln>
+                  <a:noFill/>
+                </a:ln>
+                <a:effectLst/>
+                <a:latin typeface="Arial" panose="020B0604020202020204" pitchFamily="34" charset="0"/>
+              </a:rPr>
+              <a:t>z-score normalize</a:t>
+            </a:r>
+            <a:r>
+              <a:rPr kumimoji="0" lang="en-US" altLang="en-US" sz="1600" b="0" i="0" u="none" strike="noStrike" cap="none" normalizeH="0" baseline="0" dirty="0">
+                <a:ln>
+                  <a:noFill/>
+                </a:ln>
+                <a:effectLst/>
+                <a:latin typeface="Arial" panose="020B0604020202020204" pitchFamily="34" charset="0"/>
+              </a:rPr>
+              <a:t> it.</a:t>
+            </a:r>
+          </a:p>
+          <a:p>
+            <a:pPr marL="0" marR="0" lvl="0" indent="0" algn="l" defTabSz="914400" rtl="0" eaLnBrk="0" fontAlgn="base" latinLnBrk="0" hangingPunct="0">
+              <a:lnSpc>
+                <a:spcPct val="100000"/>
+              </a:lnSpc>
+              <a:spcBef>
+                <a:spcPct val="0"/>
+              </a:spcBef>
+              <a:spcAft>
+                <a:spcPct val="0"/>
+              </a:spcAft>
+              <a:buClrTx/>
+              <a:buSzTx/>
+              <a:buFontTx/>
+              <a:buChar char="•"/>
+              <a:tabLst/>
+            </a:pPr>
+            <a:endParaRPr kumimoji="0" lang="en-US" altLang="en-US" sz="1600" b="0" i="0" u="none" strike="noStrike" cap="none" normalizeH="0" baseline="0" dirty="0">
+              <a:ln>
+                <a:noFill/>
+              </a:ln>
+              <a:effectLst/>
+              <a:latin typeface="Arial" panose="020B0604020202020204" pitchFamily="34" charset="0"/>
+            </a:endParaRPr>
+          </a:p>
+          <a:p>
+            <a:pPr marL="0" marR="0" lvl="0" indent="0" algn="l" defTabSz="914400" rtl="0" eaLnBrk="0" fontAlgn="base" latinLnBrk="0" hangingPunct="0">
+              <a:lnSpc>
+                <a:spcPct val="100000"/>
+              </a:lnSpc>
+              <a:spcBef>
+                <a:spcPct val="0"/>
+              </a:spcBef>
+              <a:spcAft>
+                <a:spcPct val="0"/>
+              </a:spcAft>
+              <a:buClrTx/>
+              <a:buSzTx/>
+              <a:buFontTx/>
+              <a:buChar char="•"/>
+              <a:tabLst/>
+            </a:pPr>
+            <a:r>
+              <a:rPr kumimoji="0" lang="en-US" altLang="en-US" sz="1600" b="1" i="0" u="none" strike="noStrike" cap="none" normalizeH="0" baseline="0" dirty="0">
+                <a:ln>
+                  <a:noFill/>
+                </a:ln>
+                <a:effectLst/>
+                <a:latin typeface="Arial" panose="020B0604020202020204" pitchFamily="34" charset="0"/>
+              </a:rPr>
+              <a:t> Convert</a:t>
+            </a:r>
+            <a:r>
+              <a:rPr kumimoji="0" lang="en-US" altLang="en-US" sz="1600" b="0" i="0" u="none" strike="noStrike" cap="none" normalizeH="0" baseline="0" dirty="0">
+                <a:ln>
+                  <a:noFill/>
+                </a:ln>
+                <a:effectLst/>
+                <a:latin typeface="Arial" panose="020B0604020202020204" pitchFamily="34" charset="0"/>
+              </a:rPr>
+              <a:t> the array to a 1×1×D×H×W </a:t>
+            </a:r>
+            <a:r>
+              <a:rPr kumimoji="0" lang="en-US" altLang="en-US" sz="1600" b="0" i="0" u="none" strike="noStrike" cap="none" normalizeH="0" baseline="0" dirty="0" err="1">
+                <a:ln>
+                  <a:noFill/>
+                </a:ln>
+                <a:effectLst/>
+                <a:latin typeface="Arial" panose="020B0604020202020204" pitchFamily="34" charset="0"/>
+              </a:rPr>
+              <a:t>PyTorch</a:t>
+            </a:r>
+            <a:r>
+              <a:rPr kumimoji="0" lang="en-US" altLang="en-US" sz="1600" b="0" i="0" u="none" strike="noStrike" cap="none" normalizeH="0" baseline="0" dirty="0">
+                <a:ln>
+                  <a:noFill/>
+                </a:ln>
+                <a:effectLst/>
+                <a:latin typeface="Arial" panose="020B0604020202020204" pitchFamily="34" charset="0"/>
+              </a:rPr>
+              <a:t> tensor on the chosen device and </a:t>
+            </a:r>
+            <a:r>
+              <a:rPr kumimoji="0" lang="en-US" altLang="en-US" sz="1600" b="1" i="0" u="none" strike="noStrike" cap="none" normalizeH="0" baseline="0" dirty="0">
+                <a:ln>
+                  <a:noFill/>
+                </a:ln>
+                <a:effectLst/>
+                <a:latin typeface="Arial" panose="020B0604020202020204" pitchFamily="34" charset="0"/>
+              </a:rPr>
+              <a:t>run inference</a:t>
+            </a:r>
+            <a:r>
+              <a:rPr kumimoji="0" lang="en-US" altLang="en-US" sz="1600" b="0" i="0" u="none" strike="noStrike" cap="none" normalizeH="0" baseline="0" dirty="0">
+                <a:ln>
+                  <a:noFill/>
+                </a:ln>
+                <a:effectLst/>
+                <a:latin typeface="Arial" panose="020B0604020202020204" pitchFamily="34" charset="0"/>
+              </a:rPr>
+              <a:t> under </a:t>
+            </a:r>
+            <a:r>
+              <a:rPr kumimoji="0" lang="en-US" altLang="en-US" sz="1600" b="0" i="0" u="none" strike="noStrike" cap="none" normalizeH="0" baseline="0" dirty="0" err="1">
+                <a:ln>
+                  <a:noFill/>
+                </a:ln>
+                <a:effectLst/>
+                <a:latin typeface="Arial Unicode MS"/>
+              </a:rPr>
+              <a:t>torch.no_grad</a:t>
+            </a:r>
+            <a:r>
+              <a:rPr kumimoji="0" lang="en-US" altLang="en-US" sz="1600" b="0" i="0" u="none" strike="noStrike" cap="none" normalizeH="0" baseline="0" dirty="0">
+                <a:ln>
+                  <a:noFill/>
+                </a:ln>
+                <a:effectLst/>
+                <a:latin typeface="Arial Unicode MS"/>
+              </a:rPr>
+              <a:t>()</a:t>
+            </a:r>
+            <a:r>
+              <a:rPr kumimoji="0" lang="en-US" altLang="en-US" sz="1600" b="0" i="0" u="none" strike="noStrike" cap="none" normalizeH="0" baseline="0" dirty="0">
+                <a:ln>
+                  <a:noFill/>
+                </a:ln>
+                <a:effectLst/>
+              </a:rPr>
+              <a:t>.</a:t>
+            </a:r>
+          </a:p>
+          <a:p>
+            <a:pPr marL="0" marR="0" lvl="0" indent="0" algn="l" defTabSz="914400" rtl="0" eaLnBrk="0" fontAlgn="base" latinLnBrk="0" hangingPunct="0">
+              <a:lnSpc>
+                <a:spcPct val="100000"/>
+              </a:lnSpc>
+              <a:spcBef>
+                <a:spcPct val="0"/>
+              </a:spcBef>
+              <a:spcAft>
+                <a:spcPct val="0"/>
+              </a:spcAft>
+              <a:buClrTx/>
+              <a:buSzTx/>
+              <a:buFontTx/>
+              <a:buChar char="•"/>
+              <a:tabLst/>
+            </a:pPr>
+            <a:endParaRPr kumimoji="0" lang="en-US" altLang="en-US" sz="1600" b="0" i="0" u="none" strike="noStrike" cap="none" normalizeH="0" baseline="0" dirty="0">
+              <a:ln>
+                <a:noFill/>
+              </a:ln>
+              <a:effectLst/>
+              <a:latin typeface="Arial" panose="020B0604020202020204" pitchFamily="34" charset="0"/>
+            </a:endParaRPr>
+          </a:p>
+          <a:p>
+            <a:pPr marL="0" marR="0" lvl="0" indent="0" algn="l" defTabSz="914400" rtl="0" eaLnBrk="0" fontAlgn="base" latinLnBrk="0" hangingPunct="0">
+              <a:lnSpc>
+                <a:spcPct val="100000"/>
+              </a:lnSpc>
+              <a:spcBef>
+                <a:spcPct val="0"/>
+              </a:spcBef>
+              <a:spcAft>
+                <a:spcPct val="0"/>
+              </a:spcAft>
+              <a:buClrTx/>
+              <a:buSzTx/>
+              <a:buFontTx/>
+              <a:buChar char="•"/>
+              <a:tabLst/>
+            </a:pPr>
+            <a:r>
+              <a:rPr kumimoji="0" lang="en-US" altLang="en-US" sz="1600" b="1" i="0" u="none" strike="noStrike" cap="none" normalizeH="0" baseline="0" dirty="0">
+                <a:ln>
+                  <a:noFill/>
+                </a:ln>
+                <a:effectLst/>
+                <a:latin typeface="Arial" panose="020B0604020202020204" pitchFamily="34" charset="0"/>
+              </a:rPr>
+              <a:t> Compute the segmentation</a:t>
+            </a:r>
+            <a:r>
+              <a:rPr kumimoji="0" lang="en-US" altLang="en-US" sz="1600" b="0" i="0" u="none" strike="noStrike" cap="none" normalizeH="0" baseline="0" dirty="0">
+                <a:ln>
+                  <a:noFill/>
+                </a:ln>
+                <a:effectLst/>
+                <a:latin typeface="Arial" panose="020B0604020202020204" pitchFamily="34" charset="0"/>
+              </a:rPr>
+              <a:t> by taking </a:t>
+            </a:r>
+            <a:r>
+              <a:rPr kumimoji="0" lang="en-US" altLang="en-US" sz="1600" b="1" i="0" u="none" strike="noStrike" cap="none" normalizeH="0" baseline="0" dirty="0">
+                <a:ln>
+                  <a:noFill/>
+                </a:ln>
+                <a:effectLst/>
+                <a:latin typeface="Arial Unicode MS"/>
+              </a:rPr>
+              <a:t>argmax</a:t>
+            </a:r>
+            <a:r>
+              <a:rPr kumimoji="0" lang="en-US" altLang="en-US" sz="1600" b="0" i="0" u="none" strike="noStrike" cap="none" normalizeH="0" baseline="0" dirty="0">
+                <a:ln>
+                  <a:noFill/>
+                </a:ln>
+                <a:effectLst/>
+              </a:rPr>
+              <a:t> over the </a:t>
+            </a:r>
+            <a:r>
+              <a:rPr kumimoji="0" lang="en-US" altLang="en-US" sz="1600" b="1" i="0" u="none" strike="noStrike" cap="none" normalizeH="0" baseline="0" dirty="0" err="1">
+                <a:ln>
+                  <a:noFill/>
+                </a:ln>
+                <a:effectLst/>
+              </a:rPr>
+              <a:t>softmax</a:t>
+            </a:r>
+            <a:r>
+              <a:rPr kumimoji="0" lang="en-US" altLang="en-US" sz="1600" b="0" i="0" u="none" strike="noStrike" cap="none" normalizeH="0" baseline="0" dirty="0">
+                <a:ln>
+                  <a:noFill/>
+                </a:ln>
+                <a:effectLst/>
+              </a:rPr>
+              <a:t> channels.</a:t>
+            </a:r>
+          </a:p>
+          <a:p>
+            <a:pPr marL="0" marR="0" lvl="0" indent="0" algn="l" defTabSz="914400" rtl="0" eaLnBrk="0" fontAlgn="base" latinLnBrk="0" hangingPunct="0">
+              <a:lnSpc>
+                <a:spcPct val="100000"/>
+              </a:lnSpc>
+              <a:spcBef>
+                <a:spcPct val="0"/>
+              </a:spcBef>
+              <a:spcAft>
+                <a:spcPct val="0"/>
+              </a:spcAft>
+              <a:buClrTx/>
+              <a:buSzTx/>
+              <a:buFontTx/>
+              <a:buChar char="•"/>
+              <a:tabLst/>
+            </a:pPr>
+            <a:endParaRPr kumimoji="0" lang="en-US" altLang="en-US" sz="1600" b="0" i="0" u="none" strike="noStrike" cap="none" normalizeH="0" baseline="0" dirty="0">
+              <a:ln>
+                <a:noFill/>
+              </a:ln>
+              <a:effectLst/>
+              <a:latin typeface="Arial" panose="020B0604020202020204" pitchFamily="34" charset="0"/>
+            </a:endParaRPr>
+          </a:p>
+          <a:p>
+            <a:pPr marL="0" marR="0" lvl="0" indent="0" algn="l" defTabSz="914400" rtl="0" eaLnBrk="0" fontAlgn="base" latinLnBrk="0" hangingPunct="0">
+              <a:lnSpc>
+                <a:spcPct val="100000"/>
+              </a:lnSpc>
+              <a:spcBef>
+                <a:spcPct val="0"/>
+              </a:spcBef>
+              <a:spcAft>
+                <a:spcPct val="0"/>
+              </a:spcAft>
+              <a:buClrTx/>
+              <a:buSzTx/>
+              <a:buFontTx/>
+              <a:buChar char="•"/>
+              <a:tabLst/>
+            </a:pPr>
+            <a:r>
+              <a:rPr kumimoji="0" lang="en-US" altLang="en-US" sz="1600" b="1" i="0" u="none" strike="noStrike" cap="none" normalizeH="0" baseline="0" dirty="0">
+                <a:ln>
+                  <a:noFill/>
+                </a:ln>
+                <a:effectLst/>
+                <a:latin typeface="Arial" panose="020B0604020202020204" pitchFamily="34" charset="0"/>
+              </a:rPr>
+              <a:t> Reconstruct a </a:t>
+            </a:r>
+            <a:r>
+              <a:rPr kumimoji="0" lang="en-US" altLang="en-US" sz="1600" b="1" i="0" u="none" strike="noStrike" cap="none" normalizeH="0" baseline="0" dirty="0" err="1">
+                <a:ln>
+                  <a:noFill/>
+                </a:ln>
+                <a:effectLst/>
+                <a:latin typeface="Arial" panose="020B0604020202020204" pitchFamily="34" charset="0"/>
+              </a:rPr>
+              <a:t>NIfTI</a:t>
+            </a:r>
+            <a:r>
+              <a:rPr kumimoji="0" lang="en-US" altLang="en-US" sz="1600" b="0" i="0" u="none" strike="noStrike" cap="none" normalizeH="0" baseline="0" dirty="0">
+                <a:ln>
+                  <a:noFill/>
+                </a:ln>
+                <a:effectLst/>
+                <a:latin typeface="Arial" panose="020B0604020202020204" pitchFamily="34" charset="0"/>
+              </a:rPr>
+              <a:t> from the label map (preserving original spacing/origin) and </a:t>
+            </a:r>
+            <a:r>
+              <a:rPr kumimoji="0" lang="en-US" altLang="en-US" sz="1600" b="1" i="0" u="none" strike="noStrike" cap="none" normalizeH="0" baseline="0" dirty="0">
+                <a:ln>
+                  <a:noFill/>
+                </a:ln>
+                <a:effectLst/>
+                <a:latin typeface="Arial" panose="020B0604020202020204" pitchFamily="34" charset="0"/>
+              </a:rPr>
+              <a:t>write</a:t>
+            </a:r>
+            <a:r>
+              <a:rPr kumimoji="0" lang="en-US" altLang="en-US" sz="1600" b="0" i="0" u="none" strike="noStrike" cap="none" normalizeH="0" baseline="0" dirty="0">
+                <a:ln>
+                  <a:noFill/>
+                </a:ln>
+                <a:effectLst/>
+                <a:latin typeface="Arial" panose="020B0604020202020204" pitchFamily="34" charset="0"/>
+              </a:rPr>
+              <a:t> it to </a:t>
+            </a:r>
+            <a:r>
+              <a:rPr kumimoji="0" lang="en-US" altLang="en-US" sz="1600" b="0" i="0" u="none" strike="noStrike" cap="none" normalizeH="0" baseline="0" dirty="0" err="1">
+                <a:ln>
+                  <a:noFill/>
+                </a:ln>
+                <a:effectLst/>
+                <a:latin typeface="Arial Unicode MS"/>
+              </a:rPr>
+              <a:t>output_dir</a:t>
+            </a:r>
+            <a:r>
+              <a:rPr kumimoji="0" lang="en-US" altLang="en-US" sz="1600" b="0" i="0" u="none" strike="noStrike" cap="none" normalizeH="0" baseline="0" dirty="0">
+                <a:ln>
+                  <a:noFill/>
+                </a:ln>
+                <a:effectLst/>
+              </a:rPr>
+              <a:t>, logging each save.</a:t>
+            </a:r>
+            <a:endParaRPr kumimoji="0" lang="en-US" altLang="en-US" sz="1600" b="0" i="0" u="none" strike="noStrike" cap="none" normalizeH="0" baseline="0" dirty="0">
+              <a:ln>
+                <a:noFill/>
+              </a:ln>
+              <a:effectLst/>
+              <a:latin typeface="Arial" panose="020B0604020202020204" pitchFamily="34" charset="0"/>
+            </a:endParaRPr>
+          </a:p>
+        </p:txBody>
+      </p:sp>
+    </p:spTree>
+    <p:extLst>
+      <p:ext uri="{BB962C8B-B14F-4D97-AF65-F5344CB8AC3E}">
+        <p14:creationId xmlns:p14="http://schemas.microsoft.com/office/powerpoint/2010/main" val="2501300296"/>
+      </p:ext>
+    </p:extLst>
+  </p:cSld>
+  <p:clrMapOvr>
+    <a:masterClrMapping/>
+  </p:clrMapOvr>
+</p:sld>
+</file>
+
+<file path=ppt/slides/slide14.xml><?xml version="1.0" encoding="utf-8"?>
+<p:sld xmlns:a="http://schemas.openxmlformats.org/drawingml/2006/main" xmlns:r="http://schemas.openxmlformats.org/officeDocument/2006/relationships" xmlns:p="http://schemas.openxmlformats.org/presentationml/2006/main">
+  <p:cSld>
+    <p:spTree>
+      <p:nvGrpSpPr>
+        <p:cNvPr id="1" name="">
+          <a:extLst>
+            <a:ext uri="{FF2B5EF4-FFF2-40B4-BE49-F238E27FC236}">
+              <a16:creationId xmlns:a16="http://schemas.microsoft.com/office/drawing/2014/main" id="{E0F23F68-A4E9-ACE0-0F5F-64D7AE8723A2}"/>
+            </a:ext>
+          </a:extLst>
+        </p:cNvPr>
+        <p:cNvGrpSpPr/>
+        <p:nvPr/>
+      </p:nvGrpSpPr>
+      <p:grpSpPr>
+        <a:xfrm>
+          <a:off x="0" y="0"/>
+          <a:ext cx="0" cy="0"/>
+          <a:chOff x="0" y="0"/>
+          <a:chExt cx="0" cy="0"/>
+        </a:xfrm>
+      </p:grpSpPr>
+      <p:sp>
+        <p:nvSpPr>
+          <p:cNvPr id="4" name="Title 3">
+            <a:extLst>
+              <a:ext uri="{FF2B5EF4-FFF2-40B4-BE49-F238E27FC236}">
+                <a16:creationId xmlns:a16="http://schemas.microsoft.com/office/drawing/2014/main" id="{B3696E2E-56CC-A246-D444-30F63C7EC080}"/>
+              </a:ext>
+            </a:extLst>
+          </p:cNvPr>
+          <p:cNvSpPr>
+            <a:spLocks noGrp="1"/>
+          </p:cNvSpPr>
+          <p:nvPr>
+            <p:ph type="title"/>
+          </p:nvPr>
+        </p:nvSpPr>
+        <p:spPr>
+          <a:xfrm>
+            <a:off x="3350360" y="233644"/>
+            <a:ext cx="5548109" cy="734703"/>
+          </a:xfrm>
+          <a:noFill/>
+        </p:spPr>
+        <p:txBody>
+          <a:bodyPr>
+            <a:normAutofit fontScale="90000"/>
+          </a:bodyPr>
+          <a:lstStyle/>
+          <a:p>
+            <a:pPr algn="l"/>
+            <a:r>
+              <a:rPr lang="en-US" dirty="0">
+                <a:solidFill>
+                  <a:schemeClr val="accent1">
+                    <a:lumMod val="20000"/>
+                    <a:lumOff val="80000"/>
+                  </a:schemeClr>
+                </a:solidFill>
+              </a:rPr>
+              <a:t>Monai 3D UNET Batch Inference</a:t>
+            </a:r>
+          </a:p>
+        </p:txBody>
+      </p:sp>
+      <p:pic>
+        <p:nvPicPr>
+          <p:cNvPr id="10" name="Picture 9">
+            <a:extLst>
+              <a:ext uri="{FF2B5EF4-FFF2-40B4-BE49-F238E27FC236}">
+                <a16:creationId xmlns:a16="http://schemas.microsoft.com/office/drawing/2014/main" id="{E34271C9-60C3-6078-24AB-D0F48C09E972}"/>
+              </a:ext>
+            </a:extLst>
+          </p:cNvPr>
+          <p:cNvPicPr>
+            <a:picLocks noChangeAspect="1"/>
+          </p:cNvPicPr>
+          <p:nvPr/>
+        </p:nvPicPr>
+        <p:blipFill>
+          <a:blip r:embed="rId3"/>
+          <a:stretch>
+            <a:fillRect/>
+          </a:stretch>
+        </p:blipFill>
+        <p:spPr>
+          <a:xfrm>
+            <a:off x="2310597" y="879487"/>
+            <a:ext cx="6541130" cy="4264013"/>
+          </a:xfrm>
+          <a:prstGeom prst="rect">
+            <a:avLst/>
+          </a:prstGeom>
+        </p:spPr>
+      </p:pic>
+    </p:spTree>
+    <p:extLst>
+      <p:ext uri="{BB962C8B-B14F-4D97-AF65-F5344CB8AC3E}">
+        <p14:creationId xmlns:p14="http://schemas.microsoft.com/office/powerpoint/2010/main" val="2653365009"/>
+      </p:ext>
+    </p:extLst>
+  </p:cSld>
+  <p:clrMapOvr>
+    <a:masterClrMapping/>
+  </p:clrMapOvr>
+</p:sld>
+</file>
+
+<file path=ppt/slides/slide15.xml><?xml version="1.0" encoding="utf-8"?>
+<p:sld xmlns:a="http://schemas.openxmlformats.org/drawingml/2006/main" xmlns:r="http://schemas.openxmlformats.org/officeDocument/2006/relationships" xmlns:p="http://schemas.openxmlformats.org/presentationml/2006/main">
+  <p:cSld>
+    <p:spTree>
+      <p:nvGrpSpPr>
+        <p:cNvPr id="1" name="">
+          <a:extLst>
+            <a:ext uri="{FF2B5EF4-FFF2-40B4-BE49-F238E27FC236}">
+              <a16:creationId xmlns:a16="http://schemas.microsoft.com/office/drawing/2014/main" id="{B42A17E6-DEE3-0974-4339-D59FF19A69EE}"/>
+            </a:ext>
+          </a:extLst>
+        </p:cNvPr>
+        <p:cNvGrpSpPr/>
+        <p:nvPr/>
+      </p:nvGrpSpPr>
+      <p:grpSpPr>
+        <a:xfrm>
+          <a:off x="0" y="0"/>
+          <a:ext cx="0" cy="0"/>
+          <a:chOff x="0" y="0"/>
+          <a:chExt cx="0" cy="0"/>
+        </a:xfrm>
+      </p:grpSpPr>
+      <p:sp>
+        <p:nvSpPr>
+          <p:cNvPr id="4" name="Title 3">
+            <a:extLst>
+              <a:ext uri="{FF2B5EF4-FFF2-40B4-BE49-F238E27FC236}">
+                <a16:creationId xmlns:a16="http://schemas.microsoft.com/office/drawing/2014/main" id="{ED4B5A30-F18E-2B11-877D-822E909E670E}"/>
+              </a:ext>
+            </a:extLst>
+          </p:cNvPr>
+          <p:cNvSpPr>
+            <a:spLocks noGrp="1"/>
+          </p:cNvSpPr>
+          <p:nvPr>
+            <p:ph type="title"/>
+          </p:nvPr>
+        </p:nvSpPr>
+        <p:spPr>
+          <a:xfrm>
+            <a:off x="3350360" y="128470"/>
+            <a:ext cx="5548109" cy="734703"/>
+          </a:xfrm>
+          <a:noFill/>
+        </p:spPr>
+        <p:txBody>
+          <a:bodyPr>
+            <a:normAutofit fontScale="90000"/>
+          </a:bodyPr>
+          <a:lstStyle/>
+          <a:p>
+            <a:pPr algn="l"/>
+            <a:r>
+              <a:rPr lang="en-US" dirty="0">
+                <a:solidFill>
+                  <a:schemeClr val="accent1">
+                    <a:lumMod val="20000"/>
+                    <a:lumOff val="80000"/>
+                  </a:schemeClr>
+                </a:solidFill>
+              </a:rPr>
+              <a:t>Monai 3D UNET </a:t>
+            </a:r>
+            <a:r>
+              <a:rPr lang="en-US" dirty="0" err="1">
+                <a:solidFill>
+                  <a:schemeClr val="accent1">
+                    <a:lumMod val="20000"/>
+                    <a:lumOff val="80000"/>
+                  </a:schemeClr>
+                </a:solidFill>
+              </a:rPr>
+              <a:t>Streamlit</a:t>
+            </a:r>
+            <a:r>
+              <a:rPr lang="en-US" dirty="0">
+                <a:solidFill>
+                  <a:schemeClr val="accent1">
+                    <a:lumMod val="20000"/>
+                    <a:lumOff val="80000"/>
+                  </a:schemeClr>
+                </a:solidFill>
+              </a:rPr>
+              <a:t> Demo</a:t>
+            </a:r>
+          </a:p>
+        </p:txBody>
+      </p:sp>
+      <p:sp>
+        <p:nvSpPr>
+          <p:cNvPr id="3" name="Content Placeholder 2">
+            <a:extLst>
+              <a:ext uri="{FF2B5EF4-FFF2-40B4-BE49-F238E27FC236}">
+                <a16:creationId xmlns:a16="http://schemas.microsoft.com/office/drawing/2014/main" id="{15E1165F-D77D-D425-B7F7-2796D525FD92}"/>
+              </a:ext>
+            </a:extLst>
+          </p:cNvPr>
+          <p:cNvSpPr>
+            <a:spLocks noGrp="1" noChangeArrowheads="1"/>
+          </p:cNvSpPr>
+          <p:nvPr>
+            <p:ph sz="half" idx="2"/>
+          </p:nvPr>
+        </p:nvSpPr>
+        <p:spPr bwMode="auto">
+          <a:xfrm>
+            <a:off x="125752" y="729491"/>
+            <a:ext cx="8892495" cy="4370427"/>
+          </a:xfrm>
+          <a:prstGeom prst="rect">
+            <a:avLst/>
+          </a:prstGeom>
+          <a:solidFill>
+            <a:srgbClr val="00112B"/>
+          </a:solidFill>
+          <a:ln>
+            <a:noFill/>
+          </a:ln>
+          <a:effectLst/>
+        </p:spPr>
+        <p:txBody>
+          <a:bodyPr vert="horz" wrap="square" lIns="91440" tIns="45720" rIns="91440" bIns="45720" numCol="1" anchor="ctr" anchorCtr="0" compatLnSpc="1">
+            <a:prstTxWarp prst="textNoShape">
+              <a:avLst/>
+            </a:prstTxWarp>
+            <a:spAutoFit/>
+          </a:bodyPr>
+          <a:lstStyle/>
+          <a:p>
+            <a:pPr marL="0" lvl="0" indent="0" algn="l" eaLnBrk="0" fontAlgn="base" hangingPunct="0">
+              <a:spcBef>
+                <a:spcPct val="0"/>
+              </a:spcBef>
+              <a:spcAft>
+                <a:spcPct val="0"/>
+              </a:spcAft>
+              <a:buFontTx/>
+              <a:buChar char="•"/>
+            </a:pPr>
+            <a:r>
+              <a:rPr lang="en-US" altLang="en-US" sz="1600" b="1" dirty="0"/>
+              <a:t> </a:t>
+            </a:r>
+            <a:r>
+              <a:rPr lang="en-US" altLang="en-US" sz="1600" dirty="0"/>
+              <a:t>Batch inference ran in 3D_UNet_Brain_Tumor_Segmentation_multiclass_complete.ipynb notebook</a:t>
+            </a:r>
+            <a:r>
+              <a:rPr kumimoji="0" lang="en-US" altLang="en-US" sz="1600" b="0" i="0" u="none" strike="noStrike" cap="none" normalizeH="0" baseline="0" dirty="0">
+                <a:ln>
+                  <a:noFill/>
+                </a:ln>
+                <a:effectLst/>
+              </a:rPr>
+              <a:t>.</a:t>
+            </a:r>
+          </a:p>
+          <a:p>
+            <a:pPr marL="0" lvl="0" indent="0" algn="l" eaLnBrk="0" fontAlgn="base" hangingPunct="0">
+              <a:spcBef>
+                <a:spcPct val="0"/>
+              </a:spcBef>
+              <a:spcAft>
+                <a:spcPct val="0"/>
+              </a:spcAft>
+              <a:buFontTx/>
+              <a:buChar char="•"/>
+            </a:pPr>
+            <a:endParaRPr lang="en-US" altLang="en-US" sz="1600" dirty="0"/>
+          </a:p>
+          <a:p>
+            <a:pPr marL="0" lvl="0" indent="0" algn="l" eaLnBrk="0" fontAlgn="base" hangingPunct="0">
+              <a:spcBef>
+                <a:spcPct val="0"/>
+              </a:spcBef>
+              <a:spcAft>
+                <a:spcPct val="0"/>
+              </a:spcAft>
+              <a:buFontTx/>
+              <a:buChar char="•"/>
+            </a:pPr>
+            <a:r>
+              <a:rPr kumimoji="0" lang="en-US" altLang="en-US" sz="1600" b="0" i="0" u="none" strike="noStrike" cap="none" normalizeH="0" baseline="0" dirty="0">
+                <a:ln>
+                  <a:noFill/>
+                </a:ln>
+                <a:effectLst/>
+              </a:rPr>
+              <a:t> Inference ran on scans with tumors and healthy </a:t>
+            </a:r>
+            <a:r>
+              <a:rPr lang="en-US" altLang="en-US" sz="1600" dirty="0"/>
+              <a:t>scans </a:t>
+            </a:r>
+            <a:r>
+              <a:rPr kumimoji="0" lang="en-US" altLang="en-US" sz="1600" b="0" i="0" u="none" strike="noStrike" cap="none" normalizeH="0" baseline="0" dirty="0">
+                <a:ln>
+                  <a:noFill/>
+                </a:ln>
+                <a:effectLst/>
+              </a:rPr>
+              <a:t>for reference.</a:t>
+            </a:r>
+          </a:p>
+          <a:p>
+            <a:pPr marL="0" marR="0" lvl="0" indent="0" algn="l" defTabSz="914400" rtl="0" eaLnBrk="0" fontAlgn="base" latinLnBrk="0" hangingPunct="0">
+              <a:lnSpc>
+                <a:spcPct val="100000"/>
+              </a:lnSpc>
+              <a:spcBef>
+                <a:spcPct val="0"/>
+              </a:spcBef>
+              <a:spcAft>
+                <a:spcPct val="0"/>
+              </a:spcAft>
+              <a:buClrTx/>
+              <a:buSzTx/>
+              <a:buFontTx/>
+              <a:buChar char="•"/>
+              <a:tabLst/>
+            </a:pPr>
+            <a:endParaRPr kumimoji="0" lang="en-US" altLang="en-US" sz="1600" b="0" i="0" u="none" strike="noStrike" cap="none" normalizeH="0" baseline="0" dirty="0">
+              <a:ln>
+                <a:noFill/>
+              </a:ln>
+              <a:effectLst/>
+            </a:endParaRPr>
+          </a:p>
+          <a:p>
+            <a:pPr marL="0" marR="0" lvl="0" indent="0" algn="l" defTabSz="914400" rtl="0" eaLnBrk="0" fontAlgn="base" latinLnBrk="0" hangingPunct="0">
+              <a:lnSpc>
+                <a:spcPct val="100000"/>
+              </a:lnSpc>
+              <a:spcBef>
+                <a:spcPct val="0"/>
+              </a:spcBef>
+              <a:spcAft>
+                <a:spcPct val="0"/>
+              </a:spcAft>
+              <a:buClrTx/>
+              <a:buSzTx/>
+              <a:buFontTx/>
+              <a:buChar char="•"/>
+              <a:tabLst/>
+            </a:pPr>
+            <a:r>
+              <a:rPr kumimoji="0" lang="en-US" altLang="en-US" sz="1600" i="0" u="none" strike="noStrike" cap="none" normalizeH="0" baseline="0" dirty="0">
+                <a:ln>
+                  <a:noFill/>
+                </a:ln>
+                <a:effectLst/>
+              </a:rPr>
+              <a:t> Files for testing (Brain MRI, </a:t>
+            </a:r>
+            <a:r>
+              <a:rPr kumimoji="0" lang="en-US" altLang="en-US" sz="1600" i="0" u="none" strike="noStrike" cap="none" normalizeH="0" baseline="0" dirty="0" err="1">
+                <a:ln>
+                  <a:noFill/>
+                </a:ln>
+                <a:effectLst/>
+              </a:rPr>
+              <a:t>ground_truth</a:t>
+            </a:r>
+            <a:r>
+              <a:rPr lang="en-US" altLang="en-US" sz="1600" dirty="0"/>
+              <a:t> &amp; predicted segmentations) uploaded to GitHub then cached into </a:t>
+            </a:r>
+            <a:r>
+              <a:rPr lang="en-US" altLang="en-US" sz="1600" dirty="0" err="1"/>
+              <a:t>Streamlit</a:t>
+            </a:r>
+            <a:r>
+              <a:rPr lang="en-US" altLang="en-US" sz="1600" dirty="0"/>
+              <a:t> session memory on app startup (faster but heavier on resources, tricky).</a:t>
+            </a:r>
+            <a:endParaRPr kumimoji="0" lang="en-US" altLang="en-US" sz="1600" i="0" u="none" strike="noStrike" cap="none" normalizeH="0" baseline="0" dirty="0">
+              <a:ln>
+                <a:noFill/>
+              </a:ln>
+              <a:effectLst/>
+            </a:endParaRPr>
+          </a:p>
+          <a:p>
+            <a:pPr marL="0" marR="0" lvl="0" indent="0" algn="l" defTabSz="914400" rtl="0" eaLnBrk="0" fontAlgn="base" latinLnBrk="0" hangingPunct="0">
+              <a:lnSpc>
+                <a:spcPct val="100000"/>
+              </a:lnSpc>
+              <a:spcBef>
+                <a:spcPct val="0"/>
+              </a:spcBef>
+              <a:spcAft>
+                <a:spcPct val="0"/>
+              </a:spcAft>
+              <a:buClrTx/>
+              <a:buSzTx/>
+              <a:buFontTx/>
+              <a:buChar char="•"/>
+              <a:tabLst/>
+            </a:pPr>
+            <a:endParaRPr kumimoji="0" lang="en-US" altLang="en-US" sz="1600" b="0" i="0" u="none" strike="noStrike" cap="none" normalizeH="0" baseline="0" dirty="0">
+              <a:ln>
+                <a:noFill/>
+              </a:ln>
+              <a:effectLst/>
+            </a:endParaRPr>
+          </a:p>
+          <a:p>
+            <a:pPr marL="0" marR="0" lvl="0" indent="0" algn="l" defTabSz="914400" rtl="0" eaLnBrk="0" fontAlgn="base" latinLnBrk="0" hangingPunct="0">
+              <a:lnSpc>
+                <a:spcPct val="100000"/>
+              </a:lnSpc>
+              <a:spcBef>
+                <a:spcPct val="0"/>
+              </a:spcBef>
+              <a:spcAft>
+                <a:spcPct val="0"/>
+              </a:spcAft>
+              <a:buClrTx/>
+              <a:buSzTx/>
+              <a:buFontTx/>
+              <a:buChar char="•"/>
+              <a:tabLst/>
+            </a:pPr>
+            <a:r>
+              <a:rPr kumimoji="0" lang="en-US" altLang="en-US" sz="1600" b="0" i="0" u="none" strike="noStrike" cap="none" normalizeH="0" baseline="0" dirty="0">
+                <a:ln>
+                  <a:noFill/>
+                </a:ln>
+                <a:effectLst/>
+              </a:rPr>
+              <a:t> Browse through:</a:t>
+            </a:r>
+          </a:p>
+          <a:p>
+            <a:pPr marL="400050" lvl="1" indent="0" algn="l" eaLnBrk="0" fontAlgn="base" hangingPunct="0">
+              <a:spcBef>
+                <a:spcPct val="0"/>
+              </a:spcBef>
+              <a:spcAft>
+                <a:spcPct val="0"/>
+              </a:spcAft>
+              <a:buFontTx/>
+              <a:buChar char="•"/>
+            </a:pPr>
+            <a:r>
+              <a:rPr lang="en-US" altLang="en-US" sz="1400" dirty="0"/>
+              <a:t> Different cases/scans.</a:t>
+            </a:r>
+          </a:p>
+          <a:p>
+            <a:pPr marL="400050" lvl="1" indent="0" algn="l" eaLnBrk="0" fontAlgn="base" hangingPunct="0">
+              <a:spcBef>
+                <a:spcPct val="0"/>
+              </a:spcBef>
+              <a:spcAft>
+                <a:spcPct val="0"/>
+              </a:spcAft>
+              <a:buFontTx/>
+              <a:buChar char="•"/>
+            </a:pPr>
+            <a:r>
+              <a:rPr kumimoji="0" lang="en-US" altLang="en-US" sz="1400" b="0" i="0" u="none" strike="noStrike" cap="none" normalizeH="0" baseline="0" dirty="0">
+                <a:ln>
+                  <a:noFill/>
+                </a:ln>
+                <a:effectLst/>
+              </a:rPr>
+              <a:t> Different planed (axial, </a:t>
+            </a:r>
+            <a:r>
+              <a:rPr kumimoji="0" lang="en-US" altLang="en-US" sz="1400" b="0" i="0" u="none" strike="noStrike" cap="none" normalizeH="0" baseline="0" dirty="0" err="1">
+                <a:ln>
+                  <a:noFill/>
+                </a:ln>
+                <a:effectLst/>
+              </a:rPr>
+              <a:t>saggital</a:t>
+            </a:r>
+            <a:r>
+              <a:rPr kumimoji="0" lang="en-US" altLang="en-US" sz="1400" b="0" i="0" u="none" strike="noStrike" cap="none" normalizeH="0" baseline="0" dirty="0">
+                <a:ln>
+                  <a:noFill/>
+                </a:ln>
+                <a:effectLst/>
+              </a:rPr>
+              <a:t> &amp; coronal)</a:t>
+            </a:r>
+          </a:p>
+          <a:p>
+            <a:pPr marL="400050" lvl="1" indent="0" algn="l" eaLnBrk="0" fontAlgn="base" hangingPunct="0">
+              <a:spcBef>
+                <a:spcPct val="0"/>
+              </a:spcBef>
+              <a:spcAft>
+                <a:spcPct val="0"/>
+              </a:spcAft>
+              <a:buFontTx/>
+              <a:buChar char="•"/>
+            </a:pPr>
+            <a:r>
+              <a:rPr lang="en-US" altLang="en-US" sz="1400" dirty="0"/>
+              <a:t> Slide different slices.</a:t>
+            </a:r>
+            <a:endParaRPr kumimoji="0" lang="en-US" altLang="en-US" sz="1400" b="0" i="0" u="none" strike="noStrike" cap="none" normalizeH="0" baseline="0" dirty="0">
+              <a:ln>
+                <a:noFill/>
+              </a:ln>
+              <a:effectLst/>
+            </a:endParaRPr>
+          </a:p>
+          <a:p>
+            <a:pPr marL="0" marR="0" lvl="0" indent="0" algn="l" defTabSz="914400" rtl="0" eaLnBrk="0" fontAlgn="base" latinLnBrk="0" hangingPunct="0">
+              <a:lnSpc>
+                <a:spcPct val="100000"/>
+              </a:lnSpc>
+              <a:spcBef>
+                <a:spcPct val="0"/>
+              </a:spcBef>
+              <a:spcAft>
+                <a:spcPct val="0"/>
+              </a:spcAft>
+              <a:buClrTx/>
+              <a:buSzTx/>
+              <a:buFontTx/>
+              <a:buChar char="•"/>
+              <a:tabLst/>
+            </a:pPr>
+            <a:endParaRPr kumimoji="0" lang="en-US" altLang="en-US" sz="1600" b="0" i="0" u="none" strike="noStrike" cap="none" normalizeH="0" baseline="0" dirty="0">
+              <a:ln>
+                <a:noFill/>
+              </a:ln>
+              <a:effectLst/>
+            </a:endParaRPr>
+          </a:p>
+          <a:p>
+            <a:pPr marL="0" marR="0" lvl="0" indent="0" algn="l" defTabSz="914400" rtl="0" eaLnBrk="0" fontAlgn="base" latinLnBrk="0" hangingPunct="0">
+              <a:lnSpc>
+                <a:spcPct val="100000"/>
+              </a:lnSpc>
+              <a:spcBef>
+                <a:spcPct val="0"/>
+              </a:spcBef>
+              <a:spcAft>
+                <a:spcPct val="0"/>
+              </a:spcAft>
+              <a:buClrTx/>
+              <a:buSzTx/>
+              <a:buFontTx/>
+              <a:buChar char="•"/>
+              <a:tabLst/>
+            </a:pPr>
+            <a:r>
+              <a:rPr kumimoji="0" lang="en-US" altLang="en-US" sz="1600" b="1" i="0" u="none" strike="noStrike" cap="none" normalizeH="0" baseline="0" dirty="0">
+                <a:ln>
+                  <a:noFill/>
+                </a:ln>
+                <a:effectLst/>
+              </a:rPr>
+              <a:t> </a:t>
+            </a:r>
+            <a:r>
+              <a:rPr kumimoji="0" lang="en-US" altLang="en-US" sz="1600" i="0" u="none" strike="noStrike" cap="none" normalizeH="0" baseline="0" dirty="0">
+                <a:ln>
+                  <a:noFill/>
+                </a:ln>
+                <a:effectLst/>
+              </a:rPr>
+              <a:t>Each case shows 4 views, MRI with overlayed segmentations (ground truth, predicted &amp; combined) and MRI without overlays.</a:t>
+            </a:r>
+          </a:p>
+          <a:p>
+            <a:pPr marL="0" marR="0" lvl="0" indent="0" algn="l" defTabSz="914400" rtl="0" eaLnBrk="0" fontAlgn="base" latinLnBrk="0" hangingPunct="0">
+              <a:lnSpc>
+                <a:spcPct val="100000"/>
+              </a:lnSpc>
+              <a:spcBef>
+                <a:spcPct val="0"/>
+              </a:spcBef>
+              <a:spcAft>
+                <a:spcPct val="0"/>
+              </a:spcAft>
+              <a:buClrTx/>
+              <a:buSzTx/>
+              <a:buFontTx/>
+              <a:buChar char="•"/>
+              <a:tabLst/>
+            </a:pPr>
+            <a:endParaRPr kumimoji="0" lang="en-US" altLang="en-US" sz="1600" b="0" i="0" u="none" strike="noStrike" cap="none" normalizeH="0" baseline="0" dirty="0">
+              <a:ln>
+                <a:noFill/>
+              </a:ln>
+              <a:effectLst/>
+            </a:endParaRPr>
+          </a:p>
+          <a:p>
+            <a:pPr marL="0" marR="0" lvl="0" indent="0" algn="l" defTabSz="914400" rtl="0" eaLnBrk="0" fontAlgn="base" latinLnBrk="0" hangingPunct="0">
+              <a:lnSpc>
+                <a:spcPct val="100000"/>
+              </a:lnSpc>
+              <a:spcBef>
+                <a:spcPct val="0"/>
+              </a:spcBef>
+              <a:spcAft>
+                <a:spcPct val="0"/>
+              </a:spcAft>
+              <a:buClrTx/>
+              <a:buSzTx/>
+              <a:buFontTx/>
+              <a:buChar char="•"/>
+              <a:tabLst/>
+            </a:pPr>
+            <a:r>
+              <a:rPr kumimoji="0" lang="en-US" altLang="en-US" sz="1600" b="1" i="0" u="none" strike="noStrike" cap="none" normalizeH="0" baseline="0" dirty="0">
+                <a:ln>
+                  <a:noFill/>
+                </a:ln>
+                <a:effectLst/>
+              </a:rPr>
+              <a:t> </a:t>
+            </a:r>
+            <a:r>
+              <a:rPr kumimoji="0" lang="en-US" altLang="en-US" sz="1600" i="0" u="none" strike="noStrike" cap="none" normalizeH="0" baseline="0" dirty="0">
+                <a:ln>
+                  <a:noFill/>
+                </a:ln>
+                <a:effectLst/>
+              </a:rPr>
+              <a:t>HelperFunftions.py</a:t>
+            </a:r>
+          </a:p>
+          <a:p>
+            <a:pPr marL="400050" lvl="1" indent="0" algn="l" eaLnBrk="0" fontAlgn="base" hangingPunct="0">
+              <a:spcBef>
+                <a:spcPct val="0"/>
+              </a:spcBef>
+              <a:spcAft>
+                <a:spcPct val="0"/>
+              </a:spcAft>
+              <a:buFontTx/>
+              <a:buChar char="•"/>
+            </a:pPr>
+            <a:r>
+              <a:rPr kumimoji="0" lang="en-US" altLang="en-US" sz="1400" i="0" u="none" strike="noStrike" cap="none" normalizeH="0" baseline="0" dirty="0">
+                <a:ln>
+                  <a:noFill/>
+                </a:ln>
+                <a:effectLst/>
+              </a:rPr>
+              <a:t> </a:t>
+            </a:r>
+            <a:r>
+              <a:rPr kumimoji="0" lang="en-US" altLang="en-US" sz="1400" i="1" u="none" strike="noStrike" cap="none" normalizeH="0" baseline="0" dirty="0" err="1">
+                <a:ln>
+                  <a:noFill/>
+                </a:ln>
+                <a:effectLst/>
+              </a:rPr>
+              <a:t>compute_segmentation_metrics</a:t>
+            </a:r>
+            <a:r>
+              <a:rPr kumimoji="0" lang="en-US" altLang="en-US" sz="1400" i="1" u="none" strike="noStrike" cap="none" normalizeH="0" baseline="0" dirty="0">
+                <a:ln>
+                  <a:noFill/>
+                </a:ln>
+                <a:effectLst/>
+              </a:rPr>
+              <a:t> - </a:t>
+            </a:r>
+            <a:r>
+              <a:rPr kumimoji="0" lang="en-US" altLang="en-US" sz="1400" u="none" strike="noStrike" cap="none" normalizeH="0" baseline="0" dirty="0">
+                <a:ln>
+                  <a:noFill/>
+                </a:ln>
+                <a:effectLst/>
+              </a:rPr>
+              <a:t>compares ground truth and predicted segmentations.</a:t>
+            </a:r>
+          </a:p>
+          <a:p>
+            <a:pPr marL="400050" lvl="1" indent="0" algn="l" eaLnBrk="0" fontAlgn="base" hangingPunct="0">
+              <a:spcBef>
+                <a:spcPct val="0"/>
+              </a:spcBef>
+              <a:spcAft>
+                <a:spcPct val="0"/>
+              </a:spcAft>
+              <a:buFontTx/>
+              <a:buChar char="•"/>
+            </a:pPr>
+            <a:r>
+              <a:rPr lang="en-US" altLang="en-US" sz="1400" dirty="0"/>
+              <a:t> </a:t>
+            </a:r>
+            <a:r>
+              <a:rPr lang="en-US" altLang="en-US" sz="1400" i="1" dirty="0" err="1"/>
+              <a:t>analyze_metrics_with_gpt</a:t>
+            </a:r>
+            <a:r>
+              <a:rPr lang="en-US" altLang="en-US" sz="1400" dirty="0"/>
+              <a:t> – prompts </a:t>
+            </a:r>
+            <a:r>
+              <a:rPr lang="en-US" altLang="en-US" sz="1400" dirty="0" err="1"/>
+              <a:t>openai</a:t>
+            </a:r>
+            <a:r>
+              <a:rPr lang="en-US" altLang="en-US" sz="1400" dirty="0"/>
+              <a:t> and retrieves a readable analysis report.</a:t>
+            </a:r>
+            <a:endParaRPr kumimoji="0" lang="en-US" altLang="en-US" sz="1400" u="none" strike="noStrike" cap="none" normalizeH="0" baseline="0" dirty="0">
+              <a:ln>
+                <a:noFill/>
+              </a:ln>
+              <a:effectLst/>
+            </a:endParaRPr>
+          </a:p>
+        </p:txBody>
+      </p:sp>
+    </p:spTree>
+    <p:extLst>
+      <p:ext uri="{BB962C8B-B14F-4D97-AF65-F5344CB8AC3E}">
+        <p14:creationId xmlns:p14="http://schemas.microsoft.com/office/powerpoint/2010/main" val="1999129136"/>
+      </p:ext>
+    </p:extLst>
+  </p:cSld>
+  <p:clrMapOvr>
+    <a:masterClrMapping/>
+  </p:clrMapOvr>
+</p:sld>
+</file>
+
+<file path=ppt/slides/slide16.xml><?xml version="1.0" encoding="utf-8"?>
+<p:sld xmlns:a="http://schemas.openxmlformats.org/drawingml/2006/main" xmlns:r="http://schemas.openxmlformats.org/officeDocument/2006/relationships" xmlns:p="http://schemas.openxmlformats.org/presentationml/2006/main">
+  <p:cSld>
+    <p:spTree>
+      <p:nvGrpSpPr>
+        <p:cNvPr id="1" name="">
+          <a:extLst>
+            <a:ext uri="{FF2B5EF4-FFF2-40B4-BE49-F238E27FC236}">
+              <a16:creationId xmlns:a16="http://schemas.microsoft.com/office/drawing/2014/main" id="{80CF6643-024F-47AB-7FE6-EEEAFB048AD2}"/>
+            </a:ext>
+          </a:extLst>
+        </p:cNvPr>
+        <p:cNvGrpSpPr/>
+        <p:nvPr/>
+      </p:nvGrpSpPr>
+      <p:grpSpPr>
+        <a:xfrm>
+          <a:off x="0" y="0"/>
+          <a:ext cx="0" cy="0"/>
+          <a:chOff x="0" y="0"/>
+          <a:chExt cx="0" cy="0"/>
+        </a:xfrm>
+      </p:grpSpPr>
+      <p:sp>
+        <p:nvSpPr>
+          <p:cNvPr id="4" name="Title 3">
+            <a:extLst>
+              <a:ext uri="{FF2B5EF4-FFF2-40B4-BE49-F238E27FC236}">
+                <a16:creationId xmlns:a16="http://schemas.microsoft.com/office/drawing/2014/main" id="{EFB10412-9F9F-10CF-681F-3722A987EED8}"/>
+              </a:ext>
+            </a:extLst>
+          </p:cNvPr>
+          <p:cNvSpPr>
+            <a:spLocks noGrp="1"/>
+          </p:cNvSpPr>
+          <p:nvPr>
+            <p:ph type="title"/>
+          </p:nvPr>
+        </p:nvSpPr>
+        <p:spPr>
+          <a:xfrm>
+            <a:off x="2281426" y="233644"/>
+            <a:ext cx="6617044" cy="734703"/>
+          </a:xfrm>
+          <a:noFill/>
+        </p:spPr>
+        <p:txBody>
+          <a:bodyPr>
+            <a:normAutofit fontScale="90000"/>
+          </a:bodyPr>
+          <a:lstStyle/>
+          <a:p>
+            <a:pPr algn="l"/>
+            <a:r>
+              <a:rPr lang="en-US" dirty="0">
+                <a:solidFill>
+                  <a:schemeClr val="accent1">
+                    <a:lumMod val="20000"/>
+                    <a:lumOff val="80000"/>
+                  </a:schemeClr>
+                </a:solidFill>
+              </a:rPr>
+              <a:t>Monai 3D UNET Segmentation Metrics</a:t>
+            </a:r>
+          </a:p>
+        </p:txBody>
+      </p:sp>
+      <p:pic>
+        <p:nvPicPr>
+          <p:cNvPr id="6" name="Picture 5">
+            <a:extLst>
+              <a:ext uri="{FF2B5EF4-FFF2-40B4-BE49-F238E27FC236}">
+                <a16:creationId xmlns:a16="http://schemas.microsoft.com/office/drawing/2014/main" id="{DD546526-1280-6E0C-EC16-2E55EE4BF19B}"/>
+              </a:ext>
+            </a:extLst>
+          </p:cNvPr>
+          <p:cNvPicPr>
+            <a:picLocks noChangeAspect="1"/>
+          </p:cNvPicPr>
+          <p:nvPr/>
+        </p:nvPicPr>
+        <p:blipFill>
+          <a:blip r:embed="rId2"/>
+          <a:stretch>
+            <a:fillRect/>
+          </a:stretch>
+        </p:blipFill>
+        <p:spPr>
+          <a:xfrm>
+            <a:off x="7597693" y="5473145"/>
+            <a:ext cx="1542414" cy="558207"/>
+          </a:xfrm>
+          <a:prstGeom prst="rect">
+            <a:avLst/>
+          </a:prstGeom>
+        </p:spPr>
+      </p:pic>
+      <mc:AlternateContent xmlns:mc="http://schemas.openxmlformats.org/markup-compatibility/2006">
+        <mc:Choice xmlns:a14="http://schemas.microsoft.com/office/drawing/2010/main" Requires="a14">
+          <p:graphicFrame>
+            <p:nvGraphicFramePr>
+              <p:cNvPr id="7" name="Table 6">
+                <a:extLst>
+                  <a:ext uri="{FF2B5EF4-FFF2-40B4-BE49-F238E27FC236}">
+                    <a16:creationId xmlns:a16="http://schemas.microsoft.com/office/drawing/2014/main" id="{5431B4FC-6363-E964-B38F-E2B13830372B}"/>
+                  </a:ext>
+                </a:extLst>
+              </p:cNvPr>
+              <p:cNvGraphicFramePr>
+                <a:graphicFrameLocks noGrp="1"/>
+              </p:cNvGraphicFramePr>
+              <p:nvPr>
+                <p:extLst>
+                  <p:ext uri="{D42A27DB-BD31-4B8C-83A1-F6EECF244321}">
+                    <p14:modId xmlns:p14="http://schemas.microsoft.com/office/powerpoint/2010/main" val="3210286256"/>
+                  </p:ext>
+                </p:extLst>
+              </p:nvPr>
+            </p:nvGraphicFramePr>
+            <p:xfrm>
+              <a:off x="143555" y="891995"/>
+              <a:ext cx="7940660" cy="4209252"/>
+            </p:xfrm>
+            <a:graphic>
+              <a:graphicData uri="http://schemas.openxmlformats.org/drawingml/2006/table">
+                <a:tbl>
+                  <a:tblPr firstRow="1" bandRow="1">
+                    <a:tableStyleId>{5C22544A-7EE6-4342-B048-85BDC9FD1C3A}</a:tableStyleId>
+                  </a:tblPr>
+                  <a:tblGrid>
+                    <a:gridCol w="3302000">
+                      <a:extLst>
+                        <a:ext uri="{9D8B030D-6E8A-4147-A177-3AD203B41FA5}">
+                          <a16:colId xmlns:a16="http://schemas.microsoft.com/office/drawing/2014/main" val="2582254651"/>
+                        </a:ext>
+                      </a:extLst>
+                    </a:gridCol>
+                    <a:gridCol w="4638660">
+                      <a:extLst>
+                        <a:ext uri="{9D8B030D-6E8A-4147-A177-3AD203B41FA5}">
+                          <a16:colId xmlns:a16="http://schemas.microsoft.com/office/drawing/2014/main" val="1943090721"/>
+                        </a:ext>
+                      </a:extLst>
+                    </a:gridCol>
+                  </a:tblGrid>
+                  <a:tr h="458115">
+                    <a:tc>
+                      <a:txBody>
+                        <a:bodyPr/>
+                        <a:lstStyle/>
+                        <a:p>
+                          <a:r>
+                            <a:rPr lang="en-US" b="0" dirty="0"/>
+                            <a:t>Metric</a:t>
+                          </a:r>
+                        </a:p>
+                      </a:txBody>
+                      <a:tcPr/>
+                    </a:tc>
+                    <a:tc>
+                      <a:txBody>
+                        <a:bodyPr/>
+                        <a:lstStyle/>
+                        <a:p>
+                          <a:r>
+                            <a:rPr lang="en-US" b="0" dirty="0"/>
+                            <a:t>Short description</a:t>
+                          </a:r>
+                        </a:p>
+                      </a:txBody>
+                      <a:tcPr/>
+                    </a:tc>
+                    <a:extLst>
+                      <a:ext uri="{0D108BD9-81ED-4DB2-BD59-A6C34878D82A}">
+                        <a16:rowId xmlns:a16="http://schemas.microsoft.com/office/drawing/2014/main" val="895368645"/>
+                      </a:ext>
+                    </a:extLst>
+                  </a:tr>
+                  <a:tr h="370840">
+                    <a:tc>
+                      <a:txBody>
+                        <a:bodyPr/>
+                        <a:lstStyle/>
+                        <a:p>
+                          <a:pPr/>
+                          <a14:m>
+                            <m:oMathPara xmlns:m="http://schemas.openxmlformats.org/officeDocument/2006/math">
+                              <m:oMathParaPr>
+                                <m:jc m:val="left"/>
+                              </m:oMathParaPr>
+                              <m:oMath xmlns:m="http://schemas.openxmlformats.org/officeDocument/2006/math">
+                                <m:r>
+                                  <a:rPr lang="en-US" sz="1400" b="0" i="1" smtClean="0">
+                                    <a:latin typeface="Cambria Math" panose="02040503050406030204" pitchFamily="18" charset="0"/>
+                                  </a:rPr>
+                                  <m:t>𝐷𝑖𝑐𝑒</m:t>
+                                </m:r>
+                                <m:r>
+                                  <a:rPr lang="en-US" sz="1400" b="0" i="1" smtClean="0">
+                                    <a:latin typeface="Cambria Math" panose="02040503050406030204" pitchFamily="18" charset="0"/>
+                                  </a:rPr>
+                                  <m:t>=</m:t>
+                                </m:r>
+                                <m:f>
+                                  <m:fPr>
+                                    <m:ctrlPr>
+                                      <a:rPr lang="en-US" sz="1400" b="0" i="1" smtClean="0">
+                                        <a:latin typeface="Cambria Math" panose="02040503050406030204" pitchFamily="18" charset="0"/>
+                                      </a:rPr>
+                                    </m:ctrlPr>
+                                  </m:fPr>
+                                  <m:num>
+                                    <m:r>
+                                      <a:rPr kumimoji="0" lang="en-US" altLang="en-US" sz="1400" b="1" i="0" u="none" strike="noStrike" cap="none" normalizeH="0" baseline="0" smtClean="0">
+                                        <a:ln>
+                                          <a:noFill/>
+                                        </a:ln>
+                                        <a:effectLst/>
+                                        <a:latin typeface="Cambria Math" panose="02040503050406030204" pitchFamily="18" charset="0"/>
+                                      </a:rPr>
+                                      <m:t>𝟐</m:t>
+                                    </m:r>
+                                    <m:r>
+                                      <a:rPr kumimoji="0" lang="en-US" altLang="en-US" sz="1400" b="1" i="0" u="none" strike="noStrike" cap="none" normalizeH="0" baseline="0" smtClean="0">
+                                        <a:ln>
+                                          <a:noFill/>
+                                        </a:ln>
+                                        <a:effectLst/>
+                                        <a:latin typeface="Cambria Math" panose="02040503050406030204" pitchFamily="18" charset="0"/>
+                                      </a:rPr>
+                                      <m:t>|</m:t>
+                                    </m:r>
+                                    <m:r>
+                                      <a:rPr kumimoji="0" lang="en-US" altLang="en-US" sz="1400" b="1" i="1" u="none" strike="noStrike" cap="none" normalizeH="0" baseline="0" smtClean="0">
+                                        <a:ln>
+                                          <a:noFill/>
+                                        </a:ln>
+                                        <a:effectLst/>
+                                        <a:latin typeface="Cambria Math" panose="02040503050406030204" pitchFamily="18" charset="0"/>
+                                      </a:rPr>
+                                      <m:t>𝒈𝒕𝑽𝒐𝒍</m:t>
+                                    </m:r>
+                                    <m:r>
+                                      <a:rPr kumimoji="0" lang="en-US" altLang="en-US" sz="1400" b="1" i="1" u="none" strike="noStrike" cap="none" normalizeH="0" baseline="0" smtClean="0">
+                                        <a:ln>
+                                          <a:noFill/>
+                                        </a:ln>
+                                        <a:effectLst/>
+                                        <a:latin typeface="Cambria Math" panose="02040503050406030204" pitchFamily="18" charset="0"/>
+                                      </a:rPr>
+                                      <m:t> ∩</m:t>
+                                    </m:r>
+                                    <m:r>
+                                      <a:rPr kumimoji="0" lang="en-US" altLang="en-US" sz="1400" b="1" i="1" u="none" strike="noStrike" cap="none" normalizeH="0" baseline="0" smtClean="0">
+                                        <a:ln>
+                                          <a:noFill/>
+                                        </a:ln>
+                                        <a:effectLst/>
+                                        <a:latin typeface="Cambria Math" panose="02040503050406030204" pitchFamily="18" charset="0"/>
+                                        <a:ea typeface="Cambria Math" panose="02040503050406030204" pitchFamily="18" charset="0"/>
+                                      </a:rPr>
+                                      <m:t>𝒑𝒓𝒆𝒅𝑽𝒐𝒍</m:t>
+                                    </m:r>
+                                    <m:r>
+                                      <a:rPr kumimoji="0" lang="en-US" altLang="en-US" sz="1400" b="1" i="1" u="none" strike="noStrike" cap="none" normalizeH="0" baseline="0" smtClean="0">
+                                        <a:ln>
+                                          <a:noFill/>
+                                        </a:ln>
+                                        <a:effectLst/>
+                                        <a:latin typeface="Cambria Math" panose="02040503050406030204" pitchFamily="18" charset="0"/>
+                                        <a:ea typeface="Cambria Math" panose="02040503050406030204" pitchFamily="18" charset="0"/>
+                                      </a:rPr>
+                                      <m:t>|</m:t>
+                                    </m:r>
+                                  </m:num>
+                                  <m:den>
+                                    <m:d>
+                                      <m:dPr>
+                                        <m:begChr m:val="|"/>
+                                        <m:endChr m:val="|"/>
+                                        <m:ctrlPr>
+                                          <a:rPr kumimoji="0" lang="en-US" altLang="en-US" sz="1400" b="1" i="0" u="none" strike="noStrike" cap="none" normalizeH="0" baseline="0" smtClean="0">
+                                            <a:ln>
+                                              <a:noFill/>
+                                            </a:ln>
+                                            <a:effectLst/>
+                                            <a:latin typeface="Cambria Math" panose="02040503050406030204" pitchFamily="18" charset="0"/>
+                                          </a:rPr>
+                                        </m:ctrlPr>
+                                      </m:dPr>
+                                      <m:e>
+                                        <m:r>
+                                          <a:rPr kumimoji="0" lang="en-US" altLang="en-US" sz="1400" b="1" i="1" u="none" strike="noStrike" cap="none" normalizeH="0" baseline="0" smtClean="0">
+                                            <a:ln>
+                                              <a:noFill/>
+                                            </a:ln>
+                                            <a:effectLst/>
+                                            <a:latin typeface="Cambria Math" panose="02040503050406030204" pitchFamily="18" charset="0"/>
+                                          </a:rPr>
+                                          <m:t>𝒈𝒕𝑽𝒐𝒍</m:t>
+                                        </m:r>
+                                      </m:e>
+                                    </m:d>
+                                    <m:r>
+                                      <a:rPr kumimoji="0" lang="en-US" altLang="en-US" sz="1400" b="1" i="1" u="none" strike="noStrike" cap="none" normalizeH="0" baseline="0" smtClean="0">
+                                        <a:ln>
+                                          <a:noFill/>
+                                        </a:ln>
+                                        <a:effectLst/>
+                                        <a:latin typeface="Cambria Math" panose="02040503050406030204" pitchFamily="18" charset="0"/>
+                                      </a:rPr>
+                                      <m:t>+|</m:t>
+                                    </m:r>
+                                    <m:r>
+                                      <a:rPr kumimoji="0" lang="en-US" altLang="en-US" sz="1400" b="1" i="1" u="none" strike="noStrike" cap="none" normalizeH="0" baseline="0" smtClean="0">
+                                        <a:ln>
+                                          <a:noFill/>
+                                        </a:ln>
+                                        <a:effectLst/>
+                                        <a:latin typeface="Cambria Math" panose="02040503050406030204" pitchFamily="18" charset="0"/>
+                                        <a:ea typeface="Cambria Math" panose="02040503050406030204" pitchFamily="18" charset="0"/>
+                                      </a:rPr>
+                                      <m:t>𝒑𝒓𝒆𝒅𝑽𝒐𝒍</m:t>
+                                    </m:r>
+                                    <m:r>
+                                      <a:rPr kumimoji="0" lang="en-US" altLang="en-US" sz="1400" b="1" i="1" u="none" strike="noStrike" cap="none" normalizeH="0" baseline="0" smtClean="0">
+                                        <a:ln>
+                                          <a:noFill/>
+                                        </a:ln>
+                                        <a:effectLst/>
+                                        <a:latin typeface="Cambria Math" panose="02040503050406030204" pitchFamily="18" charset="0"/>
+                                        <a:ea typeface="Cambria Math" panose="02040503050406030204" pitchFamily="18" charset="0"/>
+                                      </a:rPr>
+                                      <m:t>|</m:t>
+                                    </m:r>
+                                  </m:den>
+                                </m:f>
+                              </m:oMath>
+                            </m:oMathPara>
+                          </a14:m>
+                          <a:endParaRPr lang="en-US" sz="1400" dirty="0"/>
+                        </a:p>
+                      </a:txBody>
+                      <a:tcPr/>
+                    </a:tc>
+                    <a:tc>
+                      <a:txBody>
+                        <a:bodyPr/>
+                        <a:lstStyle/>
+                        <a:p>
+                          <a:r>
+                            <a:rPr kumimoji="0" lang="en-US" altLang="en-US" sz="1400" b="0" i="0" u="none" strike="noStrike" cap="none" normalizeH="0" baseline="0" dirty="0">
+                              <a:ln>
+                                <a:noFill/>
+                              </a:ln>
+                              <a:effectLst/>
+                              <a:latin typeface="Arial" panose="020B0604020202020204" pitchFamily="34" charset="0"/>
+                            </a:rPr>
+                            <a:t>Measures similarity between ground truth &amp; predicted volumes; 0-1(identical)</a:t>
+                          </a:r>
+                          <a:endParaRPr lang="en-US" sz="1400" b="0" dirty="0"/>
+                        </a:p>
+                      </a:txBody>
+                      <a:tcPr/>
+                    </a:tc>
+                    <a:extLst>
+                      <a:ext uri="{0D108BD9-81ED-4DB2-BD59-A6C34878D82A}">
+                        <a16:rowId xmlns:a16="http://schemas.microsoft.com/office/drawing/2014/main" val="1850479681"/>
+                      </a:ext>
+                    </a:extLst>
+                  </a:tr>
+                  <a:tr h="370840">
+                    <a:tc>
+                      <a:txBody>
+                        <a:bodyPr/>
+                        <a:lstStyle/>
+                        <a:p>
+                          <a:pPr/>
+                          <a14:m>
+                            <m:oMathPara xmlns:m="http://schemas.openxmlformats.org/officeDocument/2006/math">
+                              <m:oMathParaPr>
+                                <m:jc m:val="left"/>
+                              </m:oMathParaPr>
+                              <m:oMath xmlns:m="http://schemas.openxmlformats.org/officeDocument/2006/math">
+                                <m:r>
+                                  <a:rPr lang="en-US" sz="1400" b="0" i="1" smtClean="0">
+                                    <a:latin typeface="Cambria Math" panose="02040503050406030204" pitchFamily="18" charset="0"/>
+                                  </a:rPr>
+                                  <m:t>𝐽𝑎𝑐𝑐𝑎𝑟𝑑</m:t>
+                                </m:r>
+                                <m:r>
+                                  <a:rPr lang="en-US" sz="1400" b="0" i="1" smtClean="0">
+                                    <a:latin typeface="Cambria Math" panose="02040503050406030204" pitchFamily="18" charset="0"/>
+                                  </a:rPr>
+                                  <m:t>=</m:t>
+                                </m:r>
+                                <m:f>
+                                  <m:fPr>
+                                    <m:ctrlPr>
+                                      <a:rPr lang="en-US" sz="1400" b="0" i="1" smtClean="0">
+                                        <a:latin typeface="Cambria Math" panose="02040503050406030204" pitchFamily="18" charset="0"/>
+                                      </a:rPr>
+                                    </m:ctrlPr>
+                                  </m:fPr>
+                                  <m:num>
+                                    <m:r>
+                                      <a:rPr kumimoji="0" lang="en-US" altLang="en-US" sz="1400" b="1" i="0" u="none" strike="noStrike" cap="none" normalizeH="0" baseline="0" smtClean="0">
+                                        <a:ln>
+                                          <a:noFill/>
+                                        </a:ln>
+                                        <a:effectLst/>
+                                        <a:latin typeface="Cambria Math" panose="02040503050406030204" pitchFamily="18" charset="0"/>
+                                      </a:rPr>
+                                      <m:t>|</m:t>
+                                    </m:r>
+                                    <m:r>
+                                      <a:rPr kumimoji="0" lang="en-US" altLang="en-US" sz="1400" b="1" i="1" u="none" strike="noStrike" cap="none" normalizeH="0" baseline="0" smtClean="0">
+                                        <a:ln>
+                                          <a:noFill/>
+                                        </a:ln>
+                                        <a:effectLst/>
+                                        <a:latin typeface="Cambria Math" panose="02040503050406030204" pitchFamily="18" charset="0"/>
+                                      </a:rPr>
+                                      <m:t>𝒈𝒕𝑽𝒐𝒍</m:t>
+                                    </m:r>
+                                    <m:r>
+                                      <a:rPr kumimoji="0" lang="en-US" altLang="en-US" sz="1400" b="1" i="1" u="none" strike="noStrike" cap="none" normalizeH="0" baseline="0" smtClean="0">
+                                        <a:ln>
+                                          <a:noFill/>
+                                        </a:ln>
+                                        <a:effectLst/>
+                                        <a:latin typeface="Cambria Math" panose="02040503050406030204" pitchFamily="18" charset="0"/>
+                                      </a:rPr>
+                                      <m:t> ∩</m:t>
+                                    </m:r>
+                                    <m:r>
+                                      <a:rPr kumimoji="0" lang="en-US" altLang="en-US" sz="1400" b="1" i="1" u="none" strike="noStrike" cap="none" normalizeH="0" baseline="0" smtClean="0">
+                                        <a:ln>
+                                          <a:noFill/>
+                                        </a:ln>
+                                        <a:effectLst/>
+                                        <a:latin typeface="Cambria Math" panose="02040503050406030204" pitchFamily="18" charset="0"/>
+                                        <a:ea typeface="Cambria Math" panose="02040503050406030204" pitchFamily="18" charset="0"/>
+                                      </a:rPr>
+                                      <m:t>𝒑𝒓𝒆𝒅𝑽𝒐𝒍</m:t>
+                                    </m:r>
+                                    <m:r>
+                                      <a:rPr kumimoji="0" lang="en-US" altLang="en-US" sz="1400" b="1" i="1" u="none" strike="noStrike" cap="none" normalizeH="0" baseline="0" smtClean="0">
+                                        <a:ln>
+                                          <a:noFill/>
+                                        </a:ln>
+                                        <a:effectLst/>
+                                        <a:latin typeface="Cambria Math" panose="02040503050406030204" pitchFamily="18" charset="0"/>
+                                        <a:ea typeface="Cambria Math" panose="02040503050406030204" pitchFamily="18" charset="0"/>
+                                      </a:rPr>
+                                      <m:t>|</m:t>
+                                    </m:r>
+                                  </m:num>
+                                  <m:den>
+                                    <m:d>
+                                      <m:dPr>
+                                        <m:begChr m:val="|"/>
+                                        <m:endChr m:val="|"/>
+                                        <m:ctrlPr>
+                                          <a:rPr kumimoji="0" lang="en-US" altLang="en-US" sz="1400" b="1" i="1" u="none" strike="noStrike" cap="none" normalizeH="0" baseline="0" smtClean="0">
+                                            <a:ln>
+                                              <a:noFill/>
+                                            </a:ln>
+                                            <a:effectLst/>
+                                            <a:latin typeface="Cambria Math" panose="02040503050406030204" pitchFamily="18" charset="0"/>
+                                          </a:rPr>
+                                        </m:ctrlPr>
+                                      </m:dPr>
+                                      <m:e>
+                                        <m:r>
+                                          <a:rPr kumimoji="0" lang="en-US" altLang="en-US" sz="1400" b="1" i="1" u="none" strike="noStrike" cap="none" normalizeH="0" baseline="0" smtClean="0">
+                                            <a:ln>
+                                              <a:noFill/>
+                                            </a:ln>
+                                            <a:effectLst/>
+                                            <a:latin typeface="Cambria Math" panose="02040503050406030204" pitchFamily="18" charset="0"/>
+                                          </a:rPr>
+                                          <m:t>𝒈𝒕𝑽𝒐𝒍</m:t>
+                                        </m:r>
+                                        <m:r>
+                                          <a:rPr kumimoji="0" lang="en-US" altLang="en-US" sz="1400" b="1" i="1" u="none" strike="noStrike" cap="none" normalizeH="0" baseline="0" smtClean="0">
+                                            <a:ln>
+                                              <a:noFill/>
+                                            </a:ln>
+                                            <a:effectLst/>
+                                            <a:latin typeface="Cambria Math" panose="02040503050406030204" pitchFamily="18" charset="0"/>
+                                            <a:ea typeface="Cambria Math" panose="02040503050406030204" pitchFamily="18" charset="0"/>
+                                          </a:rPr>
+                                          <m:t>∪</m:t>
+                                        </m:r>
+                                        <m:r>
+                                          <a:rPr kumimoji="0" lang="en-US" altLang="en-US" sz="1400" b="1" i="1" u="none" strike="noStrike" cap="none" normalizeH="0" baseline="0" smtClean="0">
+                                            <a:ln>
+                                              <a:noFill/>
+                                            </a:ln>
+                                            <a:effectLst/>
+                                            <a:latin typeface="Cambria Math" panose="02040503050406030204" pitchFamily="18" charset="0"/>
+                                          </a:rPr>
+                                          <m:t> </m:t>
+                                        </m:r>
+                                        <m:r>
+                                          <a:rPr kumimoji="0" lang="en-US" altLang="en-US" sz="1400" b="1" i="1" u="none" strike="noStrike" cap="none" normalizeH="0" baseline="0" smtClean="0">
+                                            <a:ln>
+                                              <a:noFill/>
+                                            </a:ln>
+                                            <a:effectLst/>
+                                            <a:latin typeface="Cambria Math" panose="02040503050406030204" pitchFamily="18" charset="0"/>
+                                            <a:ea typeface="Cambria Math" panose="02040503050406030204" pitchFamily="18" charset="0"/>
+                                          </a:rPr>
+                                          <m:t>𝒑𝒓𝒆𝒅𝑽𝒐𝒍</m:t>
+                                        </m:r>
+                                      </m:e>
+                                    </m:d>
+                                  </m:den>
+                                </m:f>
+                              </m:oMath>
+                            </m:oMathPara>
+                          </a14:m>
+                          <a:endParaRPr lang="en-US" sz="1400" dirty="0"/>
+                        </a:p>
+                      </a:txBody>
+                      <a:tcPr/>
+                    </a:tc>
+                    <a:tc>
+                      <a:txBody>
+                        <a:bodyPr/>
+                        <a:lstStyle/>
+                        <a:p>
+                          <a:r>
+                            <a:rPr lang="en-US" sz="1400" dirty="0"/>
+                            <a:t>Ratio of intersection to union, 0 – 1, stricter than Dice.</a:t>
+                          </a:r>
+                        </a:p>
+                      </a:txBody>
+                      <a:tcPr/>
+                    </a:tc>
+                    <a:extLst>
+                      <a:ext uri="{0D108BD9-81ED-4DB2-BD59-A6C34878D82A}">
+                        <a16:rowId xmlns:a16="http://schemas.microsoft.com/office/drawing/2014/main" val="4119972858"/>
+                      </a:ext>
+                    </a:extLst>
+                  </a:tr>
+                  <a:tr h="370840">
+                    <a:tc>
+                      <a:txBody>
+                        <a:bodyPr/>
+                        <a:lstStyle/>
+                        <a:p>
+                          <a:r>
+                            <a:rPr kumimoji="0" lang="en-US" altLang="en-US" sz="1400" b="0" i="1" u="none" strike="noStrike" cap="none" normalizeH="0" baseline="0" dirty="0">
+                              <a:ln>
+                                <a:noFill/>
+                              </a:ln>
+                              <a:effectLst/>
+                              <a:latin typeface="+mn-lt"/>
+                            </a:rPr>
+                            <a:t>Precision</a:t>
+                          </a:r>
+                          <a:endParaRPr lang="en-US" sz="1400" b="0" i="1" dirty="0">
+                            <a:latin typeface="+mn-lt"/>
+                          </a:endParaRPr>
+                        </a:p>
+                      </a:txBody>
+                      <a:tcPr/>
+                    </a:tc>
+                    <a:tc>
+                      <a:txBody>
+                        <a:bodyPr/>
+                        <a:lstStyle/>
+                        <a:p>
+                          <a:r>
+                            <a:rPr lang="en-US" sz="1400" dirty="0"/>
+                            <a:t>High when few false positives.</a:t>
+                          </a:r>
+                        </a:p>
+                      </a:txBody>
+                      <a:tcPr/>
+                    </a:tc>
+                    <a:extLst>
+                      <a:ext uri="{0D108BD9-81ED-4DB2-BD59-A6C34878D82A}">
+                        <a16:rowId xmlns:a16="http://schemas.microsoft.com/office/drawing/2014/main" val="372514167"/>
+                      </a:ext>
+                    </a:extLst>
+                  </a:tr>
+                  <a:tr h="370840">
+                    <a:tc>
+                      <a:txBody>
+                        <a:bodyPr/>
+                        <a:lstStyle/>
+                        <a:p>
+                          <a:r>
+                            <a:rPr lang="en-US" sz="1400" i="1" dirty="0"/>
+                            <a:t>Recall</a:t>
+                          </a:r>
+                          <a:endParaRPr lang="en-US" sz="1400" dirty="0"/>
+                        </a:p>
+                      </a:txBody>
+                      <a:tcPr/>
+                    </a:tc>
+                    <a:tc>
+                      <a:txBody>
+                        <a:bodyPr/>
+                        <a:lstStyle/>
+                        <a:p>
+                          <a:r>
+                            <a:rPr lang="en-US" sz="1400" dirty="0"/>
+                            <a:t>High when few false negatives.</a:t>
+                          </a:r>
+                        </a:p>
+                      </a:txBody>
+                      <a:tcPr/>
+                    </a:tc>
+                    <a:extLst>
+                      <a:ext uri="{0D108BD9-81ED-4DB2-BD59-A6C34878D82A}">
+                        <a16:rowId xmlns:a16="http://schemas.microsoft.com/office/drawing/2014/main" val="3217411445"/>
+                      </a:ext>
+                    </a:extLst>
+                  </a:tr>
+                  <a:tr h="370840">
+                    <a:tc>
+                      <a:txBody>
+                        <a:bodyPr/>
+                        <a:lstStyle/>
+                        <a:p>
+                          <a:r>
+                            <a:rPr lang="en-US" sz="1400" i="1" dirty="0"/>
+                            <a:t>F1</a:t>
+                          </a:r>
+                        </a:p>
+                      </a:txBody>
+                      <a:tcPr/>
+                    </a:tc>
+                    <a:tc>
+                      <a:txBody>
+                        <a:bodyPr/>
+                        <a:lstStyle/>
+                        <a:p>
+                          <a:r>
+                            <a:rPr kumimoji="0" lang="en-US" altLang="en-US" sz="1400" b="0" i="0" u="none" strike="noStrike" cap="none" normalizeH="0" baseline="0" dirty="0">
+                              <a:ln>
+                                <a:noFill/>
+                              </a:ln>
+                              <a:effectLst/>
+                              <a:latin typeface="+mn-lt"/>
+                            </a:rPr>
+                            <a:t>FP vs FN trade-off.</a:t>
+                          </a:r>
+                          <a:endParaRPr lang="en-US" sz="1400" dirty="0">
+                            <a:latin typeface="+mn-lt"/>
+                          </a:endParaRPr>
+                        </a:p>
+                      </a:txBody>
+                      <a:tcPr/>
+                    </a:tc>
+                    <a:extLst>
+                      <a:ext uri="{0D108BD9-81ED-4DB2-BD59-A6C34878D82A}">
+                        <a16:rowId xmlns:a16="http://schemas.microsoft.com/office/drawing/2014/main" val="1525592243"/>
+                      </a:ext>
+                    </a:extLst>
+                  </a:tr>
+                  <a:tr h="370840">
+                    <a:tc>
+                      <a:txBody>
+                        <a:bodyPr/>
+                        <a:lstStyle/>
+                        <a:p>
+                          <a:pPr rtl="0"/>
+                          <a14:m>
+                            <m:oMathPara xmlns:m="http://schemas.openxmlformats.org/officeDocument/2006/math">
+                              <m:oMathParaPr>
+                                <m:jc m:val="left"/>
+                              </m:oMathParaPr>
+                              <m:oMath xmlns:m="http://schemas.openxmlformats.org/officeDocument/2006/math">
+                                <m:r>
+                                  <a:rPr lang="en-US" sz="1400" b="0" i="1" smtClean="0">
+                                    <a:latin typeface="Cambria Math" panose="02040503050406030204" pitchFamily="18" charset="0"/>
+                                  </a:rPr>
+                                  <m:t>𝑅𝑉𝐷</m:t>
+                                </m:r>
+                                <m:r>
+                                  <a:rPr lang="en-US" sz="1400" b="0" i="1" smtClean="0">
+                                    <a:latin typeface="Cambria Math" panose="02040503050406030204" pitchFamily="18" charset="0"/>
+                                  </a:rPr>
+                                  <m:t>=</m:t>
+                                </m:r>
+                                <m:f>
+                                  <m:fPr>
+                                    <m:ctrlPr>
+                                      <a:rPr lang="en-US" sz="1400" b="0" i="1" smtClean="0">
+                                        <a:latin typeface="Cambria Math" panose="02040503050406030204" pitchFamily="18" charset="0"/>
+                                      </a:rPr>
+                                    </m:ctrlPr>
+                                  </m:fPr>
+                                  <m:num>
+                                    <m:r>
+                                      <a:rPr lang="en-US" sz="1400" b="1" i="1" smtClean="0">
+                                        <a:latin typeface="Cambria Math" panose="02040503050406030204" pitchFamily="18" charset="0"/>
+                                      </a:rPr>
+                                      <m:t>|</m:t>
+                                    </m:r>
+                                    <m:r>
+                                      <a:rPr kumimoji="0" lang="en-US" altLang="en-US" sz="1400" b="1" i="1" u="none" strike="noStrike" cap="none" normalizeH="0" baseline="0" smtClean="0">
+                                        <a:ln>
+                                          <a:noFill/>
+                                        </a:ln>
+                                        <a:effectLst/>
+                                        <a:latin typeface="Cambria Math" panose="02040503050406030204" pitchFamily="18" charset="0"/>
+                                        <a:ea typeface="Cambria Math" panose="02040503050406030204" pitchFamily="18" charset="0"/>
+                                      </a:rPr>
+                                      <m:t>𝒑𝒓𝒆𝒅𝑽𝒐𝒍</m:t>
+                                    </m:r>
+                                    <m:r>
+                                      <a:rPr kumimoji="0" lang="en-US" altLang="en-US" sz="1400" b="1" i="1" u="none" strike="noStrike" cap="none" normalizeH="0" baseline="0" smtClean="0">
+                                        <a:ln>
+                                          <a:noFill/>
+                                        </a:ln>
+                                        <a:effectLst/>
+                                        <a:latin typeface="Cambria Math" panose="02040503050406030204" pitchFamily="18" charset="0"/>
+                                        <a:ea typeface="Cambria Math" panose="02040503050406030204" pitchFamily="18" charset="0"/>
+                                      </a:rPr>
+                                      <m:t>|−|</m:t>
+                                    </m:r>
+                                    <m:r>
+                                      <a:rPr kumimoji="0" lang="en-US" altLang="en-US" sz="1400" b="1" i="1" u="none" strike="noStrike" cap="none" normalizeH="0" baseline="0" smtClean="0">
+                                        <a:ln>
+                                          <a:noFill/>
+                                        </a:ln>
+                                        <a:effectLst/>
+                                        <a:latin typeface="Cambria Math" panose="02040503050406030204" pitchFamily="18" charset="0"/>
+                                      </a:rPr>
+                                      <m:t>𝒈𝒕𝑽𝒐𝒍</m:t>
+                                    </m:r>
+                                    <m:r>
+                                      <a:rPr kumimoji="0" lang="en-US" altLang="en-US" sz="1400" b="1" i="1" u="none" strike="noStrike" cap="none" normalizeH="0" baseline="0" smtClean="0">
+                                        <a:ln>
+                                          <a:noFill/>
+                                        </a:ln>
+                                        <a:effectLst/>
+                                        <a:latin typeface="Cambria Math" panose="02040503050406030204" pitchFamily="18" charset="0"/>
+                                      </a:rPr>
+                                      <m:t>|</m:t>
+                                    </m:r>
+                                    <m:r>
+                                      <a:rPr kumimoji="0" lang="en-US" altLang="en-US" sz="1400" b="1" i="1" u="none" strike="noStrike" cap="none" normalizeH="0" baseline="0" smtClean="0">
+                                        <a:ln>
+                                          <a:noFill/>
+                                        </a:ln>
+                                        <a:effectLst/>
+                                        <a:latin typeface="Cambria Math" panose="02040503050406030204" pitchFamily="18" charset="0"/>
+                                      </a:rPr>
+                                      <m:t> </m:t>
+                                    </m:r>
+                                  </m:num>
+                                  <m:den>
+                                    <m:d>
+                                      <m:dPr>
+                                        <m:begChr m:val="|"/>
+                                        <m:endChr m:val="|"/>
+                                        <m:ctrlPr>
+                                          <a:rPr kumimoji="0" lang="en-US" altLang="en-US" sz="1400" b="1" i="1" u="none" strike="noStrike" cap="none" normalizeH="0" baseline="0" smtClean="0">
+                                            <a:ln>
+                                              <a:noFill/>
+                                            </a:ln>
+                                            <a:effectLst/>
+                                            <a:latin typeface="Cambria Math" panose="02040503050406030204" pitchFamily="18" charset="0"/>
+                                          </a:rPr>
+                                        </m:ctrlPr>
+                                      </m:dPr>
+                                      <m:e>
+                                        <m:r>
+                                          <a:rPr kumimoji="0" lang="en-US" altLang="en-US" sz="1400" b="1" i="1" u="none" strike="noStrike" cap="none" normalizeH="0" baseline="0" smtClean="0">
+                                            <a:ln>
+                                              <a:noFill/>
+                                            </a:ln>
+                                            <a:effectLst/>
+                                            <a:latin typeface="Cambria Math" panose="02040503050406030204" pitchFamily="18" charset="0"/>
+                                          </a:rPr>
+                                          <m:t>𝒈𝒕𝑽𝒐𝒍</m:t>
+                                        </m:r>
+                                      </m:e>
+                                    </m:d>
+                                  </m:den>
+                                </m:f>
+                              </m:oMath>
+                            </m:oMathPara>
+                          </a14:m>
+                          <a:endParaRPr lang="en-US" sz="1400" i="1" dirty="0"/>
+                        </a:p>
+                      </a:txBody>
+                      <a:tcPr/>
+                    </a:tc>
+                    <a:tc>
+                      <a:txBody>
+                        <a:bodyPr/>
+                        <a:lstStyle/>
+                        <a:p>
+                          <a:r>
+                            <a:rPr lang="en-US" sz="1400" dirty="0"/>
+                            <a:t>Positive when </a:t>
+                          </a:r>
+                          <a14:m>
+                            <m:oMath xmlns:m="http://schemas.openxmlformats.org/officeDocument/2006/math">
+                              <m:d>
+                                <m:dPr>
+                                  <m:begChr m:val="|"/>
+                                  <m:endChr m:val="|"/>
+                                  <m:ctrlPr>
+                                    <a:rPr kumimoji="0" lang="en-US" altLang="en-US" sz="1400" b="1" i="1" u="none" strike="noStrike" cap="none" normalizeH="0" baseline="0" smtClean="0">
+                                      <a:ln>
+                                        <a:noFill/>
+                                      </a:ln>
+                                      <a:effectLst/>
+                                      <a:latin typeface="Cambria Math" panose="02040503050406030204" pitchFamily="18" charset="0"/>
+                                      <a:ea typeface="Cambria Math" panose="02040503050406030204" pitchFamily="18" charset="0"/>
+                                    </a:rPr>
+                                  </m:ctrlPr>
+                                </m:dPr>
+                                <m:e>
+                                  <m:r>
+                                    <a:rPr kumimoji="0" lang="en-US" altLang="en-US" sz="1400" b="1" i="1" u="none" strike="noStrike" cap="none" normalizeH="0" baseline="0" smtClean="0">
+                                      <a:ln>
+                                        <a:noFill/>
+                                      </a:ln>
+                                      <a:effectLst/>
+                                      <a:latin typeface="Cambria Math" panose="02040503050406030204" pitchFamily="18" charset="0"/>
+                                      <a:ea typeface="Cambria Math" panose="02040503050406030204" pitchFamily="18" charset="0"/>
+                                    </a:rPr>
+                                    <m:t>𝒑𝒓𝒆𝒅𝑽𝒐𝒍</m:t>
+                                  </m:r>
+                                </m:e>
+                              </m:d>
+                              <m:r>
+                                <a:rPr kumimoji="0" lang="en-US" altLang="en-US" sz="1400" b="1" i="1" u="none" strike="noStrike" cap="none" normalizeH="0" baseline="0" smtClean="0">
+                                  <a:ln>
+                                    <a:noFill/>
+                                  </a:ln>
+                                  <a:effectLst/>
+                                  <a:latin typeface="Cambria Math" panose="02040503050406030204" pitchFamily="18" charset="0"/>
+                                  <a:ea typeface="Cambria Math" panose="02040503050406030204" pitchFamily="18" charset="0"/>
+                                </a:rPr>
+                                <m:t>&gt;</m:t>
+                              </m:r>
+                              <m:r>
+                                <a:rPr kumimoji="0" lang="en-US" altLang="en-US" sz="1400" b="1" i="1" u="none" strike="noStrike" cap="none" normalizeH="0" baseline="0" smtClean="0">
+                                  <a:ln>
+                                    <a:noFill/>
+                                  </a:ln>
+                                  <a:effectLst/>
+                                  <a:latin typeface="Cambria Math" panose="02040503050406030204" pitchFamily="18" charset="0"/>
+                                  <a:ea typeface="Cambria Math" panose="02040503050406030204" pitchFamily="18" charset="0"/>
+                                </a:rPr>
+                                <m:t>|</m:t>
+                              </m:r>
+                              <m:r>
+                                <a:rPr kumimoji="0" lang="en-US" altLang="en-US" sz="1400" b="1" i="1" u="none" strike="noStrike" cap="none" normalizeH="0" baseline="0" smtClean="0">
+                                  <a:ln>
+                                    <a:noFill/>
+                                  </a:ln>
+                                  <a:effectLst/>
+                                  <a:latin typeface="Cambria Math" panose="02040503050406030204" pitchFamily="18" charset="0"/>
+                                </a:rPr>
+                                <m:t>𝒈𝒕𝑽𝒐𝒍</m:t>
+                              </m:r>
+                              <m:r>
+                                <a:rPr kumimoji="0" lang="en-US" altLang="en-US" sz="1400" b="1" i="1" u="none" strike="noStrike" cap="none" normalizeH="0" baseline="0" smtClean="0">
+                                  <a:ln>
+                                    <a:noFill/>
+                                  </a:ln>
+                                  <a:effectLst/>
+                                  <a:latin typeface="Cambria Math" panose="02040503050406030204" pitchFamily="18" charset="0"/>
+                                </a:rPr>
+                                <m:t>| </m:t>
+                              </m:r>
+                            </m:oMath>
+                          </a14:m>
+                          <a:r>
+                            <a:rPr lang="en-US" sz="1400" dirty="0"/>
+                            <a:t>, 0-ideal</a:t>
+                          </a:r>
+                        </a:p>
+                      </a:txBody>
+                      <a:tcPr/>
+                    </a:tc>
+                    <a:extLst>
+                      <a:ext uri="{0D108BD9-81ED-4DB2-BD59-A6C34878D82A}">
+                        <a16:rowId xmlns:a16="http://schemas.microsoft.com/office/drawing/2014/main" val="2789335868"/>
+                      </a:ext>
+                    </a:extLst>
+                  </a:tr>
+                  <a:tr h="370840">
+                    <a:tc>
+                      <a:txBody>
+                        <a:bodyPr/>
+                        <a:lstStyle/>
+                        <a:p>
+                          <a:pPr rtl="0"/>
+                          <a:r>
+                            <a:rPr lang="en-US" sz="1400" i="1" dirty="0" err="1">
+                              <a:latin typeface="+mn-lt"/>
+                            </a:rPr>
+                            <a:t>Hausdorff</a:t>
+                          </a:r>
+                          <a:r>
+                            <a:rPr lang="en-US" sz="1400" i="1" dirty="0">
+                              <a:latin typeface="+mn-lt"/>
+                            </a:rPr>
+                            <a:t> Distance</a:t>
+                          </a:r>
+                        </a:p>
+                      </a:txBody>
+                      <a:tcPr/>
+                    </a:tc>
+                    <a:tc>
+                      <a:txBody>
+                        <a:bodyPr/>
+                        <a:lstStyle/>
+                        <a:p>
+                          <a:r>
+                            <a:rPr lang="en-US" sz="1400" dirty="0">
+                              <a:latin typeface="+mn-lt"/>
+                            </a:rPr>
+                            <a:t>The maximum surface-to-surface error, captures the worst‐case boundary mismatch.</a:t>
+                          </a:r>
+                        </a:p>
+                      </a:txBody>
+                      <a:tcPr/>
+                    </a:tc>
+                    <a:extLst>
+                      <a:ext uri="{0D108BD9-81ED-4DB2-BD59-A6C34878D82A}">
+                        <a16:rowId xmlns:a16="http://schemas.microsoft.com/office/drawing/2014/main" val="314145622"/>
+                      </a:ext>
+                    </a:extLst>
+                  </a:tr>
+                  <a:tr h="370840">
+                    <a:tc>
+                      <a:txBody>
+                        <a:bodyPr/>
+                        <a:lstStyle/>
+                        <a:p>
+                          <a:pPr rtl="0"/>
+                          <a:r>
+                            <a:rPr lang="en-US" sz="1400" i="1" dirty="0"/>
+                            <a:t>HD95 (95th-Percentile </a:t>
+                          </a:r>
+                          <a:r>
+                            <a:rPr lang="en-US" sz="1400" i="1" dirty="0" err="1"/>
+                            <a:t>Hausdorff</a:t>
+                          </a:r>
+                          <a:r>
+                            <a:rPr lang="en-US" sz="1400" i="1" dirty="0"/>
+                            <a:t>)</a:t>
+                          </a:r>
+                        </a:p>
+                      </a:txBody>
+                      <a:tcPr/>
+                    </a:tc>
+                    <a:tc>
+                      <a:txBody>
+                        <a:bodyPr/>
+                        <a:lstStyle/>
+                        <a:p>
+                          <a:r>
+                            <a:rPr lang="en-US" sz="1400" dirty="0"/>
+                            <a:t>95th percentile of all point‐to‐surface distances instead of the maximum, reduces sensitivity to outliers.</a:t>
+                          </a:r>
+                        </a:p>
+                      </a:txBody>
+                      <a:tcPr/>
+                    </a:tc>
+                    <a:extLst>
+                      <a:ext uri="{0D108BD9-81ED-4DB2-BD59-A6C34878D82A}">
+                        <a16:rowId xmlns:a16="http://schemas.microsoft.com/office/drawing/2014/main" val="2171425090"/>
+                      </a:ext>
+                    </a:extLst>
+                  </a:tr>
+                </a:tbl>
+              </a:graphicData>
+            </a:graphic>
+          </p:graphicFrame>
+        </mc:Choice>
+        <mc:Fallback>
+          <p:graphicFrame>
+            <p:nvGraphicFramePr>
+              <p:cNvPr id="7" name="Table 6">
+                <a:extLst>
+                  <a:ext uri="{FF2B5EF4-FFF2-40B4-BE49-F238E27FC236}">
+                    <a16:creationId xmlns:a16="http://schemas.microsoft.com/office/drawing/2014/main" id="{5431B4FC-6363-E964-B38F-E2B13830372B}"/>
+                  </a:ext>
+                </a:extLst>
+              </p:cNvPr>
+              <p:cNvGraphicFramePr>
+                <a:graphicFrameLocks noGrp="1"/>
+              </p:cNvGraphicFramePr>
+              <p:nvPr>
+                <p:extLst>
+                  <p:ext uri="{D42A27DB-BD31-4B8C-83A1-F6EECF244321}">
+                    <p14:modId xmlns:p14="http://schemas.microsoft.com/office/powerpoint/2010/main" val="3210286256"/>
+                  </p:ext>
+                </p:extLst>
+              </p:nvPr>
+            </p:nvGraphicFramePr>
+            <p:xfrm>
+              <a:off x="143555" y="891995"/>
+              <a:ext cx="7940660" cy="4209252"/>
+            </p:xfrm>
+            <a:graphic>
+              <a:graphicData uri="http://schemas.openxmlformats.org/drawingml/2006/table">
+                <a:tbl>
+                  <a:tblPr firstRow="1" bandRow="1">
+                    <a:tableStyleId>{5C22544A-7EE6-4342-B048-85BDC9FD1C3A}</a:tableStyleId>
+                  </a:tblPr>
+                  <a:tblGrid>
+                    <a:gridCol w="3302000">
+                      <a:extLst>
+                        <a:ext uri="{9D8B030D-6E8A-4147-A177-3AD203B41FA5}">
+                          <a16:colId xmlns:a16="http://schemas.microsoft.com/office/drawing/2014/main" val="2582254651"/>
+                        </a:ext>
+                      </a:extLst>
+                    </a:gridCol>
+                    <a:gridCol w="4638660">
+                      <a:extLst>
+                        <a:ext uri="{9D8B030D-6E8A-4147-A177-3AD203B41FA5}">
+                          <a16:colId xmlns:a16="http://schemas.microsoft.com/office/drawing/2014/main" val="1943090721"/>
+                        </a:ext>
+                      </a:extLst>
+                    </a:gridCol>
+                  </a:tblGrid>
+                  <a:tr h="458115">
+                    <a:tc>
+                      <a:txBody>
+                        <a:bodyPr/>
+                        <a:lstStyle/>
+                        <a:p>
+                          <a:r>
+                            <a:rPr lang="en-US" b="0" dirty="0"/>
+                            <a:t>Metric</a:t>
+                          </a:r>
+                        </a:p>
+                      </a:txBody>
+                      <a:tcPr/>
+                    </a:tc>
+                    <a:tc>
+                      <a:txBody>
+                        <a:bodyPr/>
+                        <a:lstStyle/>
+                        <a:p>
+                          <a:r>
+                            <a:rPr lang="en-US" b="0" dirty="0"/>
+                            <a:t>Short description</a:t>
+                          </a:r>
+                        </a:p>
+                      </a:txBody>
+                      <a:tcPr/>
+                    </a:tc>
+                    <a:extLst>
+                      <a:ext uri="{0D108BD9-81ED-4DB2-BD59-A6C34878D82A}">
+                        <a16:rowId xmlns:a16="http://schemas.microsoft.com/office/drawing/2014/main" val="895368645"/>
+                      </a:ext>
+                    </a:extLst>
+                  </a:tr>
+                  <a:tr h="534099">
+                    <a:tc>
+                      <a:txBody>
+                        <a:bodyPr/>
+                        <a:lstStyle/>
+                        <a:p>
+                          <a:endParaRPr lang="en-US"/>
+                        </a:p>
+                      </a:txBody>
+                      <a:tcPr>
+                        <a:blipFill>
+                          <a:blip r:embed="rId3"/>
+                          <a:stretch>
+                            <a:fillRect l="-185" t="-90909" r="-141328" b="-611364"/>
+                          </a:stretch>
+                        </a:blipFill>
+                      </a:tcPr>
+                    </a:tc>
+                    <a:tc>
+                      <a:txBody>
+                        <a:bodyPr/>
+                        <a:lstStyle/>
+                        <a:p>
+                          <a:r>
+                            <a:rPr kumimoji="0" lang="en-US" altLang="en-US" sz="1400" b="0" i="0" u="none" strike="noStrike" cap="none" normalizeH="0" baseline="0" dirty="0">
+                              <a:ln>
+                                <a:noFill/>
+                              </a:ln>
+                              <a:effectLst/>
+                              <a:latin typeface="Arial" panose="020B0604020202020204" pitchFamily="34" charset="0"/>
+                            </a:rPr>
+                            <a:t>Measures similarity between ground truth &amp; predicted volumes; 0-1(identical)</a:t>
+                          </a:r>
+                          <a:endParaRPr lang="en-US" sz="1400" b="0" dirty="0"/>
+                        </a:p>
+                      </a:txBody>
+                      <a:tcPr/>
+                    </a:tc>
+                    <a:extLst>
+                      <a:ext uri="{0D108BD9-81ED-4DB2-BD59-A6C34878D82A}">
+                        <a16:rowId xmlns:a16="http://schemas.microsoft.com/office/drawing/2014/main" val="1850479681"/>
+                      </a:ext>
+                    </a:extLst>
+                  </a:tr>
+                  <a:tr h="534099">
+                    <a:tc>
+                      <a:txBody>
+                        <a:bodyPr/>
+                        <a:lstStyle/>
+                        <a:p>
+                          <a:endParaRPr lang="en-US"/>
+                        </a:p>
+                      </a:txBody>
+                      <a:tcPr>
+                        <a:blipFill>
+                          <a:blip r:embed="rId3"/>
+                          <a:stretch>
+                            <a:fillRect l="-185" t="-190909" r="-141328" b="-511364"/>
+                          </a:stretch>
+                        </a:blipFill>
+                      </a:tcPr>
+                    </a:tc>
+                    <a:tc>
+                      <a:txBody>
+                        <a:bodyPr/>
+                        <a:lstStyle/>
+                        <a:p>
+                          <a:r>
+                            <a:rPr lang="en-US" sz="1400" dirty="0"/>
+                            <a:t>Ratio of intersection to union, 0 – 1, stricter than Dice.</a:t>
+                          </a:r>
+                        </a:p>
+                      </a:txBody>
+                      <a:tcPr/>
+                    </a:tc>
+                    <a:extLst>
+                      <a:ext uri="{0D108BD9-81ED-4DB2-BD59-A6C34878D82A}">
+                        <a16:rowId xmlns:a16="http://schemas.microsoft.com/office/drawing/2014/main" val="4119972858"/>
+                      </a:ext>
+                    </a:extLst>
+                  </a:tr>
+                  <a:tr h="370840">
+                    <a:tc>
+                      <a:txBody>
+                        <a:bodyPr/>
+                        <a:lstStyle/>
+                        <a:p>
+                          <a:r>
+                            <a:rPr kumimoji="0" lang="en-US" altLang="en-US" sz="1400" b="0" i="1" u="none" strike="noStrike" cap="none" normalizeH="0" baseline="0" dirty="0">
+                              <a:ln>
+                                <a:noFill/>
+                              </a:ln>
+                              <a:effectLst/>
+                              <a:latin typeface="+mn-lt"/>
+                            </a:rPr>
+                            <a:t>Precision</a:t>
+                          </a:r>
+                          <a:endParaRPr lang="en-US" sz="1400" b="0" i="1" dirty="0">
+                            <a:latin typeface="+mn-lt"/>
+                          </a:endParaRPr>
+                        </a:p>
+                      </a:txBody>
+                      <a:tcPr/>
+                    </a:tc>
+                    <a:tc>
+                      <a:txBody>
+                        <a:bodyPr/>
+                        <a:lstStyle/>
+                        <a:p>
+                          <a:r>
+                            <a:rPr lang="en-US" sz="1400" dirty="0"/>
+                            <a:t>High when few false positives.</a:t>
+                          </a:r>
+                        </a:p>
+                      </a:txBody>
+                      <a:tcPr/>
+                    </a:tc>
+                    <a:extLst>
+                      <a:ext uri="{0D108BD9-81ED-4DB2-BD59-A6C34878D82A}">
+                        <a16:rowId xmlns:a16="http://schemas.microsoft.com/office/drawing/2014/main" val="372514167"/>
+                      </a:ext>
+                    </a:extLst>
+                  </a:tr>
+                  <a:tr h="370840">
+                    <a:tc>
+                      <a:txBody>
+                        <a:bodyPr/>
+                        <a:lstStyle/>
+                        <a:p>
+                          <a:r>
+                            <a:rPr lang="en-US" sz="1400" i="1" dirty="0"/>
+                            <a:t>Recall</a:t>
+                          </a:r>
+                          <a:endParaRPr lang="en-US" sz="1400" dirty="0"/>
+                        </a:p>
+                      </a:txBody>
+                      <a:tcPr/>
+                    </a:tc>
+                    <a:tc>
+                      <a:txBody>
+                        <a:bodyPr/>
+                        <a:lstStyle/>
+                        <a:p>
+                          <a:r>
+                            <a:rPr lang="en-US" sz="1400" dirty="0"/>
+                            <a:t>High when few false negatives.</a:t>
+                          </a:r>
+                        </a:p>
+                      </a:txBody>
+                      <a:tcPr/>
+                    </a:tc>
+                    <a:extLst>
+                      <a:ext uri="{0D108BD9-81ED-4DB2-BD59-A6C34878D82A}">
+                        <a16:rowId xmlns:a16="http://schemas.microsoft.com/office/drawing/2014/main" val="3217411445"/>
+                      </a:ext>
+                    </a:extLst>
+                  </a:tr>
+                  <a:tr h="370840">
+                    <a:tc>
+                      <a:txBody>
+                        <a:bodyPr/>
+                        <a:lstStyle/>
+                        <a:p>
+                          <a:r>
+                            <a:rPr lang="en-US" sz="1400" i="1" dirty="0"/>
+                            <a:t>F1</a:t>
+                          </a:r>
+                        </a:p>
+                      </a:txBody>
+                      <a:tcPr/>
+                    </a:tc>
+                    <a:tc>
+                      <a:txBody>
+                        <a:bodyPr/>
+                        <a:lstStyle/>
+                        <a:p>
+                          <a:r>
+                            <a:rPr kumimoji="0" lang="en-US" altLang="en-US" sz="1400" b="0" i="0" u="none" strike="noStrike" cap="none" normalizeH="0" baseline="0" dirty="0">
+                              <a:ln>
+                                <a:noFill/>
+                              </a:ln>
+                              <a:effectLst/>
+                              <a:latin typeface="+mn-lt"/>
+                            </a:rPr>
+                            <a:t>FP vs FN trade-off.</a:t>
+                          </a:r>
+                          <a:endParaRPr lang="en-US" sz="1400" dirty="0">
+                            <a:latin typeface="+mn-lt"/>
+                          </a:endParaRPr>
+                        </a:p>
+                      </a:txBody>
+                      <a:tcPr/>
+                    </a:tc>
+                    <a:extLst>
+                      <a:ext uri="{0D108BD9-81ED-4DB2-BD59-A6C34878D82A}">
+                        <a16:rowId xmlns:a16="http://schemas.microsoft.com/office/drawing/2014/main" val="1525592243"/>
+                      </a:ext>
+                    </a:extLst>
+                  </a:tr>
+                  <a:tr h="534099">
+                    <a:tc>
+                      <a:txBody>
+                        <a:bodyPr/>
+                        <a:lstStyle/>
+                        <a:p>
+                          <a:endParaRPr lang="en-US"/>
+                        </a:p>
+                      </a:txBody>
+                      <a:tcPr>
+                        <a:blipFill>
+                          <a:blip r:embed="rId3"/>
+                          <a:stretch>
+                            <a:fillRect l="-185" t="-497727" r="-141328" b="-204545"/>
+                          </a:stretch>
+                        </a:blipFill>
+                      </a:tcPr>
+                    </a:tc>
+                    <a:tc>
+                      <a:txBody>
+                        <a:bodyPr/>
+                        <a:lstStyle/>
+                        <a:p>
+                          <a:endParaRPr lang="en-US"/>
+                        </a:p>
+                      </a:txBody>
+                      <a:tcPr>
+                        <a:blipFill>
+                          <a:blip r:embed="rId3"/>
+                          <a:stretch>
+                            <a:fillRect l="-71260" t="-497727" r="-525" b="-204545"/>
+                          </a:stretch>
+                        </a:blipFill>
+                      </a:tcPr>
+                    </a:tc>
+                    <a:extLst>
+                      <a:ext uri="{0D108BD9-81ED-4DB2-BD59-A6C34878D82A}">
+                        <a16:rowId xmlns:a16="http://schemas.microsoft.com/office/drawing/2014/main" val="2789335868"/>
+                      </a:ext>
+                    </a:extLst>
+                  </a:tr>
+                  <a:tr h="518160">
+                    <a:tc>
+                      <a:txBody>
+                        <a:bodyPr/>
+                        <a:lstStyle/>
+                        <a:p>
+                          <a:pPr rtl="0"/>
+                          <a:r>
+                            <a:rPr lang="en-US" sz="1400" i="1" dirty="0" err="1">
+                              <a:latin typeface="+mn-lt"/>
+                            </a:rPr>
+                            <a:t>Hausdorff</a:t>
+                          </a:r>
+                          <a:r>
+                            <a:rPr lang="en-US" sz="1400" i="1" dirty="0">
+                              <a:latin typeface="+mn-lt"/>
+                            </a:rPr>
+                            <a:t> Distance</a:t>
+                          </a:r>
+                        </a:p>
+                      </a:txBody>
+                      <a:tcPr/>
+                    </a:tc>
+                    <a:tc>
+                      <a:txBody>
+                        <a:bodyPr/>
+                        <a:lstStyle/>
+                        <a:p>
+                          <a:r>
+                            <a:rPr lang="en-US" sz="1400" dirty="0">
+                              <a:latin typeface="+mn-lt"/>
+                            </a:rPr>
+                            <a:t>The maximum surface-to-surface error, captures the worst‐case boundary mismatch.</a:t>
+                          </a:r>
+                        </a:p>
+                      </a:txBody>
+                      <a:tcPr/>
+                    </a:tc>
+                    <a:extLst>
+                      <a:ext uri="{0D108BD9-81ED-4DB2-BD59-A6C34878D82A}">
+                        <a16:rowId xmlns:a16="http://schemas.microsoft.com/office/drawing/2014/main" val="314145622"/>
+                      </a:ext>
+                    </a:extLst>
+                  </a:tr>
+                  <a:tr h="518160">
+                    <a:tc>
+                      <a:txBody>
+                        <a:bodyPr/>
+                        <a:lstStyle/>
+                        <a:p>
+                          <a:pPr rtl="0"/>
+                          <a:r>
+                            <a:rPr lang="en-US" sz="1400" i="1" dirty="0"/>
+                            <a:t>HD95 (95th-Percentile </a:t>
+                          </a:r>
+                          <a:r>
+                            <a:rPr lang="en-US" sz="1400" i="1" dirty="0" err="1"/>
+                            <a:t>Hausdorff</a:t>
+                          </a:r>
+                          <a:r>
+                            <a:rPr lang="en-US" sz="1400" i="1" dirty="0"/>
+                            <a:t>)</a:t>
+                          </a:r>
+                        </a:p>
+                      </a:txBody>
+                      <a:tcPr/>
+                    </a:tc>
+                    <a:tc>
+                      <a:txBody>
+                        <a:bodyPr/>
+                        <a:lstStyle/>
+                        <a:p>
+                          <a:r>
+                            <a:rPr lang="en-US" sz="1400" dirty="0"/>
+                            <a:t>95th percentile of all point‐to‐surface distances instead of the maximum, reduces sensitivity to outliers.</a:t>
+                          </a:r>
+                        </a:p>
+                      </a:txBody>
+                      <a:tcPr/>
+                    </a:tc>
+                    <a:extLst>
+                      <a:ext uri="{0D108BD9-81ED-4DB2-BD59-A6C34878D82A}">
+                        <a16:rowId xmlns:a16="http://schemas.microsoft.com/office/drawing/2014/main" val="2171425090"/>
+                      </a:ext>
+                    </a:extLst>
+                  </a:tr>
+                </a:tbl>
+              </a:graphicData>
+            </a:graphic>
+          </p:graphicFrame>
+        </mc:Fallback>
+      </mc:AlternateContent>
+    </p:spTree>
+    <p:extLst>
+      <p:ext uri="{BB962C8B-B14F-4D97-AF65-F5344CB8AC3E}">
+        <p14:creationId xmlns:p14="http://schemas.microsoft.com/office/powerpoint/2010/main" val="3949391263"/>
+      </p:ext>
+    </p:extLst>
+  </p:cSld>
+  <p:clrMapOvr>
+    <a:masterClrMapping/>
+  </p:clrMapOvr>
+</p:sld>
+</file>
+
+<file path=ppt/slides/slide17.xml><?xml version="1.0" encoding="utf-8"?>
+<p:sld xmlns:a="http://schemas.openxmlformats.org/drawingml/2006/main" xmlns:r="http://schemas.openxmlformats.org/officeDocument/2006/relationships" xmlns:p="http://schemas.openxmlformats.org/presentationml/2006/main">
+  <p:cSld>
+    <p:spTree>
+      <p:nvGrpSpPr>
+        <p:cNvPr id="1" name="">
+          <a:extLst>
+            <a:ext uri="{FF2B5EF4-FFF2-40B4-BE49-F238E27FC236}">
+              <a16:creationId xmlns:a16="http://schemas.microsoft.com/office/drawing/2014/main" id="{750F4E31-712F-1E99-6116-07869F9C7878}"/>
+            </a:ext>
+          </a:extLst>
+        </p:cNvPr>
+        <p:cNvGrpSpPr/>
+        <p:nvPr/>
+      </p:nvGrpSpPr>
+      <p:grpSpPr>
+        <a:xfrm>
+          <a:off x="0" y="0"/>
+          <a:ext cx="0" cy="0"/>
+          <a:chOff x="0" y="0"/>
+          <a:chExt cx="0" cy="0"/>
+        </a:xfrm>
+      </p:grpSpPr>
+      <p:sp>
+        <p:nvSpPr>
+          <p:cNvPr id="4" name="Title 3">
+            <a:extLst>
+              <a:ext uri="{FF2B5EF4-FFF2-40B4-BE49-F238E27FC236}">
+                <a16:creationId xmlns:a16="http://schemas.microsoft.com/office/drawing/2014/main" id="{8C9B85C4-875E-1C25-D236-0B714C998E43}"/>
+              </a:ext>
+            </a:extLst>
+          </p:cNvPr>
+          <p:cNvSpPr>
+            <a:spLocks noGrp="1"/>
+          </p:cNvSpPr>
+          <p:nvPr>
+            <p:ph type="title"/>
+          </p:nvPr>
+        </p:nvSpPr>
+        <p:spPr>
+          <a:xfrm>
+            <a:off x="2739540" y="433880"/>
+            <a:ext cx="6158929" cy="734703"/>
+          </a:xfrm>
+          <a:noFill/>
+        </p:spPr>
+        <p:txBody>
+          <a:bodyPr>
+            <a:normAutofit fontScale="90000"/>
+          </a:bodyPr>
+          <a:lstStyle/>
+          <a:p>
+            <a:pPr algn="l"/>
+            <a:r>
+              <a:rPr lang="en-US" dirty="0"/>
+              <a:t>3D UNET GBM Auto Segmentation</a:t>
+            </a:r>
+            <a:endParaRPr lang="en-US" dirty="0">
+              <a:solidFill>
+                <a:schemeClr val="accent1">
+                  <a:lumMod val="20000"/>
+                  <a:lumOff val="80000"/>
+                </a:schemeClr>
+              </a:solidFill>
+            </a:endParaRPr>
+          </a:p>
+        </p:txBody>
+      </p:sp>
+      <p:sp>
+        <p:nvSpPr>
+          <p:cNvPr id="3" name="Content Placeholder 2">
+            <a:extLst>
+              <a:ext uri="{FF2B5EF4-FFF2-40B4-BE49-F238E27FC236}">
+                <a16:creationId xmlns:a16="http://schemas.microsoft.com/office/drawing/2014/main" id="{AF5615EF-6047-DBC0-E272-1000D7611646}"/>
+              </a:ext>
+            </a:extLst>
+          </p:cNvPr>
+          <p:cNvSpPr>
+            <a:spLocks noGrp="1" noChangeArrowheads="1"/>
+          </p:cNvSpPr>
+          <p:nvPr>
+            <p:ph sz="half" idx="2"/>
+          </p:nvPr>
+        </p:nvSpPr>
+        <p:spPr bwMode="auto">
+          <a:xfrm>
+            <a:off x="202875" y="1562005"/>
+            <a:ext cx="8892495" cy="1785104"/>
+          </a:xfrm>
+          <a:prstGeom prst="rect">
+            <a:avLst/>
+          </a:prstGeom>
+          <a:noFill/>
+          <a:ln>
+            <a:noFill/>
+          </a:ln>
+          <a:effectLst/>
+        </p:spPr>
+        <p:txBody>
+          <a:bodyPr vert="horz" wrap="square" lIns="91440" tIns="45720" rIns="91440" bIns="45720" numCol="1" anchor="ctr" anchorCtr="0" compatLnSpc="1">
+            <a:prstTxWarp prst="textNoShape">
+              <a:avLst/>
+            </a:prstTxWarp>
+            <a:spAutoFit/>
+          </a:bodyPr>
+          <a:lstStyle/>
+          <a:p>
+            <a:pPr marL="0" lvl="0" indent="0" algn="l" eaLnBrk="0" fontAlgn="base" hangingPunct="0">
+              <a:spcBef>
+                <a:spcPct val="0"/>
+              </a:spcBef>
+              <a:spcAft>
+                <a:spcPct val="0"/>
+              </a:spcAft>
+              <a:buNone/>
+            </a:pPr>
+            <a:r>
+              <a:rPr kumimoji="0" lang="en-US" altLang="en-US" sz="2000" u="none" strike="noStrike" cap="none" normalizeH="0" baseline="0" dirty="0">
+                <a:ln>
+                  <a:noFill/>
+                </a:ln>
+                <a:effectLst/>
+              </a:rPr>
+              <a:t>Next steps:</a:t>
+            </a:r>
+          </a:p>
+          <a:p>
+            <a:pPr marL="400050" lvl="1" indent="0" algn="l" eaLnBrk="0" fontAlgn="base" hangingPunct="0">
+              <a:spcBef>
+                <a:spcPct val="0"/>
+              </a:spcBef>
+              <a:spcAft>
+                <a:spcPct val="0"/>
+              </a:spcAft>
+              <a:buFontTx/>
+              <a:buChar char="•"/>
+            </a:pPr>
+            <a:r>
+              <a:rPr lang="en-US" altLang="en-US" sz="1600" dirty="0"/>
+              <a:t> Continue investigation on unsupervised strategies &amp; models.</a:t>
+            </a:r>
+          </a:p>
+          <a:p>
+            <a:pPr marL="400050" lvl="1" indent="0" algn="l" eaLnBrk="0" fontAlgn="base" hangingPunct="0">
+              <a:spcBef>
+                <a:spcPct val="0"/>
+              </a:spcBef>
+              <a:spcAft>
+                <a:spcPct val="0"/>
+              </a:spcAft>
+              <a:buFontTx/>
+              <a:buChar char="•"/>
+            </a:pPr>
+            <a:endParaRPr kumimoji="0" lang="en-US" altLang="en-US" sz="1600" u="none" strike="noStrike" cap="none" normalizeH="0" baseline="0" dirty="0">
+              <a:ln>
+                <a:noFill/>
+              </a:ln>
+              <a:effectLst/>
+            </a:endParaRPr>
+          </a:p>
+          <a:p>
+            <a:pPr marL="400050" lvl="1" indent="0" algn="l" eaLnBrk="0" fontAlgn="base" hangingPunct="0">
+              <a:spcBef>
+                <a:spcPct val="0"/>
+              </a:spcBef>
+              <a:spcAft>
+                <a:spcPct val="0"/>
+              </a:spcAft>
+              <a:buFontTx/>
+              <a:buChar char="•"/>
+            </a:pPr>
+            <a:r>
+              <a:rPr lang="en-US" altLang="en-US" sz="1600" dirty="0"/>
+              <a:t> Continue development &amp; productization with 3D UNET automatic segmentation.</a:t>
+            </a:r>
+          </a:p>
+          <a:p>
+            <a:pPr marL="400050" lvl="1" indent="0" algn="l" eaLnBrk="0" fontAlgn="base" hangingPunct="0">
+              <a:spcBef>
+                <a:spcPct val="0"/>
+              </a:spcBef>
+              <a:spcAft>
+                <a:spcPct val="0"/>
+              </a:spcAft>
+              <a:buFontTx/>
+              <a:buChar char="•"/>
+            </a:pPr>
+            <a:endParaRPr kumimoji="0" lang="en-US" altLang="en-US" sz="1600" u="none" strike="noStrike" cap="none" normalizeH="0" baseline="0" dirty="0">
+              <a:ln>
+                <a:noFill/>
+              </a:ln>
+              <a:effectLst/>
+            </a:endParaRPr>
+          </a:p>
+          <a:p>
+            <a:pPr marL="400050" lvl="1" indent="0" algn="l" eaLnBrk="0" fontAlgn="base" hangingPunct="0">
+              <a:spcBef>
+                <a:spcPct val="0"/>
+              </a:spcBef>
+              <a:spcAft>
+                <a:spcPct val="0"/>
+              </a:spcAft>
+              <a:buFontTx/>
+              <a:buChar char="•"/>
+            </a:pPr>
+            <a:r>
+              <a:rPr kumimoji="0" lang="en-US" altLang="en-US" sz="1600" u="none" strike="noStrike" cap="none" normalizeH="0" baseline="0" dirty="0">
+                <a:ln>
+                  <a:noFill/>
+                </a:ln>
+                <a:effectLst/>
+              </a:rPr>
+              <a:t> This is just </a:t>
+            </a:r>
+            <a:r>
+              <a:rPr kumimoji="0" lang="en-US" altLang="en-US" sz="1600" u="none" strike="noStrike" cap="none" normalizeH="0" baseline="0">
+                <a:ln>
+                  <a:noFill/>
+                </a:ln>
+                <a:effectLst/>
+              </a:rPr>
+              <a:t>the beginning…</a:t>
+            </a:r>
+            <a:endParaRPr kumimoji="0" lang="en-US" altLang="en-US" sz="1600" u="none" strike="noStrike" cap="none" normalizeH="0" baseline="0" dirty="0">
+              <a:ln>
+                <a:noFill/>
+              </a:ln>
+              <a:effectLst/>
+            </a:endParaRPr>
+          </a:p>
+          <a:p>
+            <a:pPr marL="400050" lvl="1" indent="0" algn="l" eaLnBrk="0" fontAlgn="base" hangingPunct="0">
+              <a:spcBef>
+                <a:spcPct val="0"/>
+              </a:spcBef>
+              <a:spcAft>
+                <a:spcPct val="0"/>
+              </a:spcAft>
+              <a:buFontTx/>
+              <a:buChar char="•"/>
+            </a:pPr>
+            <a:endParaRPr kumimoji="0" lang="en-US" altLang="en-US" sz="1000" u="none" strike="noStrike" cap="none" normalizeH="0" baseline="0" dirty="0">
+              <a:ln>
+                <a:noFill/>
+              </a:ln>
+              <a:effectLst/>
+            </a:endParaRPr>
+          </a:p>
+        </p:txBody>
+      </p:sp>
+    </p:spTree>
+    <p:extLst>
+      <p:ext uri="{BB962C8B-B14F-4D97-AF65-F5344CB8AC3E}">
+        <p14:creationId xmlns:p14="http://schemas.microsoft.com/office/powerpoint/2010/main" val="579667773"/>
+      </p:ext>
+    </p:extLst>
+  </p:cSld>
+  <p:clrMapOvr>
+    <a:masterClrMapping/>
+  </p:clrMapOvr>
+</p:sld>
+</file>
+
+<file path=ppt/slides/slide18.xml><?xml version="1.0" encoding="utf-8"?>
 <p:sld xmlns:a="http://schemas.openxmlformats.org/drawingml/2006/main" xmlns:r="http://schemas.openxmlformats.org/officeDocument/2006/relationships" xmlns:p="http://schemas.openxmlformats.org/presentationml/2006/main">
   <p:cSld>
     <p:spTree>
@@ -4344,6 +8725,45 @@
           <a:chExt cx="0" cy="0"/>
         </a:xfrm>
       </p:grpSpPr>
+      <p:sp>
+        <p:nvSpPr>
+          <p:cNvPr id="2" name="TextBox 1">
+            <a:extLst>
+              <a:ext uri="{FF2B5EF4-FFF2-40B4-BE49-F238E27FC236}">
+                <a16:creationId xmlns:a16="http://schemas.microsoft.com/office/drawing/2014/main" id="{A642A22C-2BAB-1E22-C93D-27B084757B1E}"/>
+              </a:ext>
+            </a:extLst>
+          </p:cNvPr>
+          <p:cNvSpPr txBox="1"/>
+          <p:nvPr/>
+        </p:nvSpPr>
+        <p:spPr>
+          <a:xfrm>
+            <a:off x="3808475" y="2569884"/>
+            <a:ext cx="1228734" cy="369332"/>
+          </a:xfrm>
+          <a:prstGeom prst="rect">
+            <a:avLst/>
+          </a:prstGeom>
+          <a:noFill/>
+        </p:spPr>
+        <p:txBody>
+          <a:bodyPr wrap="none" rtlCol="0">
+            <a:spAutoFit/>
+          </a:bodyPr>
+          <a:lstStyle/>
+          <a:p>
+            <a:r>
+              <a:rPr lang="en-US" dirty="0">
+                <a:solidFill>
+                  <a:schemeClr val="bg1"/>
+                </a:solidFill>
+              </a:rPr>
+              <a:t>Thank you!</a:t>
+            </a:r>
+          </a:p>
+        </p:txBody>
+      </p:sp>
     </p:spTree>
     <p:extLst>
       <p:ext uri="{BB962C8B-B14F-4D97-AF65-F5344CB8AC3E}">
@@ -4357,7 +8777,7 @@
 </p:sld>
 </file>
 
-<file path=ppt/slides/slide13.xml><?xml version="1.0" encoding="utf-8"?>
+<file path=ppt/slides/slide19.xml><?xml version="1.0" encoding="utf-8"?>
 <p:sld xmlns:a="http://schemas.openxmlformats.org/drawingml/2006/main" xmlns:r="http://schemas.openxmlformats.org/officeDocument/2006/relationships" xmlns:p="http://schemas.openxmlformats.org/presentationml/2006/main">
   <p:cSld>
     <p:bg>
@@ -6583,7 +11003,7 @@
         </p:nvSpPr>
         <p:spPr>
           <a:xfrm>
-            <a:off x="8118808" y="281173"/>
+            <a:off x="8084215" y="281173"/>
             <a:ext cx="152705" cy="763525"/>
           </a:xfrm>
           <a:prstGeom prst="rect">
@@ -7294,8 +11714,8 @@
         </p:nvSpPr>
         <p:spPr>
           <a:xfrm>
-            <a:off x="7692251" y="510234"/>
-            <a:ext cx="426557" cy="229056"/>
+            <a:off x="7692252" y="510234"/>
+            <a:ext cx="362762" cy="229056"/>
           </a:xfrm>
           <a:prstGeom prst="rightArrow">
             <a:avLst/>
@@ -8586,8 +13006,8 @@
         </p:nvSpPr>
         <p:spPr>
           <a:xfrm rot="3423528">
-            <a:off x="-49484" y="2614313"/>
-            <a:ext cx="1247440" cy="355932"/>
+            <a:off x="-57499" y="2629056"/>
+            <a:ext cx="1282575" cy="355932"/>
           </a:xfrm>
           <a:prstGeom prst="rightArrow">
             <a:avLst/>
@@ -8625,41 +13045,6 @@
       </p:sp>
       <p:sp>
         <p:nvSpPr>
-          <p:cNvPr id="145" name="TextBox 144">
-            <a:extLst>
-              <a:ext uri="{FF2B5EF4-FFF2-40B4-BE49-F238E27FC236}">
-                <a16:creationId xmlns:a16="http://schemas.microsoft.com/office/drawing/2014/main" id="{74884934-A66A-32AE-4346-8163536E0F9D}"/>
-              </a:ext>
-            </a:extLst>
-          </p:cNvPr>
-          <p:cNvSpPr txBox="1"/>
-          <p:nvPr/>
-        </p:nvSpPr>
-        <p:spPr>
-          <a:xfrm>
-            <a:off x="3387850" y="446544"/>
-            <a:ext cx="1036316" cy="246221"/>
-          </a:xfrm>
-          <a:prstGeom prst="rect">
-            <a:avLst/>
-          </a:prstGeom>
-          <a:noFill/>
-        </p:spPr>
-        <p:txBody>
-          <a:bodyPr wrap="square" rtlCol="0">
-            <a:spAutoFit/>
-          </a:bodyPr>
-          <a:lstStyle/>
-          <a:p>
-            <a:r>
-              <a:rPr lang="en-US" sz="1000" dirty="0"/>
-              <a:t>Concatenation</a:t>
-            </a:r>
-          </a:p>
-        </p:txBody>
-      </p:sp>
-      <p:sp>
-        <p:nvSpPr>
           <p:cNvPr id="146" name="Arrow: Right 145">
             <a:extLst>
               <a:ext uri="{FF2B5EF4-FFF2-40B4-BE49-F238E27FC236}">
@@ -8886,9 +13271,9 @@
           <p:nvPr/>
         </p:nvSpPr>
         <p:spPr>
-          <a:xfrm>
-            <a:off x="-1330" y="3196015"/>
-            <a:ext cx="905160" cy="400110"/>
+          <a:xfrm rot="3370819">
+            <a:off x="-16741" y="2692214"/>
+            <a:ext cx="1246946" cy="246221"/>
           </a:xfrm>
           <a:prstGeom prst="rect">
             <a:avLst/>
@@ -8903,7 +13288,7 @@
           <a:p>
             <a:r>
               <a:rPr lang="en-US" sz="1000" dirty="0"/>
-              <a:t>Compaction path</a:t>
+              <a:t>Contracting path</a:t>
             </a:r>
           </a:p>
         </p:txBody>
@@ -8921,9 +13306,9 @@
           <p:nvPr/>
         </p:nvSpPr>
         <p:spPr>
-          <a:xfrm>
-            <a:off x="7715105" y="2681494"/>
-            <a:ext cx="905160" cy="400110"/>
+          <a:xfrm rot="18167788">
+            <a:off x="7027651" y="2560765"/>
+            <a:ext cx="1281310" cy="246221"/>
           </a:xfrm>
           <a:prstGeom prst="rect">
             <a:avLst/>
@@ -8937,12 +13322,8 @@
           <a:lstStyle/>
           <a:p>
             <a:r>
-              <a:rPr lang="en-US" sz="1000" dirty="0" err="1"/>
-              <a:t>Upsample</a:t>
-            </a:r>
-            <a:r>
               <a:rPr lang="en-US" sz="1000" dirty="0"/>
-              <a:t> path</a:t>
+              <a:t>Expansive path</a:t>
             </a:r>
           </a:p>
         </p:txBody>
@@ -9002,7 +13383,7 @@
         </p:nvSpPr>
         <p:spPr>
           <a:xfrm>
-            <a:off x="8215242" y="339909"/>
+            <a:off x="8213410" y="870631"/>
             <a:ext cx="1243318" cy="400110"/>
           </a:xfrm>
           <a:prstGeom prst="rect">
@@ -9043,8 +13424,8 @@
         </p:nvSpPr>
         <p:spPr>
           <a:xfrm>
-            <a:off x="4304611" y="2896043"/>
-            <a:ext cx="1036316" cy="400110"/>
+            <a:off x="4332741" y="2763466"/>
+            <a:ext cx="1036316" cy="553998"/>
           </a:xfrm>
           <a:prstGeom prst="rect">
             <a:avLst/>
@@ -9056,6 +13437,12 @@
             <a:spAutoFit/>
           </a:bodyPr>
           <a:lstStyle/>
+          <a:p>
+            <a:r>
+              <a:rPr lang="en-US" sz="1000" dirty="0"/>
+              <a:t>Concatenate </a:t>
+            </a:r>
+          </a:p>
           <a:p>
             <a:r>
               <a:rPr lang="en-US" sz="1000" dirty="0"/>
@@ -9084,8 +13471,8 @@
         </p:nvSpPr>
         <p:spPr>
           <a:xfrm>
-            <a:off x="4958366" y="1934383"/>
-            <a:ext cx="1036316" cy="400110"/>
+            <a:off x="3830813" y="4845324"/>
+            <a:ext cx="1036316" cy="246221"/>
           </a:xfrm>
           <a:prstGeom prst="rect">
             <a:avLst/>
@@ -9100,13 +13487,7 @@
           <a:p>
             <a:r>
               <a:rPr lang="en-US" sz="1000" dirty="0"/>
-              <a:t>U7=U7+C3 </a:t>
-            </a:r>
-          </a:p>
-          <a:p>
-            <a:r>
-              <a:rPr lang="en-US" sz="1000" dirty="0"/>
-              <a:t>32x32x32x128</a:t>
+              <a:t>Bottleneck </a:t>
             </a:r>
           </a:p>
         </p:txBody>
@@ -9125,8 +13506,8 @@
         </p:nvSpPr>
         <p:spPr>
           <a:xfrm>
-            <a:off x="5595429" y="914059"/>
-            <a:ext cx="993206" cy="400110"/>
+            <a:off x="5609378" y="770499"/>
+            <a:ext cx="993206" cy="553998"/>
           </a:xfrm>
           <a:prstGeom prst="rect">
             <a:avLst/>
@@ -9138,6 +13519,12 @@
             <a:spAutoFit/>
           </a:bodyPr>
           <a:lstStyle/>
+          <a:p>
+            <a:r>
+              <a:rPr lang="en-US" sz="1000" dirty="0"/>
+              <a:t>Concatenate </a:t>
+            </a:r>
+          </a:p>
           <a:p>
             <a:r>
               <a:rPr lang="en-US" sz="1000" dirty="0"/>
@@ -9167,7 +13554,7 @@
         <p:spPr>
           <a:xfrm>
             <a:off x="5673161" y="29205"/>
-            <a:ext cx="1151267" cy="400110"/>
+            <a:ext cx="1151267" cy="553998"/>
           </a:xfrm>
           <a:prstGeom prst="rect">
             <a:avLst/>
@@ -9179,6 +13566,12 @@
             <a:spAutoFit/>
           </a:bodyPr>
           <a:lstStyle/>
+          <a:p>
+            <a:r>
+              <a:rPr lang="en-US" sz="1000" dirty="0"/>
+              <a:t>Concatenate </a:t>
+            </a:r>
+          </a:p>
           <a:p>
             <a:r>
               <a:rPr lang="en-US" sz="1000" dirty="0"/>
@@ -9439,6 +13832,101 @@
           </a:p>
         </p:txBody>
       </p:sp>
+      <p:sp>
+        <p:nvSpPr>
+          <p:cNvPr id="168" name="TextBox 167">
+            <a:extLst>
+              <a:ext uri="{FF2B5EF4-FFF2-40B4-BE49-F238E27FC236}">
+                <a16:creationId xmlns:a16="http://schemas.microsoft.com/office/drawing/2014/main" id="{E0318AF1-B5E6-12AD-29C6-DFA6F6111E05}"/>
+              </a:ext>
+            </a:extLst>
+          </p:cNvPr>
+          <p:cNvSpPr txBox="1"/>
+          <p:nvPr/>
+        </p:nvSpPr>
+        <p:spPr>
+          <a:xfrm>
+            <a:off x="3450677" y="1147630"/>
+            <a:ext cx="1137491" cy="246221"/>
+          </a:xfrm>
+          <a:prstGeom prst="rect">
+            <a:avLst/>
+          </a:prstGeom>
+          <a:noFill/>
+        </p:spPr>
+        <p:txBody>
+          <a:bodyPr wrap="square" rtlCol="0">
+            <a:spAutoFit/>
+          </a:bodyPr>
+          <a:lstStyle/>
+          <a:p>
+            <a:r>
+              <a:rPr lang="en-US" sz="1000" dirty="0"/>
+              <a:t>Skip Connections</a:t>
+            </a:r>
+          </a:p>
+        </p:txBody>
+      </p:sp>
+      <p:pic>
+        <p:nvPicPr>
+          <p:cNvPr id="172" name="Picture 171">
+            <a:extLst>
+              <a:ext uri="{FF2B5EF4-FFF2-40B4-BE49-F238E27FC236}">
+                <a16:creationId xmlns:a16="http://schemas.microsoft.com/office/drawing/2014/main" id="{9B61DD62-A586-034D-2D6C-7029F88E0AB7}"/>
+              </a:ext>
+            </a:extLst>
+          </p:cNvPr>
+          <p:cNvPicPr>
+            <a:picLocks noChangeAspect="1"/>
+          </p:cNvPicPr>
+          <p:nvPr/>
+        </p:nvPicPr>
+        <p:blipFill>
+          <a:blip r:embed="rId2"/>
+          <a:stretch>
+            <a:fillRect/>
+          </a:stretch>
+        </p:blipFill>
+        <p:spPr>
+          <a:xfrm>
+            <a:off x="39692" y="190656"/>
+            <a:ext cx="481555" cy="594545"/>
+          </a:xfrm>
+          <a:prstGeom prst="rect">
+            <a:avLst/>
+          </a:prstGeom>
+        </p:spPr>
+      </p:pic>
+      <p:pic>
+        <p:nvPicPr>
+          <p:cNvPr id="174" name="Picture 173">
+            <a:extLst>
+              <a:ext uri="{FF2B5EF4-FFF2-40B4-BE49-F238E27FC236}">
+                <a16:creationId xmlns:a16="http://schemas.microsoft.com/office/drawing/2014/main" id="{BF4187ED-1981-05B6-A738-0872D4E92B17}"/>
+              </a:ext>
+            </a:extLst>
+          </p:cNvPr>
+          <p:cNvPicPr>
+            <a:picLocks noChangeAspect="1"/>
+          </p:cNvPicPr>
+          <p:nvPr/>
+        </p:nvPicPr>
+        <p:blipFill>
+          <a:blip r:embed="rId3"/>
+          <a:stretch>
+            <a:fillRect/>
+          </a:stretch>
+        </p:blipFill>
+        <p:spPr>
+          <a:xfrm>
+            <a:off x="8362760" y="280272"/>
+            <a:ext cx="503383" cy="595897"/>
+          </a:xfrm>
+          <a:prstGeom prst="rect">
+            <a:avLst/>
+          </a:prstGeom>
+        </p:spPr>
+      </p:pic>
     </p:spTree>
     <p:extLst>
       <p:ext uri="{BB962C8B-B14F-4D97-AF65-F5344CB8AC3E}">
@@ -9505,7 +13993,7 @@
         </p:nvSpPr>
         <p:spPr>
           <a:xfrm>
-            <a:off x="457200" y="1502814"/>
+            <a:off x="457200" y="1598733"/>
             <a:ext cx="8229600" cy="3110887"/>
           </a:xfrm>
         </p:spPr>
@@ -9516,43 +14004,43 @@
           <a:lstStyle/>
           <a:p>
             <a:r>
-              <a:rPr lang="en-US" dirty="0"/>
+              <a:rPr lang="en-US" sz="2900" dirty="0"/>
               <a:t>Automatic glioblastoma multiforme (GBM) segmentation refers to the use of computer algorithms—most often deep-learning models—to identify and delineate tumor regions in magnetic resonance imaging (MRI) scans without manual intervention. </a:t>
             </a:r>
           </a:p>
           <a:p>
-            <a:endParaRPr lang="en-US" dirty="0"/>
-          </a:p>
-          <a:p>
-            <a:r>
-              <a:rPr lang="en-US" dirty="0"/>
+            <a:endParaRPr lang="en-US" sz="2900" dirty="0"/>
+          </a:p>
+          <a:p>
+            <a:r>
+              <a:rPr lang="en-US" sz="2900" dirty="0"/>
               <a:t>Precision in Treatment Planning: Automatic GBM segmentation provides consistent, voxel-level delineation of tumor subregions (enhancing tumor, edema, necrosis. </a:t>
             </a:r>
           </a:p>
           <a:p>
-            <a:endParaRPr lang="en-US" dirty="0"/>
-          </a:p>
-          <a:p>
-            <a:r>
-              <a:rPr lang="en-US" dirty="0"/>
+            <a:endParaRPr lang="en-US" sz="2900" dirty="0"/>
+          </a:p>
+          <a:p>
+            <a:r>
+              <a:rPr lang="en-US" sz="2900" dirty="0"/>
               <a:t>Efficiency &amp; Scalability: Automated methods drastically reduce the time and labor of manual contouring.</a:t>
             </a:r>
           </a:p>
           <a:p>
-            <a:endParaRPr lang="en-US" dirty="0"/>
-          </a:p>
-          <a:p>
-            <a:r>
-              <a:rPr lang="en-US" dirty="0"/>
+            <a:endParaRPr lang="en-US" sz="2900" dirty="0"/>
+          </a:p>
+          <a:p>
+            <a:r>
+              <a:rPr lang="en-US" sz="2900" dirty="0"/>
               <a:t>Reproducibility &amp; Objectivity: By minimizing inter- and intra-observer variability inherent to manual annotation.</a:t>
             </a:r>
           </a:p>
           <a:p>
-            <a:endParaRPr lang="en-US" dirty="0"/>
-          </a:p>
-          <a:p>
-            <a:r>
-              <a:rPr lang="en-US" dirty="0"/>
+            <a:endParaRPr lang="en-US" sz="2900" dirty="0"/>
+          </a:p>
+          <a:p>
+            <a:r>
+              <a:rPr lang="en-US" sz="2900" dirty="0"/>
               <a:t>Quantitative Monitoring: Enables robust quantification of tumor volume changes over time, supporting early assessment of treatment response and facilitating adaptive therapy strategies.</a:t>
             </a:r>
           </a:p>
@@ -9622,7 +14110,7 @@
           <a:p>
             <a:r>
               <a:rPr lang="en-US" dirty="0"/>
-              <a:t>Datasets</a:t>
+              <a:t>Datasets &amp; repositories</a:t>
             </a:r>
           </a:p>
         </p:txBody>
@@ -9651,44 +14139,98 @@
         </p:spPr>
         <p:txBody>
           <a:bodyPr>
-            <a:normAutofit lnSpcReduction="10000"/>
+            <a:normAutofit/>
           </a:bodyPr>
           <a:lstStyle/>
           <a:p>
             <a:r>
-              <a:rPr lang="en-US" dirty="0"/>
+              <a:rPr lang="en-US" sz="1800" dirty="0"/>
               <a:t>Healthy Brain full scans in nifty format.</a:t>
             </a:r>
           </a:p>
           <a:p>
             <a:pPr lvl="1"/>
             <a:r>
-              <a:rPr lang="en-US" dirty="0"/>
+              <a:rPr lang="en-US" sz="1800" dirty="0"/>
               <a:t>IXI dataset  </a:t>
             </a:r>
             <a:r>
-              <a:rPr lang="en-US" u="sng" dirty="0">
+              <a:rPr lang="en-US" sz="1800" u="sng" dirty="0">
                 <a:hlinkClick r:id="rId2"/>
               </a:rPr>
               <a:t>https://brain-development.org/ixi-dataset/</a:t>
             </a:r>
-            <a:endParaRPr lang="en-US" u="sng" dirty="0"/>
-          </a:p>
-          <a:p>
-            <a:r>
-              <a:rPr lang="en-US" dirty="0"/>
-              <a:t>Brain full scans with GBM + labels (segmentation) nifty</a:t>
+            <a:endParaRPr lang="en-US" sz="1800" u="sng" dirty="0"/>
+          </a:p>
+          <a:p>
+            <a:r>
+              <a:rPr lang="en-US" sz="1800" dirty="0"/>
+              <a:t>Brain full scans with GBM + labels (segmentation) nifty format.</a:t>
             </a:r>
           </a:p>
           <a:p>
             <a:pPr lvl="1"/>
             <a:r>
-              <a:rPr lang="en-US" u="sng" dirty="0">
+              <a:rPr lang="en-US" sz="1800" dirty="0"/>
+              <a:t>BRATS dataset </a:t>
+            </a:r>
+            <a:r>
+              <a:rPr lang="en-US" sz="1800" dirty="0">
                 <a:hlinkClick r:id="rId3"/>
               </a:rPr>
               <a:t>https://www.cancerimagingarchive.net/collection/ucsd-ptgbm/</a:t>
             </a:r>
-            <a:endParaRPr lang="en-US" dirty="0"/>
+            <a:endParaRPr lang="en-US" sz="1800" u="sng" dirty="0"/>
+          </a:p>
+          <a:p>
+            <a:endParaRPr lang="en-US" sz="1800" u="sng" dirty="0"/>
+          </a:p>
+          <a:p>
+            <a:r>
+              <a:rPr lang="en-US" sz="1800" dirty="0" err="1"/>
+              <a:t>Github</a:t>
+            </a:r>
+            <a:r>
+              <a:rPr lang="en-US" sz="1800" dirty="0"/>
+              <a:t> repo</a:t>
+            </a:r>
+          </a:p>
+          <a:p>
+            <a:pPr lvl="1"/>
+            <a:r>
+              <a:rPr lang="en-US" sz="1800" u="sng" dirty="0">
+                <a:hlinkClick r:id="rId4"/>
+              </a:rPr>
+              <a:t>https://github.com/daniel-chervin/DS18_FinalProject/tree/main</a:t>
+            </a:r>
+            <a:endParaRPr lang="en-US" sz="1800" u="sng" dirty="0"/>
+          </a:p>
+          <a:p>
+            <a:r>
+              <a:rPr lang="en-US" sz="1800" dirty="0" err="1"/>
+              <a:t>Streamlit</a:t>
+            </a:r>
+            <a:r>
+              <a:rPr lang="en-US" sz="1800" dirty="0"/>
+              <a:t> app</a:t>
+            </a:r>
+          </a:p>
+          <a:p>
+            <a:pPr lvl="1"/>
+            <a:r>
+              <a:rPr lang="en-US" sz="1800" u="sng" dirty="0">
+                <a:hlinkClick r:id="rId5"/>
+              </a:rPr>
+              <a:t>https://ds18finalproject-danielc.streamlit.app/</a:t>
+            </a:r>
+            <a:r>
+              <a:rPr lang="en-US" sz="1800" u="sng" dirty="0"/>
+              <a:t> </a:t>
+            </a:r>
+          </a:p>
+          <a:p>
+            <a:pPr lvl="1"/>
+            <a:endParaRPr lang="en-US" sz="1800" dirty="0"/>
           </a:p>
         </p:txBody>
       </p:sp>
@@ -10958,7 +15500,7 @@
         <p:cNvPr id="1" name="">
           <a:extLst>
             <a:ext uri="{FF2B5EF4-FFF2-40B4-BE49-F238E27FC236}">
-              <a16:creationId xmlns:a16="http://schemas.microsoft.com/office/drawing/2014/main" id="{7AB8C7C4-54CF-8E9B-694C-007692ED8173}"/>
+              <a16:creationId xmlns:a16="http://schemas.microsoft.com/office/drawing/2014/main" id="{162CB641-BC19-27D6-D76A-F79CDD3AE0E8}"/>
             </a:ext>
           </a:extLst>
         </p:cNvPr>
@@ -10978,7 +15520,7 @@
           <p:cNvPr id="4" name="Title 3">
             <a:extLst>
               <a:ext uri="{FF2B5EF4-FFF2-40B4-BE49-F238E27FC236}">
-                <a16:creationId xmlns:a16="http://schemas.microsoft.com/office/drawing/2014/main" id="{7E658B1E-112C-252B-A435-16CB0A4B7CCE}"/>
+                <a16:creationId xmlns:a16="http://schemas.microsoft.com/office/drawing/2014/main" id="{93961488-2CF8-9E24-43CA-6521FF04678A}"/>
               </a:ext>
             </a:extLst>
           </p:cNvPr>
@@ -10991,78 +15533,310 @@
         </p:nvSpPr>
         <p:spPr>
           <a:xfrm>
-            <a:off x="2128720" y="128470"/>
-            <a:ext cx="6396095" cy="506666"/>
+            <a:off x="3503065" y="281175"/>
+            <a:ext cx="4951349" cy="734703"/>
           </a:xfrm>
         </p:spPr>
         <p:txBody>
           <a:bodyPr>
-            <a:normAutofit fontScale="90000"/>
+            <a:normAutofit/>
           </a:bodyPr>
           <a:lstStyle/>
           <a:p>
-            <a:r>
-              <a:rPr lang="en-US" dirty="0" err="1"/>
-              <a:t>Supevised</a:t>
-            </a:r>
+            <a:pPr algn="l"/>
             <a:r>
               <a:rPr lang="en-US" dirty="0"/>
-              <a:t> – 3D UNET Architecture</a:t>
-            </a:r>
-          </a:p>
-        </p:txBody>
-      </p:sp>
-      <p:pic>
-        <p:nvPicPr>
-          <p:cNvPr id="3074" name="Picture 2" descr="An illustration of the coarse model based on 3D Unet. Here, we show the case with a single-channel input. In our experiments, the input will be adjusted according to different situations">
+              <a:t>Supervised - 3D UNET </a:t>
+            </a:r>
+          </a:p>
+        </p:txBody>
+      </p:sp>
+      <p:sp>
+        <p:nvSpPr>
+          <p:cNvPr id="3" name="Content Placeholder 2">
             <a:extLst>
               <a:ext uri="{FF2B5EF4-FFF2-40B4-BE49-F238E27FC236}">
-                <a16:creationId xmlns:a16="http://schemas.microsoft.com/office/drawing/2014/main" id="{BADCA6A1-73D4-793C-5DB6-717DB7206692}"/>
+                <a16:creationId xmlns:a16="http://schemas.microsoft.com/office/drawing/2014/main" id="{D15EE3BA-62CF-A303-E48B-11EDACC2CA8B}"/>
               </a:ext>
             </a:extLst>
           </p:cNvPr>
-          <p:cNvPicPr>
-            <a:picLocks noChangeAspect="1" noChangeArrowheads="1"/>
-          </p:cNvPicPr>
-          <p:nvPr/>
-        </p:nvPicPr>
-        <p:blipFill>
-          <a:blip r:embed="rId2">
-            <a:extLst>
-              <a:ext uri="{28A0092B-C50C-407E-A947-70E740481C1C}">
-                <a14:useLocalDpi xmlns:a14="http://schemas.microsoft.com/office/drawing/2010/main" val="0"/>
-              </a:ext>
-            </a:extLst>
-          </a:blip>
-          <a:srcRect/>
-          <a:stretch>
-            <a:fillRect/>
-          </a:stretch>
-        </p:blipFill>
+          <p:cNvSpPr>
+            <a:spLocks noGrp="1" noChangeArrowheads="1"/>
+          </p:cNvSpPr>
+          <p:nvPr>
+            <p:ph sz="half" idx="2"/>
+          </p:nvPr>
+        </p:nvSpPr>
         <p:spPr bwMode="auto">
           <a:xfrm>
-            <a:off x="2276336" y="891995"/>
-            <a:ext cx="5810388" cy="4251504"/>
+            <a:off x="143555" y="910796"/>
+            <a:ext cx="8856890" cy="3970318"/>
           </a:xfrm>
           <a:prstGeom prst="rect">
             <a:avLst/>
           </a:prstGeom>
-          <a:noFill/>
-          <a:extLst>
-            <a:ext uri="{909E8E84-426E-40DD-AFC4-6F175D3DCCD1}">
-              <a14:hiddenFill xmlns:a14="http://schemas.microsoft.com/office/drawing/2010/main">
-                <a:solidFill>
-                  <a:srgbClr val="FFFFFF"/>
-                </a:solidFill>
-              </a14:hiddenFill>
-            </a:ext>
-          </a:extLst>
-        </p:spPr>
-      </p:pic>
+          <a:solidFill>
+            <a:srgbClr val="00142D"/>
+          </a:solidFill>
+          <a:ln>
+            <a:noFill/>
+          </a:ln>
+          <a:effectLst/>
+        </p:spPr>
+        <p:txBody>
+          <a:bodyPr vert="horz" wrap="square" lIns="91440" tIns="45720" rIns="91440" bIns="45720" numCol="1" anchor="ctr" anchorCtr="0" compatLnSpc="1">
+            <a:prstTxWarp prst="textNoShape">
+              <a:avLst/>
+            </a:prstTxWarp>
+            <a:spAutoFit/>
+          </a:bodyPr>
+          <a:lstStyle/>
+          <a:p>
+            <a:pPr marL="0" marR="0" lvl="0" indent="0" algn="l" defTabSz="914400" rtl="0" eaLnBrk="0" fontAlgn="base" latinLnBrk="0" hangingPunct="0">
+              <a:lnSpc>
+                <a:spcPct val="100000"/>
+              </a:lnSpc>
+              <a:spcBef>
+                <a:spcPct val="0"/>
+              </a:spcBef>
+              <a:spcAft>
+                <a:spcPct val="0"/>
+              </a:spcAft>
+              <a:buClrTx/>
+              <a:buSzTx/>
+              <a:buFontTx/>
+              <a:buChar char="•"/>
+              <a:tabLst/>
+            </a:pPr>
+            <a:r>
+              <a:rPr kumimoji="0" lang="en-US" altLang="en-US" sz="1800" b="0" i="0" u="none" strike="noStrike" cap="none" normalizeH="0" baseline="0" dirty="0">
+                <a:ln>
+                  <a:noFill/>
+                </a:ln>
+                <a:effectLst/>
+                <a:latin typeface="Arial" panose="020B0604020202020204" pitchFamily="34" charset="0"/>
+              </a:rPr>
+              <a:t>U-Net is a CNN architecture originally designed for biomedical image segmentation, featuring a symmetric “U-shaped” encoder–decoder.</a:t>
+            </a:r>
+          </a:p>
+          <a:p>
+            <a:pPr marL="0" marR="0" lvl="0" indent="0" algn="l" defTabSz="914400" rtl="0" eaLnBrk="0" fontAlgn="base" latinLnBrk="0" hangingPunct="0">
+              <a:lnSpc>
+                <a:spcPct val="100000"/>
+              </a:lnSpc>
+              <a:spcBef>
+                <a:spcPct val="0"/>
+              </a:spcBef>
+              <a:spcAft>
+                <a:spcPct val="0"/>
+              </a:spcAft>
+              <a:buClrTx/>
+              <a:buSzTx/>
+              <a:buFontTx/>
+              <a:buChar char="•"/>
+              <a:tabLst/>
+            </a:pPr>
+            <a:endParaRPr kumimoji="0" lang="en-US" altLang="en-US" sz="1800" b="0" i="0" u="none" strike="noStrike" cap="none" normalizeH="0" baseline="0" dirty="0">
+              <a:ln>
+                <a:noFill/>
+              </a:ln>
+              <a:effectLst/>
+              <a:latin typeface="Arial" panose="020B0604020202020204" pitchFamily="34" charset="0"/>
+            </a:endParaRPr>
+          </a:p>
+          <a:p>
+            <a:pPr marL="0" marR="0" lvl="0" indent="0" algn="l" defTabSz="914400" rtl="0" eaLnBrk="0" fontAlgn="base" latinLnBrk="0" hangingPunct="0">
+              <a:lnSpc>
+                <a:spcPct val="100000"/>
+              </a:lnSpc>
+              <a:spcBef>
+                <a:spcPct val="0"/>
+              </a:spcBef>
+              <a:spcAft>
+                <a:spcPct val="0"/>
+              </a:spcAft>
+              <a:buClrTx/>
+              <a:buSzTx/>
+              <a:buFontTx/>
+              <a:buChar char="•"/>
+              <a:tabLst/>
+            </a:pPr>
+            <a:r>
+              <a:rPr kumimoji="0" lang="en-US" altLang="en-US" sz="1800" b="0" i="0" u="none" strike="noStrike" cap="none" normalizeH="0" baseline="0" dirty="0">
+                <a:ln>
+                  <a:noFill/>
+                </a:ln>
+                <a:effectLst/>
+                <a:latin typeface="Arial" panose="020B0604020202020204" pitchFamily="34" charset="0"/>
+              </a:rPr>
+              <a:t>The encoder (contracting path) repeatedly applies convolutional blocks and down-sampling to capture context and extract deep features.</a:t>
+            </a:r>
+          </a:p>
+          <a:p>
+            <a:pPr marL="0" marR="0" lvl="0" indent="0" algn="l" defTabSz="914400" rtl="0" eaLnBrk="0" fontAlgn="base" latinLnBrk="0" hangingPunct="0">
+              <a:lnSpc>
+                <a:spcPct val="100000"/>
+              </a:lnSpc>
+              <a:spcBef>
+                <a:spcPct val="0"/>
+              </a:spcBef>
+              <a:spcAft>
+                <a:spcPct val="0"/>
+              </a:spcAft>
+              <a:buClrTx/>
+              <a:buSzTx/>
+              <a:buFontTx/>
+              <a:buChar char="•"/>
+              <a:tabLst/>
+            </a:pPr>
+            <a:endParaRPr kumimoji="0" lang="en-US" altLang="en-US" sz="1800" b="0" i="0" u="none" strike="noStrike" cap="none" normalizeH="0" baseline="0" dirty="0">
+              <a:ln>
+                <a:noFill/>
+              </a:ln>
+              <a:effectLst/>
+              <a:latin typeface="Arial" panose="020B0604020202020204" pitchFamily="34" charset="0"/>
+            </a:endParaRPr>
+          </a:p>
+          <a:p>
+            <a:pPr marL="0" marR="0" lvl="0" indent="0" algn="l" defTabSz="914400" rtl="0" eaLnBrk="0" fontAlgn="base" latinLnBrk="0" hangingPunct="0">
+              <a:lnSpc>
+                <a:spcPct val="100000"/>
+              </a:lnSpc>
+              <a:spcBef>
+                <a:spcPct val="0"/>
+              </a:spcBef>
+              <a:spcAft>
+                <a:spcPct val="0"/>
+              </a:spcAft>
+              <a:buClrTx/>
+              <a:buSzTx/>
+              <a:buFontTx/>
+              <a:buChar char="•"/>
+              <a:tabLst/>
+            </a:pPr>
+            <a:r>
+              <a:rPr kumimoji="0" lang="en-US" altLang="en-US" sz="1800" b="0" i="0" u="none" strike="noStrike" cap="none" normalizeH="0" baseline="0" dirty="0">
+                <a:ln>
+                  <a:noFill/>
+                </a:ln>
+                <a:effectLst/>
+                <a:latin typeface="Arial" panose="020B0604020202020204" pitchFamily="34" charset="0"/>
+              </a:rPr>
+              <a:t>The decoder (expansive path) uses transposed convolutions to up-sample feature maps and gradually recover spatial resolution.</a:t>
+            </a:r>
+          </a:p>
+          <a:p>
+            <a:pPr marL="0" marR="0" lvl="0" indent="0" algn="l" defTabSz="914400" rtl="0" eaLnBrk="0" fontAlgn="base" latinLnBrk="0" hangingPunct="0">
+              <a:lnSpc>
+                <a:spcPct val="100000"/>
+              </a:lnSpc>
+              <a:spcBef>
+                <a:spcPct val="0"/>
+              </a:spcBef>
+              <a:spcAft>
+                <a:spcPct val="0"/>
+              </a:spcAft>
+              <a:buClrTx/>
+              <a:buSzTx/>
+              <a:buFontTx/>
+              <a:buChar char="•"/>
+              <a:tabLst/>
+            </a:pPr>
+            <a:endParaRPr kumimoji="0" lang="en-US" altLang="en-US" sz="1800" b="0" i="0" u="none" strike="noStrike" cap="none" normalizeH="0" baseline="0" dirty="0">
+              <a:ln>
+                <a:noFill/>
+              </a:ln>
+              <a:effectLst/>
+              <a:latin typeface="Arial" panose="020B0604020202020204" pitchFamily="34" charset="0"/>
+            </a:endParaRPr>
+          </a:p>
+          <a:p>
+            <a:pPr marL="0" marR="0" lvl="0" indent="0" algn="l" defTabSz="914400" rtl="0" eaLnBrk="0" fontAlgn="base" latinLnBrk="0" hangingPunct="0">
+              <a:lnSpc>
+                <a:spcPct val="100000"/>
+              </a:lnSpc>
+              <a:spcBef>
+                <a:spcPct val="0"/>
+              </a:spcBef>
+              <a:spcAft>
+                <a:spcPct val="0"/>
+              </a:spcAft>
+              <a:buClrTx/>
+              <a:buSzTx/>
+              <a:buFontTx/>
+              <a:buChar char="•"/>
+              <a:tabLst/>
+            </a:pPr>
+            <a:r>
+              <a:rPr kumimoji="0" lang="en-US" altLang="en-US" sz="1800" b="0" i="0" u="none" strike="noStrike" cap="none" normalizeH="0" baseline="0" dirty="0">
+                <a:ln>
+                  <a:noFill/>
+                </a:ln>
+                <a:effectLst/>
+                <a:latin typeface="Arial" panose="020B0604020202020204" pitchFamily="34" charset="0"/>
+              </a:rPr>
+              <a:t>Skip connections link each encoder layer to its corresponding decoder layer, concatenating feature maps to preserve fine-grained localization.</a:t>
+            </a:r>
+          </a:p>
+          <a:p>
+            <a:pPr marL="0" marR="0" lvl="0" indent="0" algn="l" defTabSz="914400" rtl="0" eaLnBrk="0" fontAlgn="base" latinLnBrk="0" hangingPunct="0">
+              <a:lnSpc>
+                <a:spcPct val="100000"/>
+              </a:lnSpc>
+              <a:spcBef>
+                <a:spcPct val="0"/>
+              </a:spcBef>
+              <a:spcAft>
+                <a:spcPct val="0"/>
+              </a:spcAft>
+              <a:buClrTx/>
+              <a:buSzTx/>
+              <a:buFontTx/>
+              <a:buChar char="•"/>
+              <a:tabLst/>
+            </a:pPr>
+            <a:endParaRPr kumimoji="0" lang="en-US" altLang="en-US" sz="1800" b="0" i="0" u="none" strike="noStrike" cap="none" normalizeH="0" baseline="0" dirty="0">
+              <a:ln>
+                <a:noFill/>
+              </a:ln>
+              <a:effectLst/>
+              <a:latin typeface="Arial" panose="020B0604020202020204" pitchFamily="34" charset="0"/>
+            </a:endParaRPr>
+          </a:p>
+          <a:p>
+            <a:pPr marL="0" marR="0" lvl="0" indent="0" algn="l" defTabSz="914400" rtl="0" eaLnBrk="0" fontAlgn="base" latinLnBrk="0" hangingPunct="0">
+              <a:lnSpc>
+                <a:spcPct val="100000"/>
+              </a:lnSpc>
+              <a:spcBef>
+                <a:spcPct val="0"/>
+              </a:spcBef>
+              <a:spcAft>
+                <a:spcPct val="0"/>
+              </a:spcAft>
+              <a:buClrTx/>
+              <a:buSzTx/>
+              <a:buFontTx/>
+              <a:buChar char="•"/>
+              <a:tabLst/>
+            </a:pPr>
+            <a:r>
+              <a:rPr kumimoji="0" lang="en-US" altLang="en-US" sz="1800" b="0" i="0" u="none" strike="noStrike" cap="none" normalizeH="0" baseline="0" dirty="0">
+                <a:ln>
+                  <a:noFill/>
+                </a:ln>
+                <a:effectLst/>
+                <a:latin typeface="Arial" panose="020B0604020202020204" pitchFamily="34" charset="0"/>
+              </a:rPr>
+              <a:t>With its efficient use of data and strong localization ability, U-Net has become a foundational model for medical and semantic segmentation tasks.</a:t>
+            </a:r>
+          </a:p>
+        </p:txBody>
+      </p:sp>
     </p:spTree>
     <p:extLst>
       <p:ext uri="{BB962C8B-B14F-4D97-AF65-F5344CB8AC3E}">
-        <p14:creationId xmlns:p14="http://schemas.microsoft.com/office/powerpoint/2010/main" val="4254301780"/>
+        <p14:creationId xmlns:p14="http://schemas.microsoft.com/office/powerpoint/2010/main" val="2771645948"/>
       </p:ext>
     </p:extLst>
   </p:cSld>

--- a/ds18_GBM_Autosegmentation.pptx
+++ b/ds18_GBM_Autosegmentation.pptx
@@ -8531,8 +8531,8 @@
         </p:nvSpPr>
         <p:spPr bwMode="auto">
           <a:xfrm>
-            <a:off x="202875" y="1562005"/>
-            <a:ext cx="8892495" cy="1785104"/>
+            <a:off x="202875" y="1762059"/>
+            <a:ext cx="8892495" cy="1384995"/>
           </a:xfrm>
           <a:prstGeom prst="rect">
             <a:avLst/>
@@ -8633,60 +8633,6 @@
               <a:buChar char="•"/>
             </a:pPr>
             <a:endParaRPr kumimoji="0" lang="en-US" altLang="en-US" sz="1600" u="none" strike="noStrike" cap="none" normalizeH="0" baseline="0" dirty="0">
-              <a:ln>
-                <a:noFill/>
-              </a:ln>
-              <a:effectLst/>
-            </a:endParaRPr>
-          </a:p>
-          <a:p>
-            <a:pPr marL="400050" lvl="1" indent="0" algn="l" eaLnBrk="0" fontAlgn="base" hangingPunct="0">
-              <a:spcBef>
-                <a:spcPct val="0"/>
-              </a:spcBef>
-              <a:spcAft>
-                <a:spcPct val="0"/>
-              </a:spcAft>
-              <a:buFontTx/>
-              <a:buChar char="•"/>
-            </a:pPr>
-            <a:r>
-              <a:rPr kumimoji="0" lang="en-US" altLang="en-US" sz="1600" u="none" strike="noStrike" cap="none" normalizeH="0" baseline="0" dirty="0">
-                <a:ln>
-                  <a:noFill/>
-                </a:ln>
-                <a:effectLst/>
-              </a:rPr>
-              <a:t> This is just </a:t>
-            </a:r>
-            <a:r>
-              <a:rPr kumimoji="0" lang="en-US" altLang="en-US" sz="1600" u="none" strike="noStrike" cap="none" normalizeH="0" baseline="0">
-                <a:ln>
-                  <a:noFill/>
-                </a:ln>
-                <a:effectLst/>
-              </a:rPr>
-              <a:t>the beginning…</a:t>
-            </a:r>
-            <a:endParaRPr kumimoji="0" lang="en-US" altLang="en-US" sz="1600" u="none" strike="noStrike" cap="none" normalizeH="0" baseline="0" dirty="0">
-              <a:ln>
-                <a:noFill/>
-              </a:ln>
-              <a:effectLst/>
-            </a:endParaRPr>
-          </a:p>
-          <a:p>
-            <a:pPr marL="400050" lvl="1" indent="0" algn="l" eaLnBrk="0" fontAlgn="base" hangingPunct="0">
-              <a:spcBef>
-                <a:spcPct val="0"/>
-              </a:spcBef>
-              <a:spcAft>
-                <a:spcPct val="0"/>
-              </a:spcAft>
-              <a:buFontTx/>
-              <a:buChar char="•"/>
-            </a:pPr>
-            <a:endParaRPr kumimoji="0" lang="en-US" altLang="en-US" sz="1000" u="none" strike="noStrike" cap="none" normalizeH="0" baseline="0" dirty="0">
               <a:ln>
                 <a:noFill/>
               </a:ln>
@@ -8739,8 +8685,8 @@
         </p:nvSpPr>
         <p:spPr>
           <a:xfrm>
-            <a:off x="3808475" y="2569884"/>
-            <a:ext cx="1228734" cy="369332"/>
+            <a:off x="3350360" y="2419045"/>
+            <a:ext cx="2655535" cy="923330"/>
           </a:xfrm>
           <a:prstGeom prst="rect">
             <a:avLst/>
@@ -8753,6 +8699,26 @@
           </a:bodyPr>
           <a:lstStyle/>
           <a:p>
+            <a:pPr algn="ctr"/>
+            <a:r>
+              <a:rPr lang="en-US" altLang="en-US" dirty="0">
+                <a:solidFill>
+                  <a:schemeClr val="bg1"/>
+                </a:solidFill>
+              </a:rPr>
+              <a:t>This is just the beginning…</a:t>
+            </a:r>
+          </a:p>
+          <a:p>
+            <a:pPr algn="ctr"/>
+            <a:endParaRPr lang="en-US" dirty="0">
+              <a:solidFill>
+                <a:schemeClr val="bg1"/>
+              </a:solidFill>
+            </a:endParaRPr>
+          </a:p>
+          <a:p>
+            <a:pPr algn="ctr"/>
             <a:r>
               <a:rPr lang="en-US" dirty="0">
                 <a:solidFill>
@@ -8764,6 +8730,36 @@
           </a:p>
         </p:txBody>
       </p:sp>
+      <p:pic>
+        <p:nvPicPr>
+          <p:cNvPr id="4" name="Picture 3">
+            <a:extLst>
+              <a:ext uri="{FF2B5EF4-FFF2-40B4-BE49-F238E27FC236}">
+                <a16:creationId xmlns:a16="http://schemas.microsoft.com/office/drawing/2014/main" id="{093DB5B3-8A2C-5392-D223-A771CAE9CE00}"/>
+              </a:ext>
+            </a:extLst>
+          </p:cNvPr>
+          <p:cNvPicPr>
+            <a:picLocks noChangeAspect="1"/>
+          </p:cNvPicPr>
+          <p:nvPr/>
+        </p:nvPicPr>
+        <p:blipFill>
+          <a:blip r:embed="rId2"/>
+          <a:stretch>
+            <a:fillRect/>
+          </a:stretch>
+        </p:blipFill>
+        <p:spPr>
+          <a:xfrm>
+            <a:off x="7931510" y="128470"/>
+            <a:ext cx="993515" cy="1147246"/>
+          </a:xfrm>
+          <a:prstGeom prst="rect">
+            <a:avLst/>
+          </a:prstGeom>
+        </p:spPr>
+      </p:pic>
     </p:spTree>
     <p:extLst>
       <p:ext uri="{BB962C8B-B14F-4D97-AF65-F5344CB8AC3E}">

--- a/ds18_GBM_Autosegmentation.pptx
+++ b/ds18_GBM_Autosegmentation.pptx
@@ -5,7 +5,7 @@
     <p:sldMasterId id="2147483648" r:id="rId1"/>
   </p:sldMasterIdLst>
   <p:notesMasterIdLst>
-    <p:notesMasterId r:id="rId21"/>
+    <p:notesMasterId r:id="rId22"/>
   </p:notesMasterIdLst>
   <p:sldIdLst>
     <p:sldId id="256" r:id="rId2"/>
@@ -18,15 +18,16 @@
     <p:sldId id="264" r:id="rId9"/>
     <p:sldId id="269" r:id="rId10"/>
     <p:sldId id="266" r:id="rId11"/>
-    <p:sldId id="258" r:id="rId12"/>
-    <p:sldId id="270" r:id="rId13"/>
-    <p:sldId id="271" r:id="rId14"/>
-    <p:sldId id="272" r:id="rId15"/>
-    <p:sldId id="274" r:id="rId16"/>
-    <p:sldId id="273" r:id="rId17"/>
-    <p:sldId id="275" r:id="rId18"/>
-    <p:sldId id="267" r:id="rId19"/>
-    <p:sldId id="268" r:id="rId20"/>
+    <p:sldId id="270" r:id="rId12"/>
+    <p:sldId id="276" r:id="rId13"/>
+    <p:sldId id="258" r:id="rId14"/>
+    <p:sldId id="271" r:id="rId15"/>
+    <p:sldId id="272" r:id="rId16"/>
+    <p:sldId id="274" r:id="rId17"/>
+    <p:sldId id="273" r:id="rId18"/>
+    <p:sldId id="275" r:id="rId19"/>
+    <p:sldId id="267" r:id="rId20"/>
+    <p:sldId id="268" r:id="rId21"/>
   </p:sldIdLst>
   <p:sldSz cx="9144000" cy="5143500" type="screen16x9"/>
   <p:notesSz cx="6858000" cy="9144000"/>
@@ -226,7 +227,7 @@
           <a:p>
             <a:fld id="{C8D18E60-4300-4729-A0D7-6AB984C3922D}" type="datetimeFigureOut">
               <a:rPr lang="en-US" smtClean="0"/>
-              <a:t>6/23/2025</a:t>
+              <a:t>6/25/2025</a:t>
             </a:fld>
             <a:endParaRPr lang="en-US"/>
           </a:p>
@@ -558,7 +559,7 @@
           <a:p>
             <a:fld id="{AF533E96-F078-4B3D-A8F4-F1AF21EBC357}" type="slidenum">
               <a:rPr lang="en-US" smtClean="0"/>
-              <a:t>14</a:t>
+              <a:t>15</a:t>
             </a:fld>
             <a:endParaRPr lang="en-US"/>
           </a:p>
@@ -796,7 +797,7 @@
             <a:fld id="{53074F12-AA26-4AC8-9962-C36BB8F32554}" type="datetimeFigureOut">
               <a:rPr lang="en-US" smtClean="0"/>
               <a:pPr/>
-              <a:t>6/23/2025</a:t>
+              <a:t>6/25/2025</a:t>
             </a:fld>
             <a:endParaRPr lang="en-US"/>
           </a:p>
@@ -1050,7 +1051,7 @@
             <a:fld id="{53074F12-AA26-4AC8-9962-C36BB8F32554}" type="datetimeFigureOut">
               <a:rPr lang="en-US" smtClean="0"/>
               <a:pPr/>
-              <a:t>6/23/2025</a:t>
+              <a:t>6/25/2025</a:t>
             </a:fld>
             <a:endParaRPr lang="en-US"/>
           </a:p>
@@ -1220,7 +1221,7 @@
             <a:fld id="{53074F12-AA26-4AC8-9962-C36BB8F32554}" type="datetimeFigureOut">
               <a:rPr lang="en-US" smtClean="0"/>
               <a:pPr/>
-              <a:t>6/23/2025</a:t>
+              <a:t>6/25/2025</a:t>
             </a:fld>
             <a:endParaRPr lang="en-US"/>
           </a:p>
@@ -1400,7 +1401,7 @@
             <a:fld id="{53074F12-AA26-4AC8-9962-C36BB8F32554}" type="datetimeFigureOut">
               <a:rPr lang="en-US" smtClean="0"/>
               <a:pPr/>
-              <a:t>6/23/2025</a:t>
+              <a:t>6/25/2025</a:t>
             </a:fld>
             <a:endParaRPr lang="en-US"/>
           </a:p>
@@ -1682,7 +1683,7 @@
             <a:fld id="{53074F12-AA26-4AC8-9962-C36BB8F32554}" type="datetimeFigureOut">
               <a:rPr lang="en-US" smtClean="0"/>
               <a:pPr/>
-              <a:t>6/23/2025</a:t>
+              <a:t>6/25/2025</a:t>
             </a:fld>
             <a:endParaRPr lang="en-US"/>
           </a:p>
@@ -1929,7 +1930,7 @@
             <a:fld id="{53074F12-AA26-4AC8-9962-C36BB8F32554}" type="datetimeFigureOut">
               <a:rPr lang="en-US" smtClean="0"/>
               <a:pPr/>
-              <a:t>6/23/2025</a:t>
+              <a:t>6/25/2025</a:t>
             </a:fld>
             <a:endParaRPr lang="en-US"/>
           </a:p>
@@ -2176,7 +2177,7 @@
             <a:fld id="{53074F12-AA26-4AC8-9962-C36BB8F32554}" type="datetimeFigureOut">
               <a:rPr lang="en-US" smtClean="0"/>
               <a:pPr/>
-              <a:t>6/23/2025</a:t>
+              <a:t>6/25/2025</a:t>
             </a:fld>
             <a:endParaRPr lang="en-US"/>
           </a:p>
@@ -2463,7 +2464,7 @@
             <a:fld id="{53074F12-AA26-4AC8-9962-C36BB8F32554}" type="datetimeFigureOut">
               <a:rPr lang="en-US" smtClean="0"/>
               <a:pPr/>
-              <a:t>6/23/2025</a:t>
+              <a:t>6/25/2025</a:t>
             </a:fld>
             <a:endParaRPr lang="en-US"/>
           </a:p>
@@ -2950,7 +2951,7 @@
             <a:fld id="{53074F12-AA26-4AC8-9962-C36BB8F32554}" type="datetimeFigureOut">
               <a:rPr lang="en-US" smtClean="0"/>
               <a:pPr/>
-              <a:t>6/23/2025</a:t>
+              <a:t>6/25/2025</a:t>
             </a:fld>
             <a:endParaRPr lang="en-US"/>
           </a:p>
@@ -3069,7 +3070,7 @@
             <a:fld id="{53074F12-AA26-4AC8-9962-C36BB8F32554}" type="datetimeFigureOut">
               <a:rPr lang="en-US" smtClean="0"/>
               <a:pPr/>
-              <a:t>6/23/2025</a:t>
+              <a:t>6/25/2025</a:t>
             </a:fld>
             <a:endParaRPr lang="en-US"/>
           </a:p>
@@ -3166,7 +3167,7 @@
             <a:fld id="{53074F12-AA26-4AC8-9962-C36BB8F32554}" type="datetimeFigureOut">
               <a:rPr lang="en-US" smtClean="0"/>
               <a:pPr/>
-              <a:t>6/23/2025</a:t>
+              <a:t>6/25/2025</a:t>
             </a:fld>
             <a:endParaRPr lang="en-US"/>
           </a:p>
@@ -3443,7 +3444,7 @@
             <a:fld id="{53074F12-AA26-4AC8-9962-C36BB8F32554}" type="datetimeFigureOut">
               <a:rPr lang="en-US" smtClean="0"/>
               <a:pPr/>
-              <a:t>6/23/2025</a:t>
+              <a:t>6/25/2025</a:t>
             </a:fld>
             <a:endParaRPr lang="en-US"/>
           </a:p>
@@ -3665,7 +3666,7 @@
             <a:fld id="{53074F12-AA26-4AC8-9962-C36BB8F32554}" type="datetimeFigureOut">
               <a:rPr lang="en-US" smtClean="0"/>
               <a:pPr/>
-              <a:t>6/23/2025</a:t>
+              <a:t>6/25/2025</a:t>
             </a:fld>
             <a:endParaRPr lang="en-US"/>
           </a:p>
@@ -4308,6 +4309,1001 @@
   <p:cSld>
     <p:spTree>
       <p:nvGrpSpPr>
+        <p:cNvPr id="1" name="">
+          <a:extLst>
+            <a:ext uri="{FF2B5EF4-FFF2-40B4-BE49-F238E27FC236}">
+              <a16:creationId xmlns:a16="http://schemas.microsoft.com/office/drawing/2014/main" id="{9E5C0107-A9A3-1D74-8431-7D532DB8E4C4}"/>
+            </a:ext>
+          </a:extLst>
+        </p:cNvPr>
+        <p:cNvGrpSpPr/>
+        <p:nvPr/>
+      </p:nvGrpSpPr>
+      <p:grpSpPr>
+        <a:xfrm>
+          <a:off x="0" y="0"/>
+          <a:ext cx="0" cy="0"/>
+          <a:chOff x="0" y="0"/>
+          <a:chExt cx="0" cy="0"/>
+        </a:xfrm>
+      </p:grpSpPr>
+      <p:sp>
+        <p:nvSpPr>
+          <p:cNvPr id="4" name="Title 3">
+            <a:extLst>
+              <a:ext uri="{FF2B5EF4-FFF2-40B4-BE49-F238E27FC236}">
+                <a16:creationId xmlns:a16="http://schemas.microsoft.com/office/drawing/2014/main" id="{CB0BD1E1-5204-F240-A71E-85EFC2F47F21}"/>
+              </a:ext>
+            </a:extLst>
+          </p:cNvPr>
+          <p:cNvSpPr>
+            <a:spLocks noGrp="1"/>
+          </p:cNvSpPr>
+          <p:nvPr>
+            <p:ph type="title"/>
+          </p:nvPr>
+        </p:nvSpPr>
+        <p:spPr>
+          <a:xfrm>
+            <a:off x="3947120" y="233644"/>
+            <a:ext cx="4951349" cy="734703"/>
+          </a:xfrm>
+          <a:noFill/>
+        </p:spPr>
+        <p:txBody>
+          <a:bodyPr>
+            <a:normAutofit/>
+          </a:bodyPr>
+          <a:lstStyle/>
+          <a:p>
+            <a:pPr algn="l"/>
+            <a:r>
+              <a:rPr lang="en-US" dirty="0">
+                <a:solidFill>
+                  <a:schemeClr val="accent1">
+                    <a:lumMod val="20000"/>
+                    <a:lumOff val="80000"/>
+                  </a:schemeClr>
+                </a:solidFill>
+              </a:rPr>
+              <a:t>3D UNET with Monai</a:t>
+            </a:r>
+          </a:p>
+        </p:txBody>
+      </p:sp>
+      <p:sp>
+        <p:nvSpPr>
+          <p:cNvPr id="19" name="Rectangle 1">
+            <a:extLst>
+              <a:ext uri="{FF2B5EF4-FFF2-40B4-BE49-F238E27FC236}">
+                <a16:creationId xmlns:a16="http://schemas.microsoft.com/office/drawing/2014/main" id="{5F146879-FF3A-F60B-D8F3-9D8301F27C62}"/>
+              </a:ext>
+            </a:extLst>
+          </p:cNvPr>
+          <p:cNvSpPr>
+            <a:spLocks noGrp="1" noChangeArrowheads="1"/>
+          </p:cNvSpPr>
+          <p:nvPr>
+            <p:ph sz="half" idx="2"/>
+          </p:nvPr>
+        </p:nvSpPr>
+        <p:spPr bwMode="auto">
+          <a:xfrm>
+            <a:off x="108279" y="1398058"/>
+            <a:ext cx="8927441" cy="3416320"/>
+          </a:xfrm>
+          <a:prstGeom prst="rect">
+            <a:avLst/>
+          </a:prstGeom>
+          <a:solidFill>
+            <a:srgbClr val="001836"/>
+          </a:solidFill>
+          <a:ln>
+            <a:noFill/>
+          </a:ln>
+          <a:effectLst/>
+        </p:spPr>
+        <p:txBody>
+          <a:bodyPr vert="horz" wrap="square" lIns="91440" tIns="45720" rIns="91440" bIns="45720" numCol="1" anchor="ctr" anchorCtr="0" compatLnSpc="1">
+            <a:prstTxWarp prst="textNoShape">
+              <a:avLst/>
+            </a:prstTxWarp>
+            <a:spAutoFit/>
+          </a:bodyPr>
+          <a:lstStyle/>
+          <a:p>
+            <a:pPr marL="0" marR="0" lvl="0" indent="0" algn="l" defTabSz="914400" rtl="0" eaLnBrk="0" fontAlgn="base" latinLnBrk="0" hangingPunct="0">
+              <a:lnSpc>
+                <a:spcPct val="100000"/>
+              </a:lnSpc>
+              <a:spcBef>
+                <a:spcPct val="0"/>
+              </a:spcBef>
+              <a:spcAft>
+                <a:spcPct val="0"/>
+              </a:spcAft>
+              <a:buClrTx/>
+              <a:buSzTx/>
+              <a:buFontTx/>
+              <a:buChar char="•"/>
+              <a:tabLst/>
+            </a:pPr>
+            <a:r>
+              <a:rPr kumimoji="0" lang="en-US" altLang="en-US" sz="1800" b="1" i="0" u="none" strike="noStrike" cap="none" normalizeH="0" baseline="0" dirty="0">
+                <a:ln>
+                  <a:noFill/>
+                </a:ln>
+                <a:effectLst/>
+                <a:latin typeface="Arial" panose="020B0604020202020204" pitchFamily="34" charset="0"/>
+              </a:rPr>
+              <a:t>Encoder</a:t>
+            </a:r>
+            <a:r>
+              <a:rPr kumimoji="0" lang="en-US" altLang="en-US" sz="1800" b="0" i="0" u="none" strike="noStrike" cap="none" normalizeH="0" baseline="0" dirty="0">
+                <a:ln>
+                  <a:noFill/>
+                </a:ln>
+                <a:effectLst/>
+                <a:latin typeface="Arial" panose="020B0604020202020204" pitchFamily="34" charset="0"/>
+              </a:rPr>
+              <a:t>:</a:t>
+            </a:r>
+          </a:p>
+          <a:p>
+            <a:pPr marL="400050" lvl="1" indent="0" algn="l" eaLnBrk="0" fontAlgn="base" hangingPunct="0">
+              <a:spcBef>
+                <a:spcPct val="0"/>
+              </a:spcBef>
+              <a:spcAft>
+                <a:spcPct val="0"/>
+              </a:spcAft>
+              <a:buFontTx/>
+              <a:buChar char="•"/>
+            </a:pPr>
+            <a:r>
+              <a:rPr kumimoji="0" lang="en-US" altLang="en-US" sz="1400" b="0" i="0" u="none" strike="noStrike" cap="none" normalizeH="0" baseline="0" dirty="0">
+                <a:ln>
+                  <a:noFill/>
+                </a:ln>
+                <a:effectLst/>
+                <a:latin typeface="Arial" panose="020B0604020202020204" pitchFamily="34" charset="0"/>
+              </a:rPr>
+              <a:t> Input → 2×ResUnit @16 → ↓</a:t>
+            </a:r>
+          </a:p>
+          <a:p>
+            <a:pPr marL="400050" lvl="1" indent="0" algn="l" eaLnBrk="0" fontAlgn="base" hangingPunct="0">
+              <a:spcBef>
+                <a:spcPct val="0"/>
+              </a:spcBef>
+              <a:spcAft>
+                <a:spcPct val="0"/>
+              </a:spcAft>
+              <a:buFontTx/>
+              <a:buChar char="•"/>
+            </a:pPr>
+            <a:r>
+              <a:rPr kumimoji="0" lang="en-US" altLang="en-US" sz="1400" b="0" i="0" u="none" strike="noStrike" cap="none" normalizeH="0" baseline="0" dirty="0">
+                <a:ln>
+                  <a:noFill/>
+                </a:ln>
+                <a:effectLst/>
+                <a:latin typeface="Arial" panose="020B0604020202020204" pitchFamily="34" charset="0"/>
+              </a:rPr>
+              <a:t> 16 → 2×ResUnit @32 → ↓</a:t>
+            </a:r>
+          </a:p>
+          <a:p>
+            <a:pPr marL="400050" lvl="1" indent="0" algn="l" eaLnBrk="0" fontAlgn="base" hangingPunct="0">
+              <a:spcBef>
+                <a:spcPct val="0"/>
+              </a:spcBef>
+              <a:spcAft>
+                <a:spcPct val="0"/>
+              </a:spcAft>
+              <a:buFontTx/>
+              <a:buChar char="•"/>
+            </a:pPr>
+            <a:r>
+              <a:rPr kumimoji="0" lang="en-US" altLang="en-US" sz="1400" b="0" i="0" u="none" strike="noStrike" cap="none" normalizeH="0" baseline="0" dirty="0">
+                <a:ln>
+                  <a:noFill/>
+                </a:ln>
+                <a:effectLst/>
+                <a:latin typeface="Arial" panose="020B0604020202020204" pitchFamily="34" charset="0"/>
+              </a:rPr>
+              <a:t> 32 → 2×ResUnit @64 → ↓</a:t>
+            </a:r>
+          </a:p>
+          <a:p>
+            <a:pPr marL="400050" lvl="1" indent="0" algn="l" eaLnBrk="0" fontAlgn="base" hangingPunct="0">
+              <a:spcBef>
+                <a:spcPct val="0"/>
+              </a:spcBef>
+              <a:spcAft>
+                <a:spcPct val="0"/>
+              </a:spcAft>
+              <a:buFontTx/>
+              <a:buChar char="•"/>
+            </a:pPr>
+            <a:r>
+              <a:rPr kumimoji="0" lang="en-US" altLang="en-US" sz="1400" b="0" i="0" u="none" strike="noStrike" cap="none" normalizeH="0" baseline="0" dirty="0">
+                <a:ln>
+                  <a:noFill/>
+                </a:ln>
+                <a:effectLst/>
+                <a:latin typeface="Arial" panose="020B0604020202020204" pitchFamily="34" charset="0"/>
+              </a:rPr>
+              <a:t> 64 → 2×ResUnit @128 → ↓</a:t>
+            </a:r>
+          </a:p>
+          <a:p>
+            <a:pPr marL="0" marR="0" lvl="0" indent="0" algn="l" defTabSz="914400" rtl="0" eaLnBrk="0" fontAlgn="base" latinLnBrk="0" hangingPunct="0">
+              <a:lnSpc>
+                <a:spcPct val="100000"/>
+              </a:lnSpc>
+              <a:spcBef>
+                <a:spcPct val="0"/>
+              </a:spcBef>
+              <a:spcAft>
+                <a:spcPct val="0"/>
+              </a:spcAft>
+              <a:buClrTx/>
+              <a:buSzTx/>
+              <a:buFontTx/>
+              <a:buChar char="•"/>
+              <a:tabLst/>
+            </a:pPr>
+            <a:r>
+              <a:rPr kumimoji="0" lang="en-US" altLang="en-US" sz="1800" b="1" i="0" u="none" strike="noStrike" cap="none" normalizeH="0" baseline="0" dirty="0">
+                <a:ln>
+                  <a:noFill/>
+                </a:ln>
+                <a:effectLst/>
+                <a:latin typeface="Arial" panose="020B0604020202020204" pitchFamily="34" charset="0"/>
+              </a:rPr>
+              <a:t>Bottleneck</a:t>
+            </a:r>
+            <a:r>
+              <a:rPr kumimoji="0" lang="en-US" altLang="en-US" sz="1800" b="0" i="0" u="none" strike="noStrike" cap="none" normalizeH="0" baseline="0" dirty="0">
+                <a:ln>
+                  <a:noFill/>
+                </a:ln>
+                <a:effectLst/>
+                <a:latin typeface="Arial" panose="020B0604020202020204" pitchFamily="34" charset="0"/>
+              </a:rPr>
+              <a:t> :</a:t>
+            </a:r>
+          </a:p>
+          <a:p>
+            <a:pPr marL="400050" lvl="1" indent="0" algn="l" eaLnBrk="0" fontAlgn="base" hangingPunct="0">
+              <a:spcBef>
+                <a:spcPct val="0"/>
+              </a:spcBef>
+              <a:spcAft>
+                <a:spcPct val="0"/>
+              </a:spcAft>
+              <a:buFontTx/>
+              <a:buChar char="•"/>
+            </a:pPr>
+            <a:r>
+              <a:rPr kumimoji="0" lang="en-US" altLang="en-US" sz="1400" b="0" i="0" u="none" strike="noStrike" cap="none" normalizeH="0" baseline="0" dirty="0">
+                <a:ln>
+                  <a:noFill/>
+                </a:ln>
+                <a:effectLst/>
+                <a:latin typeface="Arial" panose="020B0604020202020204" pitchFamily="34" charset="0"/>
+              </a:rPr>
+              <a:t> 2×ResUnit @256</a:t>
+            </a:r>
+          </a:p>
+          <a:p>
+            <a:pPr marL="0" marR="0" lvl="0" indent="0" algn="l" defTabSz="914400" rtl="0" eaLnBrk="0" fontAlgn="base" latinLnBrk="0" hangingPunct="0">
+              <a:lnSpc>
+                <a:spcPct val="100000"/>
+              </a:lnSpc>
+              <a:spcBef>
+                <a:spcPct val="0"/>
+              </a:spcBef>
+              <a:spcAft>
+                <a:spcPct val="0"/>
+              </a:spcAft>
+              <a:buClrTx/>
+              <a:buSzTx/>
+              <a:buFontTx/>
+              <a:buChar char="•"/>
+              <a:tabLst/>
+            </a:pPr>
+            <a:r>
+              <a:rPr kumimoji="0" lang="en-US" altLang="en-US" sz="1800" b="1" i="0" u="none" strike="noStrike" cap="none" normalizeH="0" baseline="0" dirty="0">
+                <a:ln>
+                  <a:noFill/>
+                </a:ln>
+                <a:effectLst/>
+                <a:latin typeface="Arial" panose="020B0604020202020204" pitchFamily="34" charset="0"/>
+              </a:rPr>
+              <a:t>Decoder</a:t>
+            </a:r>
+            <a:r>
+              <a:rPr kumimoji="0" lang="en-US" altLang="en-US" sz="1800" b="0" i="0" u="none" strike="noStrike" cap="none" normalizeH="0" baseline="0" dirty="0">
+                <a:ln>
+                  <a:noFill/>
+                </a:ln>
+                <a:effectLst/>
+                <a:latin typeface="Arial" panose="020B0604020202020204" pitchFamily="34" charset="0"/>
+              </a:rPr>
+              <a:t>:</a:t>
+            </a:r>
+          </a:p>
+          <a:p>
+            <a:pPr marL="400050" lvl="1" indent="0" algn="l" eaLnBrk="0" fontAlgn="base" hangingPunct="0">
+              <a:spcBef>
+                <a:spcPct val="0"/>
+              </a:spcBef>
+              <a:spcAft>
+                <a:spcPct val="0"/>
+              </a:spcAft>
+              <a:buFontTx/>
+              <a:buChar char="•"/>
+            </a:pPr>
+            <a:r>
+              <a:rPr kumimoji="0" lang="en-US" altLang="en-US" sz="1400" b="0" i="0" u="none" strike="noStrike" cap="none" normalizeH="0" baseline="0" dirty="0">
+                <a:ln>
+                  <a:noFill/>
+                </a:ln>
+                <a:effectLst/>
+                <a:latin typeface="Arial" panose="020B0604020202020204" pitchFamily="34" charset="0"/>
+              </a:rPr>
+              <a:t> ↑ 2×ResUnit @128 ← Skip from step 4</a:t>
+            </a:r>
+          </a:p>
+          <a:p>
+            <a:pPr marL="400050" lvl="1" indent="0" algn="l" eaLnBrk="0" fontAlgn="base" hangingPunct="0">
+              <a:spcBef>
+                <a:spcPct val="0"/>
+              </a:spcBef>
+              <a:spcAft>
+                <a:spcPct val="0"/>
+              </a:spcAft>
+              <a:buFontTx/>
+              <a:buChar char="•"/>
+            </a:pPr>
+            <a:r>
+              <a:rPr kumimoji="0" lang="en-US" altLang="en-US" sz="1400" b="0" i="0" u="none" strike="noStrike" cap="none" normalizeH="0" baseline="0" dirty="0">
+                <a:ln>
+                  <a:noFill/>
+                </a:ln>
+                <a:effectLst/>
+                <a:latin typeface="Arial" panose="020B0604020202020204" pitchFamily="34" charset="0"/>
+              </a:rPr>
+              <a:t> ↑ 2×ResUnit @64 ← Skip from step 3</a:t>
+            </a:r>
+          </a:p>
+          <a:p>
+            <a:pPr marL="400050" lvl="1" indent="0" algn="l" eaLnBrk="0" fontAlgn="base" hangingPunct="0">
+              <a:spcBef>
+                <a:spcPct val="0"/>
+              </a:spcBef>
+              <a:spcAft>
+                <a:spcPct val="0"/>
+              </a:spcAft>
+              <a:buFontTx/>
+              <a:buChar char="•"/>
+            </a:pPr>
+            <a:r>
+              <a:rPr kumimoji="0" lang="en-US" altLang="en-US" sz="1400" b="0" i="0" u="none" strike="noStrike" cap="none" normalizeH="0" baseline="0" dirty="0">
+                <a:ln>
+                  <a:noFill/>
+                </a:ln>
+                <a:effectLst/>
+                <a:latin typeface="Arial" panose="020B0604020202020204" pitchFamily="34" charset="0"/>
+              </a:rPr>
+              <a:t> ↑ 2×ResUnit @32 ← Skip from step 2</a:t>
+            </a:r>
+          </a:p>
+          <a:p>
+            <a:pPr marL="400050" lvl="1" indent="0" algn="l" eaLnBrk="0" fontAlgn="base" hangingPunct="0">
+              <a:spcBef>
+                <a:spcPct val="0"/>
+              </a:spcBef>
+              <a:spcAft>
+                <a:spcPct val="0"/>
+              </a:spcAft>
+              <a:buFontTx/>
+              <a:buChar char="•"/>
+            </a:pPr>
+            <a:r>
+              <a:rPr kumimoji="0" lang="en-US" altLang="en-US" sz="1400" b="0" i="0" u="none" strike="noStrike" cap="none" normalizeH="0" baseline="0" dirty="0">
+                <a:ln>
+                  <a:noFill/>
+                </a:ln>
+                <a:effectLst/>
+                <a:latin typeface="Arial" panose="020B0604020202020204" pitchFamily="34" charset="0"/>
+              </a:rPr>
+              <a:t> ↑ 2×ResUnit @16 ← Skip from step 1</a:t>
+            </a:r>
+          </a:p>
+          <a:p>
+            <a:pPr marL="0" marR="0" lvl="0" indent="0" algn="l" defTabSz="914400" rtl="0" eaLnBrk="0" fontAlgn="base" latinLnBrk="0" hangingPunct="0">
+              <a:lnSpc>
+                <a:spcPct val="100000"/>
+              </a:lnSpc>
+              <a:spcBef>
+                <a:spcPct val="0"/>
+              </a:spcBef>
+              <a:spcAft>
+                <a:spcPct val="0"/>
+              </a:spcAft>
+              <a:buClrTx/>
+              <a:buSzTx/>
+              <a:buFontTx/>
+              <a:buChar char="•"/>
+              <a:tabLst/>
+            </a:pPr>
+            <a:r>
+              <a:rPr kumimoji="0" lang="en-US" altLang="en-US" sz="1800" b="1" i="0" u="none" strike="noStrike" cap="none" normalizeH="0" baseline="0" dirty="0">
+                <a:ln>
+                  <a:noFill/>
+                </a:ln>
+                <a:effectLst/>
+                <a:latin typeface="Arial" panose="020B0604020202020204" pitchFamily="34" charset="0"/>
+              </a:rPr>
+              <a:t>Final</a:t>
+            </a:r>
+            <a:r>
+              <a:rPr kumimoji="0" lang="en-US" altLang="en-US" sz="1800" b="0" i="0" u="none" strike="noStrike" cap="none" normalizeH="0" baseline="0" dirty="0">
+                <a:ln>
+                  <a:noFill/>
+                </a:ln>
+                <a:effectLst/>
+                <a:latin typeface="Arial" panose="020B0604020202020204" pitchFamily="34" charset="0"/>
+              </a:rPr>
+              <a:t>: </a:t>
+            </a:r>
+          </a:p>
+          <a:p>
+            <a:pPr marL="400050" lvl="1" indent="0" algn="l" eaLnBrk="0" fontAlgn="base" hangingPunct="0">
+              <a:spcBef>
+                <a:spcPct val="0"/>
+              </a:spcBef>
+              <a:spcAft>
+                <a:spcPct val="0"/>
+              </a:spcAft>
+              <a:buFontTx/>
+              <a:buChar char="•"/>
+            </a:pPr>
+            <a:r>
+              <a:rPr kumimoji="0" lang="en-US" altLang="en-US" sz="1400" b="0" i="0" u="none" strike="noStrike" cap="none" normalizeH="0" baseline="0" dirty="0">
+                <a:ln>
+                  <a:noFill/>
+                </a:ln>
+                <a:effectLst/>
+                <a:latin typeface="Arial" panose="020B0604020202020204" pitchFamily="34" charset="0"/>
+              </a:rPr>
+              <a:t> 1×1×1 Conv → </a:t>
+            </a:r>
+            <a:r>
+              <a:rPr kumimoji="0" lang="en-US" altLang="en-US" sz="1400" b="0" i="0" u="none" strike="noStrike" cap="none" normalizeH="0" baseline="0" dirty="0" err="1">
+                <a:ln>
+                  <a:noFill/>
+                </a:ln>
+                <a:effectLst/>
+                <a:latin typeface="Arial" panose="020B0604020202020204" pitchFamily="34" charset="0"/>
+              </a:rPr>
+              <a:t>num_classes</a:t>
+            </a:r>
+            <a:r>
+              <a:rPr kumimoji="0" lang="en-US" altLang="en-US" sz="1400" b="0" i="0" u="none" strike="noStrike" cap="none" normalizeH="0" baseline="0" dirty="0">
+                <a:ln>
+                  <a:noFill/>
+                </a:ln>
+                <a:effectLst/>
+                <a:latin typeface="Arial" panose="020B0604020202020204" pitchFamily="34" charset="0"/>
+              </a:rPr>
+              <a:t> (=4) channel output</a:t>
+            </a:r>
+          </a:p>
+        </p:txBody>
+      </p:sp>
+      <p:pic>
+        <p:nvPicPr>
+          <p:cNvPr id="16" name="Picture 15">
+            <a:extLst>
+              <a:ext uri="{FF2B5EF4-FFF2-40B4-BE49-F238E27FC236}">
+                <a16:creationId xmlns:a16="http://schemas.microsoft.com/office/drawing/2014/main" id="{9BEE861B-1757-25ED-AC26-B03BDFA75436}"/>
+              </a:ext>
+            </a:extLst>
+          </p:cNvPr>
+          <p:cNvPicPr>
+            <a:picLocks noChangeAspect="1"/>
+          </p:cNvPicPr>
+          <p:nvPr/>
+        </p:nvPicPr>
+        <p:blipFill>
+          <a:blip r:embed="rId2"/>
+          <a:stretch>
+            <a:fillRect/>
+          </a:stretch>
+        </p:blipFill>
+        <p:spPr>
+          <a:xfrm>
+            <a:off x="6422794" y="1044700"/>
+            <a:ext cx="2494009" cy="1679755"/>
+          </a:xfrm>
+          <a:prstGeom prst="rect">
+            <a:avLst/>
+          </a:prstGeom>
+        </p:spPr>
+      </p:pic>
+    </p:spTree>
+    <p:extLst>
+      <p:ext uri="{BB962C8B-B14F-4D97-AF65-F5344CB8AC3E}">
+        <p14:creationId xmlns:p14="http://schemas.microsoft.com/office/powerpoint/2010/main" val="474185227"/>
+      </p:ext>
+    </p:extLst>
+  </p:cSld>
+  <p:clrMapOvr>
+    <a:masterClrMapping/>
+  </p:clrMapOvr>
+</p:sld>
+</file>
+
+<file path=ppt/slides/slide12.xml><?xml version="1.0" encoding="utf-8"?>
+<p:sld xmlns:a="http://schemas.openxmlformats.org/drawingml/2006/main" xmlns:r="http://schemas.openxmlformats.org/officeDocument/2006/relationships" xmlns:p="http://schemas.openxmlformats.org/presentationml/2006/main">
+  <p:cSld>
+    <p:spTree>
+      <p:nvGrpSpPr>
+        <p:cNvPr id="1" name="">
+          <a:extLst>
+            <a:ext uri="{FF2B5EF4-FFF2-40B4-BE49-F238E27FC236}">
+              <a16:creationId xmlns:a16="http://schemas.microsoft.com/office/drawing/2014/main" id="{0349A38A-8F4E-05BE-4884-437EC9858DEF}"/>
+            </a:ext>
+          </a:extLst>
+        </p:cNvPr>
+        <p:cNvGrpSpPr/>
+        <p:nvPr/>
+      </p:nvGrpSpPr>
+      <p:grpSpPr>
+        <a:xfrm>
+          <a:off x="0" y="0"/>
+          <a:ext cx="0" cy="0"/>
+          <a:chOff x="0" y="0"/>
+          <a:chExt cx="0" cy="0"/>
+        </a:xfrm>
+      </p:grpSpPr>
+      <p:sp>
+        <p:nvSpPr>
+          <p:cNvPr id="4" name="Title 3">
+            <a:extLst>
+              <a:ext uri="{FF2B5EF4-FFF2-40B4-BE49-F238E27FC236}">
+                <a16:creationId xmlns:a16="http://schemas.microsoft.com/office/drawing/2014/main" id="{D6644AC4-89CC-2F14-2153-D316AFB297A2}"/>
+              </a:ext>
+            </a:extLst>
+          </p:cNvPr>
+          <p:cNvSpPr>
+            <a:spLocks noGrp="1"/>
+          </p:cNvSpPr>
+          <p:nvPr>
+            <p:ph type="title"/>
+          </p:nvPr>
+        </p:nvSpPr>
+        <p:spPr>
+          <a:xfrm>
+            <a:off x="3947120" y="128470"/>
+            <a:ext cx="4951349" cy="734703"/>
+          </a:xfrm>
+          <a:noFill/>
+        </p:spPr>
+        <p:txBody>
+          <a:bodyPr>
+            <a:normAutofit/>
+          </a:bodyPr>
+          <a:lstStyle/>
+          <a:p>
+            <a:pPr algn="l"/>
+            <a:r>
+              <a:rPr lang="en-US" dirty="0">
+                <a:solidFill>
+                  <a:schemeClr val="accent1">
+                    <a:lumMod val="20000"/>
+                    <a:lumOff val="80000"/>
+                  </a:schemeClr>
+                </a:solidFill>
+              </a:rPr>
+              <a:t>3D UNET with Monai</a:t>
+            </a:r>
+          </a:p>
+        </p:txBody>
+      </p:sp>
+      <p:sp>
+        <p:nvSpPr>
+          <p:cNvPr id="19" name="Rectangle 1">
+            <a:extLst>
+              <a:ext uri="{FF2B5EF4-FFF2-40B4-BE49-F238E27FC236}">
+                <a16:creationId xmlns:a16="http://schemas.microsoft.com/office/drawing/2014/main" id="{EE9C9379-C96F-DAB7-D498-028609172692}"/>
+              </a:ext>
+            </a:extLst>
+          </p:cNvPr>
+          <p:cNvSpPr>
+            <a:spLocks noGrp="1" noChangeArrowheads="1"/>
+          </p:cNvSpPr>
+          <p:nvPr>
+            <p:ph sz="half" idx="2"/>
+          </p:nvPr>
+        </p:nvSpPr>
+        <p:spPr bwMode="auto">
+          <a:xfrm>
+            <a:off x="0" y="739290"/>
+            <a:ext cx="8927441" cy="4382738"/>
+          </a:xfrm>
+          <a:prstGeom prst="rect">
+            <a:avLst/>
+          </a:prstGeom>
+          <a:solidFill>
+            <a:srgbClr val="001836"/>
+          </a:solidFill>
+          <a:ln>
+            <a:noFill/>
+          </a:ln>
+          <a:effectLst/>
+        </p:spPr>
+        <p:txBody>
+          <a:bodyPr vert="horz" wrap="square" lIns="91440" tIns="45720" rIns="91440" bIns="45720" numCol="1" anchor="ctr" anchorCtr="0" compatLnSpc="1">
+            <a:prstTxWarp prst="textNoShape">
+              <a:avLst/>
+            </a:prstTxWarp>
+            <a:spAutoFit/>
+          </a:bodyPr>
+          <a:lstStyle/>
+          <a:p>
+            <a:pPr algn="l"/>
+            <a:r>
+              <a:rPr lang="en-US" sz="1400" b="1" dirty="0"/>
+              <a:t>Input: </a:t>
+            </a:r>
+            <a:r>
+              <a:rPr lang="en-US" sz="1400" dirty="0"/>
+              <a:t>A 128×128×128 MRI volume.</a:t>
+            </a:r>
+          </a:p>
+          <a:p>
+            <a:pPr algn="l"/>
+            <a:r>
+              <a:rPr lang="en-US" sz="1400" b="1" dirty="0"/>
+              <a:t>Contracting (“Encoder”) Path</a:t>
+            </a:r>
+            <a:endParaRPr lang="en-US" sz="1400" dirty="0"/>
+          </a:p>
+          <a:p>
+            <a:pPr lvl="1" algn="l"/>
+            <a:r>
+              <a:rPr lang="en-US" sz="1000" b="1" dirty="0"/>
+              <a:t>C1</a:t>
+            </a:r>
+            <a:r>
+              <a:rPr lang="en-US" sz="1000" dirty="0"/>
+              <a:t>: two 3×3×3 Conv → ReLU layers producing 16 channels.</a:t>
+            </a:r>
+          </a:p>
+          <a:p>
+            <a:pPr lvl="1" algn="l"/>
+            <a:r>
+              <a:rPr lang="en-US" sz="1100" b="1" dirty="0"/>
+              <a:t>P1</a:t>
+            </a:r>
+            <a:r>
+              <a:rPr lang="en-US" sz="1100" dirty="0"/>
+              <a:t>: 2×2×2 max-pool reduces to 64³.</a:t>
+            </a:r>
+          </a:p>
+          <a:p>
+            <a:pPr lvl="1" algn="l"/>
+            <a:r>
+              <a:rPr lang="en-US" sz="1100" b="1" dirty="0"/>
+              <a:t>C2</a:t>
+            </a:r>
+            <a:r>
+              <a:rPr lang="en-US" sz="1100" dirty="0"/>
+              <a:t>: 2xResUnit(</a:t>
+            </a:r>
+            <a:r>
+              <a:rPr lang="en-US" sz="1100" dirty="0" err="1"/>
+              <a:t>Conv+ReLU</a:t>
+            </a:r>
+            <a:r>
+              <a:rPr lang="en-US" sz="1100" dirty="0"/>
+              <a:t>) → 32 channels; </a:t>
+            </a:r>
+            <a:r>
+              <a:rPr lang="en-US" sz="1100" b="1" dirty="0"/>
+              <a:t>P2</a:t>
+            </a:r>
+            <a:r>
+              <a:rPr lang="en-US" sz="1100" dirty="0"/>
+              <a:t> → 32³.</a:t>
+            </a:r>
+          </a:p>
+          <a:p>
+            <a:pPr lvl="1" algn="l"/>
+            <a:r>
+              <a:rPr lang="en-US" sz="1100" b="1" dirty="0"/>
+              <a:t>C3</a:t>
+            </a:r>
+            <a:r>
+              <a:rPr lang="en-US" sz="1100" dirty="0"/>
+              <a:t>: 2xResUnit(</a:t>
+            </a:r>
+            <a:r>
+              <a:rPr lang="en-US" sz="1100" dirty="0" err="1"/>
+              <a:t>Conv+ReLU</a:t>
+            </a:r>
+            <a:r>
+              <a:rPr lang="en-US" sz="1100" dirty="0"/>
+              <a:t>) → 64 channels; </a:t>
+            </a:r>
+            <a:r>
+              <a:rPr lang="en-US" sz="1100" b="1" dirty="0"/>
+              <a:t>P3</a:t>
+            </a:r>
+            <a:r>
+              <a:rPr lang="en-US" sz="1100" dirty="0"/>
+              <a:t> → 16³.</a:t>
+            </a:r>
+          </a:p>
+          <a:p>
+            <a:pPr lvl="1" algn="l"/>
+            <a:r>
+              <a:rPr lang="en-US" sz="1100" b="1" dirty="0"/>
+              <a:t>C4</a:t>
+            </a:r>
+            <a:r>
+              <a:rPr lang="en-US" sz="1100" dirty="0"/>
+              <a:t>: 2xResUnit(</a:t>
+            </a:r>
+            <a:r>
+              <a:rPr lang="en-US" sz="1100" dirty="0" err="1"/>
+              <a:t>Conv+ReLU</a:t>
+            </a:r>
+            <a:r>
+              <a:rPr lang="en-US" sz="1100" dirty="0"/>
+              <a:t>) → 128 channels; </a:t>
+            </a:r>
+            <a:r>
+              <a:rPr lang="en-US" sz="1100" b="1" dirty="0"/>
+              <a:t>P4</a:t>
+            </a:r>
+            <a:r>
+              <a:rPr lang="en-US" sz="1100" dirty="0"/>
+              <a:t> → 8³.</a:t>
+            </a:r>
+          </a:p>
+          <a:p>
+            <a:pPr lvl="1" algn="l"/>
+            <a:r>
+              <a:rPr lang="en-US" sz="1100" b="1" dirty="0"/>
+              <a:t>Bottleneck (C5)</a:t>
+            </a:r>
+            <a:r>
+              <a:rPr lang="en-US" sz="1100" dirty="0"/>
+              <a:t>: Conv block → 256 channels at 8³.</a:t>
+            </a:r>
+          </a:p>
+          <a:p>
+            <a:pPr algn="l"/>
+            <a:r>
+              <a:rPr lang="en-US" sz="1400" b="1" dirty="0"/>
+              <a:t>Expansive (“Decoder”) Path</a:t>
+            </a:r>
+            <a:endParaRPr lang="en-US" sz="1400" dirty="0"/>
+          </a:p>
+          <a:p>
+            <a:pPr lvl="1" algn="l"/>
+            <a:r>
+              <a:rPr lang="en-US" sz="1100" b="1" dirty="0"/>
+              <a:t>U6</a:t>
+            </a:r>
+            <a:r>
+              <a:rPr lang="en-US" sz="1100" dirty="0"/>
+              <a:t>: 2× up-sampling from 8³→16³, concatenate with C4 features (skip), then Conv block →128 channels.</a:t>
+            </a:r>
+          </a:p>
+          <a:p>
+            <a:pPr lvl="1" algn="l"/>
+            <a:r>
+              <a:rPr lang="en-US" sz="1100" b="1" dirty="0"/>
+              <a:t>U7</a:t>
+            </a:r>
+            <a:r>
+              <a:rPr lang="en-US" sz="1100" dirty="0"/>
+              <a:t>: up-sample 16³→32³ + C3 skip → 2xResUnit(</a:t>
+            </a:r>
+            <a:r>
+              <a:rPr lang="en-US" sz="1100" dirty="0" err="1"/>
+              <a:t>DeConv+ReLU</a:t>
+            </a:r>
+            <a:r>
+              <a:rPr lang="en-US" sz="1100" dirty="0"/>
+              <a:t>) →64 channels.</a:t>
+            </a:r>
+          </a:p>
+          <a:p>
+            <a:pPr lvl="1" algn="l"/>
+            <a:r>
+              <a:rPr lang="en-US" sz="1100" b="1" dirty="0"/>
+              <a:t>U8</a:t>
+            </a:r>
+            <a:r>
+              <a:rPr lang="en-US" sz="1100" dirty="0"/>
+              <a:t>: up-sample 32³→64³ + C2 skip → 2xResUnit(</a:t>
+            </a:r>
+            <a:r>
+              <a:rPr lang="en-US" sz="1100" dirty="0" err="1"/>
+              <a:t>DeConv+ReLU</a:t>
+            </a:r>
+            <a:r>
+              <a:rPr lang="en-US" sz="1100" dirty="0"/>
+              <a:t>) →32 channels.</a:t>
+            </a:r>
+          </a:p>
+          <a:p>
+            <a:pPr lvl="1" algn="l"/>
+            <a:r>
+              <a:rPr lang="en-US" sz="1100" b="1" dirty="0"/>
+              <a:t>U9</a:t>
+            </a:r>
+            <a:r>
+              <a:rPr lang="en-US" sz="1100" dirty="0"/>
+              <a:t>: up-sample 64³→128³ + C1 skip → 2xResUnit(</a:t>
+            </a:r>
+            <a:r>
+              <a:rPr lang="en-US" sz="1100" dirty="0" err="1"/>
+              <a:t>DeConv+ReLU</a:t>
+            </a:r>
+            <a:r>
+              <a:rPr lang="en-US" sz="1100"/>
+              <a:t>) →</a:t>
+            </a:r>
+            <a:r>
+              <a:rPr lang="en-US" sz="1100" dirty="0"/>
+              <a:t>16 channels.</a:t>
+            </a:r>
+          </a:p>
+          <a:p>
+            <a:pPr algn="l"/>
+            <a:r>
+              <a:rPr lang="en-US" sz="1400" b="1" dirty="0"/>
+              <a:t>Final Output</a:t>
+            </a:r>
+            <a:endParaRPr lang="en-US" sz="1400" dirty="0"/>
+          </a:p>
+          <a:p>
+            <a:pPr lvl="1" algn="l"/>
+            <a:r>
+              <a:rPr lang="en-US" sz="1100" dirty="0"/>
+              <a:t>A 1×1×1 Conv projects the 16-channel map to a single segmentation mask (128³×1).</a:t>
+            </a:r>
+          </a:p>
+          <a:p>
+            <a:pPr algn="l"/>
+            <a:r>
+              <a:rPr lang="en-US" sz="1400" b="1" dirty="0"/>
+              <a:t>Key Points</a:t>
+            </a:r>
+            <a:endParaRPr lang="en-US" sz="1400" dirty="0"/>
+          </a:p>
+          <a:p>
+            <a:pPr lvl="1" algn="l"/>
+            <a:r>
+              <a:rPr lang="en-US" sz="1100" b="1" dirty="0"/>
+              <a:t>Symmetry</a:t>
+            </a:r>
+            <a:r>
+              <a:rPr lang="en-US" sz="1100" dirty="0"/>
+              <a:t>: encoder and decoder mirror each other in depth and channel counts.</a:t>
+            </a:r>
+          </a:p>
+          <a:p>
+            <a:pPr lvl="1" algn="l"/>
+            <a:r>
+              <a:rPr lang="en-US" sz="1100" b="1" dirty="0"/>
+              <a:t>Skip Connections</a:t>
+            </a:r>
+            <a:r>
+              <a:rPr lang="en-US" sz="1100" dirty="0"/>
+              <a:t>: direct concatenation of encoder features restores fine spatial detail.</a:t>
+            </a:r>
+          </a:p>
+          <a:p>
+            <a:pPr lvl="1" algn="l"/>
+            <a:r>
+              <a:rPr lang="en-US" sz="1100" b="1" dirty="0"/>
+              <a:t>3D Conv &amp; Pool/</a:t>
+            </a:r>
+            <a:r>
+              <a:rPr lang="en-US" sz="1100" b="1" dirty="0" err="1"/>
+              <a:t>Upsample</a:t>
+            </a:r>
+            <a:r>
+              <a:rPr lang="en-US" sz="1100" dirty="0"/>
+              <a:t>: all operations are volumetric, preserving the 3D context.</a:t>
+            </a:r>
+            <a:endParaRPr lang="en-US" sz="1800" dirty="0"/>
+          </a:p>
+          <a:p>
+            <a:pPr marL="0" marR="0" lvl="0" indent="0" algn="l" defTabSz="914400" rtl="0" eaLnBrk="0" fontAlgn="base" latinLnBrk="0" hangingPunct="0">
+              <a:lnSpc>
+                <a:spcPct val="100000"/>
+              </a:lnSpc>
+              <a:spcBef>
+                <a:spcPct val="0"/>
+              </a:spcBef>
+              <a:spcAft>
+                <a:spcPct val="0"/>
+              </a:spcAft>
+              <a:buClrTx/>
+              <a:buSzTx/>
+              <a:buFontTx/>
+              <a:buChar char="•"/>
+              <a:tabLst/>
+            </a:pPr>
+            <a:endParaRPr kumimoji="0" lang="en-US" altLang="en-US" sz="1400" b="0" i="0" u="none" strike="noStrike" cap="none" normalizeH="0" baseline="0" dirty="0">
+              <a:ln>
+                <a:noFill/>
+              </a:ln>
+              <a:effectLst/>
+              <a:latin typeface="Arial" panose="020B0604020202020204" pitchFamily="34" charset="0"/>
+            </a:endParaRPr>
+          </a:p>
+        </p:txBody>
+      </p:sp>
+      <p:pic>
+        <p:nvPicPr>
+          <p:cNvPr id="16" name="Picture 15">
+            <a:extLst>
+              <a:ext uri="{FF2B5EF4-FFF2-40B4-BE49-F238E27FC236}">
+                <a16:creationId xmlns:a16="http://schemas.microsoft.com/office/drawing/2014/main" id="{7D7E0C2D-8046-485B-4BB8-4B9C6E41F7C3}"/>
+              </a:ext>
+            </a:extLst>
+          </p:cNvPr>
+          <p:cNvPicPr>
+            <a:picLocks noChangeAspect="1"/>
+          </p:cNvPicPr>
+          <p:nvPr/>
+        </p:nvPicPr>
+        <p:blipFill>
+          <a:blip r:embed="rId2"/>
+          <a:stretch>
+            <a:fillRect/>
+          </a:stretch>
+        </p:blipFill>
+        <p:spPr>
+          <a:xfrm>
+            <a:off x="6422794" y="891995"/>
+            <a:ext cx="2494009" cy="1679755"/>
+          </a:xfrm>
+          <a:prstGeom prst="rect">
+            <a:avLst/>
+          </a:prstGeom>
+        </p:spPr>
+      </p:pic>
+    </p:spTree>
+    <p:extLst>
+      <p:ext uri="{BB962C8B-B14F-4D97-AF65-F5344CB8AC3E}">
+        <p14:creationId xmlns:p14="http://schemas.microsoft.com/office/powerpoint/2010/main" val="57542518"/>
+      </p:ext>
+    </p:extLst>
+  </p:cSld>
+  <p:clrMapOvr>
+    <a:masterClrMapping/>
+  </p:clrMapOvr>
+</p:sld>
+</file>
+
+<file path=ppt/slides/slide13.xml><?xml version="1.0" encoding="utf-8"?>
+<p:sld xmlns:a="http://schemas.openxmlformats.org/drawingml/2006/main" xmlns:r="http://schemas.openxmlformats.org/officeDocument/2006/relationships" xmlns:p="http://schemas.openxmlformats.org/presentationml/2006/main">
+  <p:cSld>
+    <p:spTree>
+      <p:nvGrpSpPr>
         <p:cNvPr id="1" name=""/>
         <p:cNvGrpSpPr/>
         <p:nvPr/>
@@ -4871,551 +5867,7 @@
 </p:sld>
 </file>
 
-<file path=ppt/slides/slide12.xml><?xml version="1.0" encoding="utf-8"?>
-<p:sld xmlns:a="http://schemas.openxmlformats.org/drawingml/2006/main" xmlns:r="http://schemas.openxmlformats.org/officeDocument/2006/relationships" xmlns:p="http://schemas.openxmlformats.org/presentationml/2006/main">
-  <p:cSld>
-    <p:spTree>
-      <p:nvGrpSpPr>
-        <p:cNvPr id="1" name="">
-          <a:extLst>
-            <a:ext uri="{FF2B5EF4-FFF2-40B4-BE49-F238E27FC236}">
-              <a16:creationId xmlns:a16="http://schemas.microsoft.com/office/drawing/2014/main" id="{9E5C0107-A9A3-1D74-8431-7D532DB8E4C4}"/>
-            </a:ext>
-          </a:extLst>
-        </p:cNvPr>
-        <p:cNvGrpSpPr/>
-        <p:nvPr/>
-      </p:nvGrpSpPr>
-      <p:grpSpPr>
-        <a:xfrm>
-          <a:off x="0" y="0"/>
-          <a:ext cx="0" cy="0"/>
-          <a:chOff x="0" y="0"/>
-          <a:chExt cx="0" cy="0"/>
-        </a:xfrm>
-      </p:grpSpPr>
-      <p:sp>
-        <p:nvSpPr>
-          <p:cNvPr id="4" name="Title 3">
-            <a:extLst>
-              <a:ext uri="{FF2B5EF4-FFF2-40B4-BE49-F238E27FC236}">
-                <a16:creationId xmlns:a16="http://schemas.microsoft.com/office/drawing/2014/main" id="{CB0BD1E1-5204-F240-A71E-85EFC2F47F21}"/>
-              </a:ext>
-            </a:extLst>
-          </p:cNvPr>
-          <p:cNvSpPr>
-            <a:spLocks noGrp="1"/>
-          </p:cNvSpPr>
-          <p:nvPr>
-            <p:ph type="title"/>
-          </p:nvPr>
-        </p:nvSpPr>
-        <p:spPr>
-          <a:xfrm>
-            <a:off x="3947120" y="233644"/>
-            <a:ext cx="4951349" cy="734703"/>
-          </a:xfrm>
-          <a:noFill/>
-        </p:spPr>
-        <p:txBody>
-          <a:bodyPr>
-            <a:normAutofit/>
-          </a:bodyPr>
-          <a:lstStyle/>
-          <a:p>
-            <a:pPr algn="l"/>
-            <a:r>
-              <a:rPr lang="en-US" dirty="0">
-                <a:solidFill>
-                  <a:schemeClr val="accent1">
-                    <a:lumMod val="20000"/>
-                    <a:lumOff val="80000"/>
-                  </a:schemeClr>
-                </a:solidFill>
-              </a:rPr>
-              <a:t>3D UNET with Monai</a:t>
-            </a:r>
-          </a:p>
-        </p:txBody>
-      </p:sp>
-      <p:sp>
-        <p:nvSpPr>
-          <p:cNvPr id="19" name="Rectangle 1">
-            <a:extLst>
-              <a:ext uri="{FF2B5EF4-FFF2-40B4-BE49-F238E27FC236}">
-                <a16:creationId xmlns:a16="http://schemas.microsoft.com/office/drawing/2014/main" id="{5F146879-FF3A-F60B-D8F3-9D8301F27C62}"/>
-              </a:ext>
-            </a:extLst>
-          </p:cNvPr>
-          <p:cNvSpPr>
-            <a:spLocks noGrp="1" noChangeArrowheads="1"/>
-          </p:cNvSpPr>
-          <p:nvPr>
-            <p:ph sz="half" idx="2"/>
-          </p:nvPr>
-        </p:nvSpPr>
-        <p:spPr bwMode="auto">
-          <a:xfrm>
-            <a:off x="108279" y="1398058"/>
-            <a:ext cx="8927441" cy="3416320"/>
-          </a:xfrm>
-          <a:prstGeom prst="rect">
-            <a:avLst/>
-          </a:prstGeom>
-          <a:solidFill>
-            <a:srgbClr val="001836"/>
-          </a:solidFill>
-          <a:ln>
-            <a:noFill/>
-          </a:ln>
-          <a:effectLst/>
-        </p:spPr>
-        <p:txBody>
-          <a:bodyPr vert="horz" wrap="square" lIns="91440" tIns="45720" rIns="91440" bIns="45720" numCol="1" anchor="ctr" anchorCtr="0" compatLnSpc="1">
-            <a:prstTxWarp prst="textNoShape">
-              <a:avLst/>
-            </a:prstTxWarp>
-            <a:spAutoFit/>
-          </a:bodyPr>
-          <a:lstStyle/>
-          <a:p>
-            <a:pPr marL="0" marR="0" lvl="0" indent="0" algn="l" defTabSz="914400" rtl="0" eaLnBrk="0" fontAlgn="base" latinLnBrk="0" hangingPunct="0">
-              <a:lnSpc>
-                <a:spcPct val="100000"/>
-              </a:lnSpc>
-              <a:spcBef>
-                <a:spcPct val="0"/>
-              </a:spcBef>
-              <a:spcAft>
-                <a:spcPct val="0"/>
-              </a:spcAft>
-              <a:buClrTx/>
-              <a:buSzTx/>
-              <a:buFontTx/>
-              <a:buChar char="•"/>
-              <a:tabLst/>
-            </a:pPr>
-            <a:r>
-              <a:rPr kumimoji="0" lang="en-US" altLang="en-US" sz="1800" b="1" i="0" u="none" strike="noStrike" cap="none" normalizeH="0" baseline="0" dirty="0">
-                <a:ln>
-                  <a:noFill/>
-                </a:ln>
-                <a:effectLst/>
-                <a:latin typeface="Arial" panose="020B0604020202020204" pitchFamily="34" charset="0"/>
-              </a:rPr>
-              <a:t>Encoder</a:t>
-            </a:r>
-            <a:r>
-              <a:rPr kumimoji="0" lang="en-US" altLang="en-US" sz="1800" b="0" i="0" u="none" strike="noStrike" cap="none" normalizeH="0" baseline="0" dirty="0">
-                <a:ln>
-                  <a:noFill/>
-                </a:ln>
-                <a:effectLst/>
-                <a:latin typeface="Arial" panose="020B0604020202020204" pitchFamily="34" charset="0"/>
-              </a:rPr>
-              <a:t>:</a:t>
-            </a:r>
-          </a:p>
-          <a:p>
-            <a:pPr marL="400050" lvl="1" indent="0" algn="l" eaLnBrk="0" fontAlgn="base" hangingPunct="0">
-              <a:spcBef>
-                <a:spcPct val="0"/>
-              </a:spcBef>
-              <a:spcAft>
-                <a:spcPct val="0"/>
-              </a:spcAft>
-              <a:buFontTx/>
-              <a:buChar char="•"/>
-            </a:pPr>
-            <a:r>
-              <a:rPr kumimoji="0" lang="en-US" altLang="en-US" sz="1400" b="0" i="0" u="none" strike="noStrike" cap="none" normalizeH="0" baseline="0" dirty="0">
-                <a:ln>
-                  <a:noFill/>
-                </a:ln>
-                <a:effectLst/>
-                <a:latin typeface="Arial" panose="020B0604020202020204" pitchFamily="34" charset="0"/>
-              </a:rPr>
-              <a:t> Input → 2×ResUnit @16 → ↓</a:t>
-            </a:r>
-          </a:p>
-          <a:p>
-            <a:pPr marL="400050" lvl="1" indent="0" algn="l" eaLnBrk="0" fontAlgn="base" hangingPunct="0">
-              <a:spcBef>
-                <a:spcPct val="0"/>
-              </a:spcBef>
-              <a:spcAft>
-                <a:spcPct val="0"/>
-              </a:spcAft>
-              <a:buFontTx/>
-              <a:buChar char="•"/>
-            </a:pPr>
-            <a:r>
-              <a:rPr kumimoji="0" lang="en-US" altLang="en-US" sz="1400" b="0" i="0" u="none" strike="noStrike" cap="none" normalizeH="0" baseline="0" dirty="0">
-                <a:ln>
-                  <a:noFill/>
-                </a:ln>
-                <a:effectLst/>
-                <a:latin typeface="Arial" panose="020B0604020202020204" pitchFamily="34" charset="0"/>
-              </a:rPr>
-              <a:t> 16 → 2×ResUnit @32 → ↓</a:t>
-            </a:r>
-          </a:p>
-          <a:p>
-            <a:pPr marL="400050" lvl="1" indent="0" algn="l" eaLnBrk="0" fontAlgn="base" hangingPunct="0">
-              <a:spcBef>
-                <a:spcPct val="0"/>
-              </a:spcBef>
-              <a:spcAft>
-                <a:spcPct val="0"/>
-              </a:spcAft>
-              <a:buFontTx/>
-              <a:buChar char="•"/>
-            </a:pPr>
-            <a:r>
-              <a:rPr kumimoji="0" lang="en-US" altLang="en-US" sz="1400" b="0" i="0" u="none" strike="noStrike" cap="none" normalizeH="0" baseline="0" dirty="0">
-                <a:ln>
-                  <a:noFill/>
-                </a:ln>
-                <a:effectLst/>
-                <a:latin typeface="Arial" panose="020B0604020202020204" pitchFamily="34" charset="0"/>
-              </a:rPr>
-              <a:t> 32 → 2×ResUnit @64 → ↓</a:t>
-            </a:r>
-          </a:p>
-          <a:p>
-            <a:pPr marL="400050" lvl="1" indent="0" algn="l" eaLnBrk="0" fontAlgn="base" hangingPunct="0">
-              <a:spcBef>
-                <a:spcPct val="0"/>
-              </a:spcBef>
-              <a:spcAft>
-                <a:spcPct val="0"/>
-              </a:spcAft>
-              <a:buFontTx/>
-              <a:buChar char="•"/>
-            </a:pPr>
-            <a:r>
-              <a:rPr kumimoji="0" lang="en-US" altLang="en-US" sz="1400" b="0" i="0" u="none" strike="noStrike" cap="none" normalizeH="0" baseline="0" dirty="0">
-                <a:ln>
-                  <a:noFill/>
-                </a:ln>
-                <a:effectLst/>
-                <a:latin typeface="Arial" panose="020B0604020202020204" pitchFamily="34" charset="0"/>
-              </a:rPr>
-              <a:t> 64 → 2×ResUnit @128 → ↓</a:t>
-            </a:r>
-          </a:p>
-          <a:p>
-            <a:pPr marL="0" marR="0" lvl="0" indent="0" algn="l" defTabSz="914400" rtl="0" eaLnBrk="0" fontAlgn="base" latinLnBrk="0" hangingPunct="0">
-              <a:lnSpc>
-                <a:spcPct val="100000"/>
-              </a:lnSpc>
-              <a:spcBef>
-                <a:spcPct val="0"/>
-              </a:spcBef>
-              <a:spcAft>
-                <a:spcPct val="0"/>
-              </a:spcAft>
-              <a:buClrTx/>
-              <a:buSzTx/>
-              <a:buFontTx/>
-              <a:buChar char="•"/>
-              <a:tabLst/>
-            </a:pPr>
-            <a:r>
-              <a:rPr kumimoji="0" lang="en-US" altLang="en-US" sz="1800" b="1" i="0" u="none" strike="noStrike" cap="none" normalizeH="0" baseline="0" dirty="0">
-                <a:ln>
-                  <a:noFill/>
-                </a:ln>
-                <a:effectLst/>
-                <a:latin typeface="Arial" panose="020B0604020202020204" pitchFamily="34" charset="0"/>
-              </a:rPr>
-              <a:t>Bottleneck</a:t>
-            </a:r>
-            <a:r>
-              <a:rPr kumimoji="0" lang="en-US" altLang="en-US" sz="1800" b="0" i="0" u="none" strike="noStrike" cap="none" normalizeH="0" baseline="0" dirty="0">
-                <a:ln>
-                  <a:noFill/>
-                </a:ln>
-                <a:effectLst/>
-                <a:latin typeface="Arial" panose="020B0604020202020204" pitchFamily="34" charset="0"/>
-              </a:rPr>
-              <a:t> :</a:t>
-            </a:r>
-          </a:p>
-          <a:p>
-            <a:pPr marL="400050" lvl="1" indent="0" algn="l" eaLnBrk="0" fontAlgn="base" hangingPunct="0">
-              <a:spcBef>
-                <a:spcPct val="0"/>
-              </a:spcBef>
-              <a:spcAft>
-                <a:spcPct val="0"/>
-              </a:spcAft>
-              <a:buFontTx/>
-              <a:buChar char="•"/>
-            </a:pPr>
-            <a:r>
-              <a:rPr kumimoji="0" lang="en-US" altLang="en-US" sz="1400" b="0" i="0" u="none" strike="noStrike" cap="none" normalizeH="0" baseline="0" dirty="0">
-                <a:ln>
-                  <a:noFill/>
-                </a:ln>
-                <a:effectLst/>
-                <a:latin typeface="Arial" panose="020B0604020202020204" pitchFamily="34" charset="0"/>
-              </a:rPr>
-              <a:t> 2×ResUnit @256</a:t>
-            </a:r>
-          </a:p>
-          <a:p>
-            <a:pPr marL="0" marR="0" lvl="0" indent="0" algn="l" defTabSz="914400" rtl="0" eaLnBrk="0" fontAlgn="base" latinLnBrk="0" hangingPunct="0">
-              <a:lnSpc>
-                <a:spcPct val="100000"/>
-              </a:lnSpc>
-              <a:spcBef>
-                <a:spcPct val="0"/>
-              </a:spcBef>
-              <a:spcAft>
-                <a:spcPct val="0"/>
-              </a:spcAft>
-              <a:buClrTx/>
-              <a:buSzTx/>
-              <a:buFontTx/>
-              <a:buChar char="•"/>
-              <a:tabLst/>
-            </a:pPr>
-            <a:r>
-              <a:rPr kumimoji="0" lang="en-US" altLang="en-US" sz="1800" b="1" i="0" u="none" strike="noStrike" cap="none" normalizeH="0" baseline="0" dirty="0">
-                <a:ln>
-                  <a:noFill/>
-                </a:ln>
-                <a:effectLst/>
-                <a:latin typeface="Arial" panose="020B0604020202020204" pitchFamily="34" charset="0"/>
-              </a:rPr>
-              <a:t>Decoder</a:t>
-            </a:r>
-            <a:r>
-              <a:rPr kumimoji="0" lang="en-US" altLang="en-US" sz="1800" b="0" i="0" u="none" strike="noStrike" cap="none" normalizeH="0" baseline="0" dirty="0">
-                <a:ln>
-                  <a:noFill/>
-                </a:ln>
-                <a:effectLst/>
-                <a:latin typeface="Arial" panose="020B0604020202020204" pitchFamily="34" charset="0"/>
-              </a:rPr>
-              <a:t>:</a:t>
-            </a:r>
-          </a:p>
-          <a:p>
-            <a:pPr marL="400050" lvl="1" indent="0" algn="l" eaLnBrk="0" fontAlgn="base" hangingPunct="0">
-              <a:spcBef>
-                <a:spcPct val="0"/>
-              </a:spcBef>
-              <a:spcAft>
-                <a:spcPct val="0"/>
-              </a:spcAft>
-              <a:buFontTx/>
-              <a:buChar char="•"/>
-            </a:pPr>
-            <a:r>
-              <a:rPr kumimoji="0" lang="en-US" altLang="en-US" sz="1400" b="0" i="0" u="none" strike="noStrike" cap="none" normalizeH="0" baseline="0" dirty="0">
-                <a:ln>
-                  <a:noFill/>
-                </a:ln>
-                <a:effectLst/>
-                <a:latin typeface="Arial" panose="020B0604020202020204" pitchFamily="34" charset="0"/>
-              </a:rPr>
-              <a:t> ↑ 2×ResUnit @128 ← Skip from step 4</a:t>
-            </a:r>
-          </a:p>
-          <a:p>
-            <a:pPr marL="400050" lvl="1" indent="0" algn="l" eaLnBrk="0" fontAlgn="base" hangingPunct="0">
-              <a:spcBef>
-                <a:spcPct val="0"/>
-              </a:spcBef>
-              <a:spcAft>
-                <a:spcPct val="0"/>
-              </a:spcAft>
-              <a:buFontTx/>
-              <a:buChar char="•"/>
-            </a:pPr>
-            <a:r>
-              <a:rPr kumimoji="0" lang="en-US" altLang="en-US" sz="1400" b="0" i="0" u="none" strike="noStrike" cap="none" normalizeH="0" baseline="0" dirty="0">
-                <a:ln>
-                  <a:noFill/>
-                </a:ln>
-                <a:effectLst/>
-                <a:latin typeface="Arial" panose="020B0604020202020204" pitchFamily="34" charset="0"/>
-              </a:rPr>
-              <a:t> ↑ 2×ResUnit @64 ← Skip from step 3</a:t>
-            </a:r>
-          </a:p>
-          <a:p>
-            <a:pPr marL="400050" lvl="1" indent="0" algn="l" eaLnBrk="0" fontAlgn="base" hangingPunct="0">
-              <a:spcBef>
-                <a:spcPct val="0"/>
-              </a:spcBef>
-              <a:spcAft>
-                <a:spcPct val="0"/>
-              </a:spcAft>
-              <a:buFontTx/>
-              <a:buChar char="•"/>
-            </a:pPr>
-            <a:r>
-              <a:rPr kumimoji="0" lang="en-US" altLang="en-US" sz="1400" b="0" i="0" u="none" strike="noStrike" cap="none" normalizeH="0" baseline="0" dirty="0">
-                <a:ln>
-                  <a:noFill/>
-                </a:ln>
-                <a:effectLst/>
-                <a:latin typeface="Arial" panose="020B0604020202020204" pitchFamily="34" charset="0"/>
-              </a:rPr>
-              <a:t> ↑ 2×ResUnit @32 ← Skip from step 2</a:t>
-            </a:r>
-          </a:p>
-          <a:p>
-            <a:pPr marL="400050" lvl="1" indent="0" algn="l" eaLnBrk="0" fontAlgn="base" hangingPunct="0">
-              <a:spcBef>
-                <a:spcPct val="0"/>
-              </a:spcBef>
-              <a:spcAft>
-                <a:spcPct val="0"/>
-              </a:spcAft>
-              <a:buFontTx/>
-              <a:buChar char="•"/>
-            </a:pPr>
-            <a:r>
-              <a:rPr kumimoji="0" lang="en-US" altLang="en-US" sz="1400" b="0" i="0" u="none" strike="noStrike" cap="none" normalizeH="0" baseline="0" dirty="0">
-                <a:ln>
-                  <a:noFill/>
-                </a:ln>
-                <a:effectLst/>
-                <a:latin typeface="Arial" panose="020B0604020202020204" pitchFamily="34" charset="0"/>
-              </a:rPr>
-              <a:t> ↑ 2×ResUnit @16 ← Skip from step 1</a:t>
-            </a:r>
-          </a:p>
-          <a:p>
-            <a:pPr marL="0" marR="0" lvl="0" indent="0" algn="l" defTabSz="914400" rtl="0" eaLnBrk="0" fontAlgn="base" latinLnBrk="0" hangingPunct="0">
-              <a:lnSpc>
-                <a:spcPct val="100000"/>
-              </a:lnSpc>
-              <a:spcBef>
-                <a:spcPct val="0"/>
-              </a:spcBef>
-              <a:spcAft>
-                <a:spcPct val="0"/>
-              </a:spcAft>
-              <a:buClrTx/>
-              <a:buSzTx/>
-              <a:buFontTx/>
-              <a:buChar char="•"/>
-              <a:tabLst/>
-            </a:pPr>
-            <a:r>
-              <a:rPr kumimoji="0" lang="en-US" altLang="en-US" sz="1800" b="1" i="0" u="none" strike="noStrike" cap="none" normalizeH="0" baseline="0" dirty="0">
-                <a:ln>
-                  <a:noFill/>
-                </a:ln>
-                <a:effectLst/>
-                <a:latin typeface="Arial" panose="020B0604020202020204" pitchFamily="34" charset="0"/>
-              </a:rPr>
-              <a:t>Final</a:t>
-            </a:r>
-            <a:r>
-              <a:rPr kumimoji="0" lang="en-US" altLang="en-US" sz="1800" b="0" i="0" u="none" strike="noStrike" cap="none" normalizeH="0" baseline="0" dirty="0">
-                <a:ln>
-                  <a:noFill/>
-                </a:ln>
-                <a:effectLst/>
-                <a:latin typeface="Arial" panose="020B0604020202020204" pitchFamily="34" charset="0"/>
-              </a:rPr>
-              <a:t>: </a:t>
-            </a:r>
-          </a:p>
-          <a:p>
-            <a:pPr marL="400050" lvl="1" indent="0" algn="l" eaLnBrk="0" fontAlgn="base" hangingPunct="0">
-              <a:spcBef>
-                <a:spcPct val="0"/>
-              </a:spcBef>
-              <a:spcAft>
-                <a:spcPct val="0"/>
-              </a:spcAft>
-              <a:buFontTx/>
-              <a:buChar char="•"/>
-            </a:pPr>
-            <a:r>
-              <a:rPr kumimoji="0" lang="en-US" altLang="en-US" sz="1400" b="0" i="0" u="none" strike="noStrike" cap="none" normalizeH="0" baseline="0" dirty="0">
-                <a:ln>
-                  <a:noFill/>
-                </a:ln>
-                <a:effectLst/>
-                <a:latin typeface="Arial" panose="020B0604020202020204" pitchFamily="34" charset="0"/>
-              </a:rPr>
-              <a:t> 1×1×1 Conv → </a:t>
-            </a:r>
-            <a:r>
-              <a:rPr kumimoji="0" lang="en-US" altLang="en-US" sz="1400" b="0" i="0" u="none" strike="noStrike" cap="none" normalizeH="0" baseline="0" dirty="0" err="1">
-                <a:ln>
-                  <a:noFill/>
-                </a:ln>
-                <a:effectLst/>
-                <a:latin typeface="Arial" panose="020B0604020202020204" pitchFamily="34" charset="0"/>
-              </a:rPr>
-              <a:t>num_classes</a:t>
-            </a:r>
-            <a:r>
-              <a:rPr kumimoji="0" lang="en-US" altLang="en-US" sz="1400" b="0" i="0" u="none" strike="noStrike" cap="none" normalizeH="0" baseline="0" dirty="0">
-                <a:ln>
-                  <a:noFill/>
-                </a:ln>
-                <a:effectLst/>
-                <a:latin typeface="Arial" panose="020B0604020202020204" pitchFamily="34" charset="0"/>
-              </a:rPr>
-              <a:t> (=4) channel output</a:t>
-            </a:r>
-          </a:p>
-        </p:txBody>
-      </p:sp>
-      <p:pic>
-        <p:nvPicPr>
-          <p:cNvPr id="16" name="Picture 15">
-            <a:extLst>
-              <a:ext uri="{FF2B5EF4-FFF2-40B4-BE49-F238E27FC236}">
-                <a16:creationId xmlns:a16="http://schemas.microsoft.com/office/drawing/2014/main" id="{9BEE861B-1757-25ED-AC26-B03BDFA75436}"/>
-              </a:ext>
-            </a:extLst>
-          </p:cNvPr>
-          <p:cNvPicPr>
-            <a:picLocks noChangeAspect="1"/>
-          </p:cNvPicPr>
-          <p:nvPr/>
-        </p:nvPicPr>
-        <p:blipFill>
-          <a:blip r:embed="rId2"/>
-          <a:stretch>
-            <a:fillRect/>
-          </a:stretch>
-        </p:blipFill>
-        <p:spPr>
-          <a:xfrm>
-            <a:off x="6422794" y="1044700"/>
-            <a:ext cx="2494009" cy="1679755"/>
-          </a:xfrm>
-          <a:prstGeom prst="rect">
-            <a:avLst/>
-          </a:prstGeom>
-        </p:spPr>
-      </p:pic>
-    </p:spTree>
-    <p:extLst>
-      <p:ext uri="{BB962C8B-B14F-4D97-AF65-F5344CB8AC3E}">
-        <p14:creationId xmlns:p14="http://schemas.microsoft.com/office/powerpoint/2010/main" val="474185227"/>
-      </p:ext>
-    </p:extLst>
-  </p:cSld>
-  <p:clrMapOvr>
-    <a:masterClrMapping/>
-  </p:clrMapOvr>
-</p:sld>
-</file>
-
-<file path=ppt/slides/slide13.xml><?xml version="1.0" encoding="utf-8"?>
+<file path=ppt/slides/slide14.xml><?xml version="1.0" encoding="utf-8"?>
 <p:sld xmlns:a="http://schemas.openxmlformats.org/drawingml/2006/main" xmlns:r="http://schemas.openxmlformats.org/officeDocument/2006/relationships" xmlns:p="http://schemas.openxmlformats.org/presentationml/2006/main">
   <p:cSld>
     <p:spTree>
@@ -6293,7 +6745,7 @@
 </p:sld>
 </file>
 
-<file path=ppt/slides/slide14.xml><?xml version="1.0" encoding="utf-8"?>
+<file path=ppt/slides/slide15.xml><?xml version="1.0" encoding="utf-8"?>
 <p:sld xmlns:a="http://schemas.openxmlformats.org/drawingml/2006/main" xmlns:r="http://schemas.openxmlformats.org/officeDocument/2006/relationships" xmlns:p="http://schemas.openxmlformats.org/presentationml/2006/main">
   <p:cSld>
     <p:spTree>
@@ -6403,7 +6855,7 @@
 </p:sld>
 </file>
 
-<file path=ppt/slides/slide15.xml><?xml version="1.0" encoding="utf-8"?>
+<file path=ppt/slides/slide16.xml><?xml version="1.0" encoding="utf-8"?>
 <p:sld xmlns:a="http://schemas.openxmlformats.org/drawingml/2006/main" xmlns:r="http://schemas.openxmlformats.org/officeDocument/2006/relationships" xmlns:p="http://schemas.openxmlformats.org/presentationml/2006/main">
   <p:cSld>
     <p:spTree>
@@ -7035,7 +7487,7 @@
 </p:sld>
 </file>
 
-<file path=ppt/slides/slide16.xml><?xml version="1.0" encoding="utf-8"?>
+<file path=ppt/slides/slide17.xml><?xml version="1.0" encoding="utf-8"?>
 <p:sld xmlns:a="http://schemas.openxmlformats.org/drawingml/2006/main" xmlns:r="http://schemas.openxmlformats.org/officeDocument/2006/relationships" xmlns:p="http://schemas.openxmlformats.org/presentationml/2006/main">
   <p:cSld>
     <p:spTree>
@@ -7132,8 +7584,8 @@
           </a:prstGeom>
         </p:spPr>
       </p:pic>
-      <mc:AlternateContent xmlns:mc="http://schemas.openxmlformats.org/markup-compatibility/2006">
-        <mc:Choice xmlns:a14="http://schemas.microsoft.com/office/drawing/2010/main" Requires="a14">
+      <mc:AlternateContent xmlns:mc="http://schemas.openxmlformats.org/markup-compatibility/2006" xmlns:a14="http://schemas.microsoft.com/office/drawing/2010/main">
+        <mc:Choice Requires="a14">
           <p:graphicFrame>
             <p:nvGraphicFramePr>
               <p:cNvPr id="7" name="Table 6">
@@ -7316,7 +7768,7 @@
                                         <m:begChr m:val="|"/>
                                         <m:endChr m:val="|"/>
                                         <m:ctrlPr>
-                                          <a:rPr kumimoji="0" lang="en-US" altLang="en-US" sz="1400" b="1" i="0" u="none" strike="noStrike" cap="none" normalizeH="0" baseline="0" smtClean="0">
+                                          <a:rPr kumimoji="0" lang="en-US" altLang="en-US" sz="1400" b="1" i="1" u="none" strike="noStrike" cap="none" normalizeH="0" baseline="0" smtClean="0">
                                             <a:ln>
                                               <a:noFill/>
                                             </a:ln>
@@ -7780,17 +8232,7 @@
                                         <a:effectLst/>
                                         <a:latin typeface="Cambria Math" panose="02040503050406030204" pitchFamily="18" charset="0"/>
                                       </a:rPr>
-                                      <m:t>|</m:t>
-                                    </m:r>
-                                    <m:r>
-                                      <a:rPr kumimoji="0" lang="en-US" altLang="en-US" sz="1400" b="1" i="1" u="none" strike="noStrike" cap="none" normalizeH="0" baseline="0" smtClean="0">
-                                        <a:ln>
-                                          <a:noFill/>
-                                        </a:ln>
-                                        <a:effectLst/>
-                                        <a:latin typeface="Cambria Math" panose="02040503050406030204" pitchFamily="18" charset="0"/>
-                                      </a:rPr>
-                                      <m:t> </m:t>
+                                      <m:t>| </m:t>
                                     </m:r>
                                   </m:num>
                                   <m:den>
@@ -7880,18 +8322,7 @@
                                   <a:latin typeface="Cambria Math" panose="02040503050406030204" pitchFamily="18" charset="0"/>
                                   <a:ea typeface="Cambria Math" panose="02040503050406030204" pitchFamily="18" charset="0"/>
                                 </a:rPr>
-                                <m:t>&gt;</m:t>
-                              </m:r>
-                              <m:r>
-                                <a:rPr kumimoji="0" lang="en-US" altLang="en-US" sz="1400" b="1" i="1" u="none" strike="noStrike" cap="none" normalizeH="0" baseline="0" smtClean="0">
-                                  <a:ln>
-                                    <a:noFill/>
-                                  </a:ln>
-                                  <a:effectLst/>
-                                  <a:latin typeface="Cambria Math" panose="02040503050406030204" pitchFamily="18" charset="0"/>
-                                  <a:ea typeface="Cambria Math" panose="02040503050406030204" pitchFamily="18" charset="0"/>
-                                </a:rPr>
-                                <m:t>|</m:t>
+                                <m:t>&gt;|</m:t>
                               </m:r>
                               <m:r>
                                 <a:rPr kumimoji="0" lang="en-US" altLang="en-US" sz="1400" b="1" i="1" u="none" strike="noStrike" cap="none" normalizeH="0" baseline="0" smtClean="0">
@@ -8020,7 +8451,7 @@
             </a:graphic>
           </p:graphicFrame>
         </mc:Choice>
-        <mc:Fallback>
+        <mc:Fallback xmlns="">
           <p:graphicFrame>
             <p:nvGraphicFramePr>
               <p:cNvPr id="7" name="Table 6">
@@ -8445,7 +8876,7 @@
 </p:sld>
 </file>
 
-<file path=ppt/slides/slide17.xml><?xml version="1.0" encoding="utf-8"?>
+<file path=ppt/slides/slide18.xml><?xml version="1.0" encoding="utf-8"?>
 <p:sld xmlns:a="http://schemas.openxmlformats.org/drawingml/2006/main" xmlns:r="http://schemas.openxmlformats.org/officeDocument/2006/relationships" xmlns:p="http://schemas.openxmlformats.org/presentationml/2006/main">
   <p:cSld>
     <p:spTree>
@@ -8654,7 +9085,7 @@
 </p:sld>
 </file>
 
-<file path=ppt/slides/slide18.xml><?xml version="1.0" encoding="utf-8"?>
+<file path=ppt/slides/slide19.xml><?xml version="1.0" encoding="utf-8"?>
 <p:sld xmlns:a="http://schemas.openxmlformats.org/drawingml/2006/main" xmlns:r="http://schemas.openxmlformats.org/officeDocument/2006/relationships" xmlns:p="http://schemas.openxmlformats.org/presentationml/2006/main">
   <p:cSld>
     <p:spTree>
@@ -8773,7 +9204,137 @@
 </p:sld>
 </file>
 
-<file path=ppt/slides/slide19.xml><?xml version="1.0" encoding="utf-8"?>
+<file path=ppt/slides/slide2.xml><?xml version="1.0" encoding="utf-8"?>
+<p:sld xmlns:a="http://schemas.openxmlformats.org/drawingml/2006/main" xmlns:r="http://schemas.openxmlformats.org/officeDocument/2006/relationships" xmlns:p="http://schemas.openxmlformats.org/presentationml/2006/main">
+  <p:cSld>
+    <p:spTree>
+      <p:nvGrpSpPr>
+        <p:cNvPr id="1" name=""/>
+        <p:cNvGrpSpPr/>
+        <p:nvPr/>
+      </p:nvGrpSpPr>
+      <p:grpSpPr>
+        <a:xfrm>
+          <a:off x="0" y="0"/>
+          <a:ext cx="0" cy="0"/>
+          <a:chOff x="0" y="0"/>
+          <a:chExt cx="0" cy="0"/>
+        </a:xfrm>
+      </p:grpSpPr>
+      <p:sp>
+        <p:nvSpPr>
+          <p:cNvPr id="2" name="Title 1"/>
+          <p:cNvSpPr>
+            <a:spLocks noGrp="1"/>
+          </p:cNvSpPr>
+          <p:nvPr>
+            <p:ph type="title"/>
+          </p:nvPr>
+        </p:nvSpPr>
+        <p:spPr/>
+        <p:txBody>
+          <a:bodyPr>
+            <a:normAutofit/>
+          </a:bodyPr>
+          <a:lstStyle/>
+          <a:p>
+            <a:r>
+              <a:rPr lang="en-US" dirty="0"/>
+              <a:t>Intro</a:t>
+            </a:r>
+          </a:p>
+        </p:txBody>
+      </p:sp>
+      <p:sp>
+        <p:nvSpPr>
+          <p:cNvPr id="3" name="Content Placeholder 2"/>
+          <p:cNvSpPr>
+            <a:spLocks noGrp="1"/>
+          </p:cNvSpPr>
+          <p:nvPr>
+            <p:ph idx="1"/>
+          </p:nvPr>
+        </p:nvSpPr>
+        <p:spPr>
+          <a:xfrm>
+            <a:off x="457200" y="1598733"/>
+            <a:ext cx="8229600" cy="3110887"/>
+          </a:xfrm>
+        </p:spPr>
+        <p:txBody>
+          <a:bodyPr>
+            <a:normAutofit fontScale="47500" lnSpcReduction="20000"/>
+          </a:bodyPr>
+          <a:lstStyle/>
+          <a:p>
+            <a:r>
+              <a:rPr lang="en-US" sz="2900" dirty="0"/>
+              <a:t>Automatic glioblastoma multiforme (GBM) segmentation refers to the use of computer algorithms—most often deep-learning models—to identify and delineate tumor regions in magnetic resonance imaging (MRI) scans without manual intervention. </a:t>
+            </a:r>
+          </a:p>
+          <a:p>
+            <a:endParaRPr lang="en-US" sz="2900" dirty="0"/>
+          </a:p>
+          <a:p>
+            <a:r>
+              <a:rPr lang="en-US" sz="2900" dirty="0"/>
+              <a:t>Precision in Treatment Planning: Automatic GBM segmentation provides consistent, voxel-level delineation of tumor subregions (enhancing tumor, edema, necrosis</a:t>
+            </a:r>
+            <a:r>
+              <a:rPr lang="he-IL" sz="2900" dirty="0"/>
+              <a:t>(</a:t>
+            </a:r>
+            <a:r>
+              <a:rPr lang="en-US" sz="2900" dirty="0"/>
+              <a:t>. </a:t>
+            </a:r>
+          </a:p>
+          <a:p>
+            <a:endParaRPr lang="en-US" sz="2900" dirty="0"/>
+          </a:p>
+          <a:p>
+            <a:r>
+              <a:rPr lang="en-US" sz="2900" dirty="0"/>
+              <a:t>Efficiency &amp; Scalability: Automated methods drastically reduce the time and labor of manual contouring.</a:t>
+            </a:r>
+          </a:p>
+          <a:p>
+            <a:endParaRPr lang="en-US" sz="2900" dirty="0"/>
+          </a:p>
+          <a:p>
+            <a:r>
+              <a:rPr lang="en-US" sz="2900" dirty="0"/>
+              <a:t>Reproducibility &amp; Objectivity: By minimizing inter- and intra-observer variability inherent to manual annotation.</a:t>
+            </a:r>
+          </a:p>
+          <a:p>
+            <a:endParaRPr lang="en-US" sz="2900" dirty="0"/>
+          </a:p>
+          <a:p>
+            <a:r>
+              <a:rPr lang="en-US" sz="2900" dirty="0"/>
+              <a:t>Quantitative Monitoring: Enables robust quantification of tumor volume changes over time, supporting early assessment of treatment response and facilitating adaptive therapy strategies.</a:t>
+            </a:r>
+          </a:p>
+          <a:p>
+            <a:endParaRPr lang="en-US" dirty="0"/>
+          </a:p>
+        </p:txBody>
+      </p:sp>
+    </p:spTree>
+    <p:extLst>
+      <p:ext uri="{BB962C8B-B14F-4D97-AF65-F5344CB8AC3E}">
+        <p14:creationId xmlns:p14="http://schemas.microsoft.com/office/powerpoint/2010/main" val="4103309497"/>
+      </p:ext>
+    </p:extLst>
+  </p:cSld>
+  <p:clrMapOvr>
+    <a:masterClrMapping/>
+  </p:clrMapOvr>
+</p:sld>
+</file>
+
+<file path=ppt/slides/slide20.xml><?xml version="1.0" encoding="utf-8"?>
 <p:sld xmlns:a="http://schemas.openxmlformats.org/drawingml/2006/main" xmlns:r="http://schemas.openxmlformats.org/officeDocument/2006/relationships" xmlns:p="http://schemas.openxmlformats.org/presentationml/2006/main">
   <p:cSld>
     <p:bg>
@@ -13927,128 +14488,6 @@
     <p:extLst>
       <p:ext uri="{BB962C8B-B14F-4D97-AF65-F5344CB8AC3E}">
         <p14:creationId xmlns:p14="http://schemas.microsoft.com/office/powerpoint/2010/main" val="2735281129"/>
-      </p:ext>
-    </p:extLst>
-  </p:cSld>
-  <p:clrMapOvr>
-    <a:masterClrMapping/>
-  </p:clrMapOvr>
-</p:sld>
-</file>
-
-<file path=ppt/slides/slide2.xml><?xml version="1.0" encoding="utf-8"?>
-<p:sld xmlns:a="http://schemas.openxmlformats.org/drawingml/2006/main" xmlns:r="http://schemas.openxmlformats.org/officeDocument/2006/relationships" xmlns:p="http://schemas.openxmlformats.org/presentationml/2006/main">
-  <p:cSld>
-    <p:spTree>
-      <p:nvGrpSpPr>
-        <p:cNvPr id="1" name=""/>
-        <p:cNvGrpSpPr/>
-        <p:nvPr/>
-      </p:nvGrpSpPr>
-      <p:grpSpPr>
-        <a:xfrm>
-          <a:off x="0" y="0"/>
-          <a:ext cx="0" cy="0"/>
-          <a:chOff x="0" y="0"/>
-          <a:chExt cx="0" cy="0"/>
-        </a:xfrm>
-      </p:grpSpPr>
-      <p:sp>
-        <p:nvSpPr>
-          <p:cNvPr id="2" name="Title 1"/>
-          <p:cNvSpPr>
-            <a:spLocks noGrp="1"/>
-          </p:cNvSpPr>
-          <p:nvPr>
-            <p:ph type="title"/>
-          </p:nvPr>
-        </p:nvSpPr>
-        <p:spPr/>
-        <p:txBody>
-          <a:bodyPr>
-            <a:normAutofit/>
-          </a:bodyPr>
-          <a:lstStyle/>
-          <a:p>
-            <a:r>
-              <a:rPr lang="en-US" dirty="0"/>
-              <a:t>Intro</a:t>
-            </a:r>
-          </a:p>
-        </p:txBody>
-      </p:sp>
-      <p:sp>
-        <p:nvSpPr>
-          <p:cNvPr id="3" name="Content Placeholder 2"/>
-          <p:cNvSpPr>
-            <a:spLocks noGrp="1"/>
-          </p:cNvSpPr>
-          <p:nvPr>
-            <p:ph idx="1"/>
-          </p:nvPr>
-        </p:nvSpPr>
-        <p:spPr>
-          <a:xfrm>
-            <a:off x="457200" y="1598733"/>
-            <a:ext cx="8229600" cy="3110887"/>
-          </a:xfrm>
-        </p:spPr>
-        <p:txBody>
-          <a:bodyPr>
-            <a:normAutofit fontScale="47500" lnSpcReduction="20000"/>
-          </a:bodyPr>
-          <a:lstStyle/>
-          <a:p>
-            <a:r>
-              <a:rPr lang="en-US" sz="2900" dirty="0"/>
-              <a:t>Automatic glioblastoma multiforme (GBM) segmentation refers to the use of computer algorithms—most often deep-learning models—to identify and delineate tumor regions in magnetic resonance imaging (MRI) scans without manual intervention. </a:t>
-            </a:r>
-          </a:p>
-          <a:p>
-            <a:endParaRPr lang="en-US" sz="2900" dirty="0"/>
-          </a:p>
-          <a:p>
-            <a:r>
-              <a:rPr lang="en-US" sz="2900" dirty="0"/>
-              <a:t>Precision in Treatment Planning: Automatic GBM segmentation provides consistent, voxel-level delineation of tumor subregions (enhancing tumor, edema, necrosis. </a:t>
-            </a:r>
-          </a:p>
-          <a:p>
-            <a:endParaRPr lang="en-US" sz="2900" dirty="0"/>
-          </a:p>
-          <a:p>
-            <a:r>
-              <a:rPr lang="en-US" sz="2900" dirty="0"/>
-              <a:t>Efficiency &amp; Scalability: Automated methods drastically reduce the time and labor of manual contouring.</a:t>
-            </a:r>
-          </a:p>
-          <a:p>
-            <a:endParaRPr lang="en-US" sz="2900" dirty="0"/>
-          </a:p>
-          <a:p>
-            <a:r>
-              <a:rPr lang="en-US" sz="2900" dirty="0"/>
-              <a:t>Reproducibility &amp; Objectivity: By minimizing inter- and intra-observer variability inherent to manual annotation.</a:t>
-            </a:r>
-          </a:p>
-          <a:p>
-            <a:endParaRPr lang="en-US" sz="2900" dirty="0"/>
-          </a:p>
-          <a:p>
-            <a:r>
-              <a:rPr lang="en-US" sz="2900" dirty="0"/>
-              <a:t>Quantitative Monitoring: Enables robust quantification of tumor volume changes over time, supporting early assessment of treatment response and facilitating adaptive therapy strategies.</a:t>
-            </a:r>
-          </a:p>
-          <a:p>
-            <a:endParaRPr lang="en-US" dirty="0"/>
-          </a:p>
-        </p:txBody>
-      </p:sp>
-    </p:spTree>
-    <p:extLst>
-      <p:ext uri="{BB962C8B-B14F-4D97-AF65-F5344CB8AC3E}">
-        <p14:creationId xmlns:p14="http://schemas.microsoft.com/office/powerpoint/2010/main" val="4103309497"/>
       </p:ext>
     </p:extLst>
   </p:cSld>

--- a/ds18_GBM_Autosegmentation.pptx
+++ b/ds18_GBM_Autosegmentation.pptx
@@ -4117,9 +4117,10 @@
           <a:lstStyle/>
           <a:p>
             <a:r>
-              <a:rPr lang="en-US" dirty="0"/>
+              <a:rPr lang="en-US"/>
               <a:t>3D UNET GBM Auto Segmentation</a:t>
             </a:r>
+            <a:endParaRPr lang="en-US" dirty="0"/>
           </a:p>
         </p:txBody>
       </p:sp>
@@ -4144,18 +4145,19 @@
           <a:lstStyle/>
           <a:p>
             <a:r>
-              <a:rPr lang="en-US" dirty="0"/>
+              <a:rPr lang="en-US"/>
               <a:t>DS18 – Chervin Daniel.</a:t>
             </a:r>
+            <a:endParaRPr lang="en-US" dirty="0"/>
           </a:p>
         </p:txBody>
       </p:sp>
       <p:pic>
         <p:nvPicPr>
-          <p:cNvPr id="7" name="Picture 6">
+          <p:cNvPr id="5" name="Picture 4">
             <a:extLst>
               <a:ext uri="{FF2B5EF4-FFF2-40B4-BE49-F238E27FC236}">
-                <a16:creationId xmlns:a16="http://schemas.microsoft.com/office/drawing/2014/main" id="{C9680EC1-E53E-6BA8-F3C9-B34727B44AF2}"/>
+                <a16:creationId xmlns:a16="http://schemas.microsoft.com/office/drawing/2014/main" id="{309B267A-F8B0-6020-2FD7-3E8C6EE799D7}"/>
               </a:ext>
             </a:extLst>
           </p:cNvPr>
@@ -4172,18 +4174,42 @@
         </p:blipFill>
         <p:spPr>
           <a:xfrm>
-            <a:off x="143555" y="355778"/>
-            <a:ext cx="4669320" cy="2277717"/>
+            <a:off x="1059785" y="128470"/>
+            <a:ext cx="2337617" cy="2316620"/>
           </a:xfrm>
           <a:prstGeom prst="rect">
             <a:avLst/>
           </a:prstGeom>
-          <a:ln>
-            <a:noFill/>
-          </a:ln>
-          <a:effectLst>
-            <a:softEdge rad="112500"/>
-          </a:effectLst>
+        </p:spPr>
+      </p:pic>
+      <p:pic>
+        <p:nvPicPr>
+          <p:cNvPr id="8" name="Picture 7">
+            <a:extLst>
+              <a:ext uri="{FF2B5EF4-FFF2-40B4-BE49-F238E27FC236}">
+                <a16:creationId xmlns:a16="http://schemas.microsoft.com/office/drawing/2014/main" id="{3F91F9AF-CFD3-AAE0-A769-543A17F275D4}"/>
+              </a:ext>
+            </a:extLst>
+          </p:cNvPr>
+          <p:cNvPicPr>
+            <a:picLocks noChangeAspect="1"/>
+          </p:cNvPicPr>
+          <p:nvPr/>
+        </p:nvPicPr>
+        <p:blipFill>
+          <a:blip r:embed="rId3"/>
+          <a:stretch>
+            <a:fillRect/>
+          </a:stretch>
+        </p:blipFill>
+        <p:spPr>
+          <a:xfrm>
+            <a:off x="2892245" y="1623849"/>
+            <a:ext cx="2360632" cy="2360632"/>
+          </a:xfrm>
+          <a:prstGeom prst="rect">
+            <a:avLst/>
+          </a:prstGeom>
         </p:spPr>
       </p:pic>
     </p:spTree>
@@ -5160,12 +5186,8 @@
               <a:t>DeConv+ReLU</a:t>
             </a:r>
             <a:r>
-              <a:rPr lang="en-US" sz="1100"/>
-              <a:t>) →</a:t>
-            </a:r>
-            <a:r>
               <a:rPr lang="en-US" sz="1100" dirty="0"/>
-              <a:t>16 channels.</a:t>
+              <a:t>) →16 channels.</a:t>
             </a:r>
           </a:p>
           <a:p>
@@ -9257,7 +9279,7 @@
         </p:nvSpPr>
         <p:spPr>
           <a:xfrm>
-            <a:off x="457200" y="1598733"/>
+            <a:off x="457200" y="2032613"/>
             <a:ext cx="8229600" cy="3110887"/>
           </a:xfrm>
         </p:spPr>
@@ -9315,9 +9337,131 @@
               <a:rPr lang="en-US" sz="2900" dirty="0"/>
               <a:t>Quantitative Monitoring: Enables robust quantification of tumor volume changes over time, supporting early assessment of treatment response and facilitating adaptive therapy strategies.</a:t>
             </a:r>
-          </a:p>
-          <a:p>
             <a:endParaRPr lang="en-US" dirty="0"/>
+          </a:p>
+        </p:txBody>
+      </p:sp>
+      <p:pic>
+        <p:nvPicPr>
+          <p:cNvPr id="4" name="Picture 3">
+            <a:extLst>
+              <a:ext uri="{FF2B5EF4-FFF2-40B4-BE49-F238E27FC236}">
+                <a16:creationId xmlns:a16="http://schemas.microsoft.com/office/drawing/2014/main" id="{7E5304F8-BDC0-9547-1116-4EB055B946C9}"/>
+              </a:ext>
+            </a:extLst>
+          </p:cNvPr>
+          <p:cNvPicPr>
+            <a:picLocks noChangeAspect="1"/>
+          </p:cNvPicPr>
+          <p:nvPr/>
+        </p:nvPicPr>
+        <p:blipFill>
+          <a:blip r:embed="rId2"/>
+          <a:stretch>
+            <a:fillRect/>
+          </a:stretch>
+        </p:blipFill>
+        <p:spPr>
+          <a:xfrm>
+            <a:off x="1030513" y="136388"/>
+            <a:ext cx="1570164" cy="1556060"/>
+          </a:xfrm>
+          <a:prstGeom prst="rect">
+            <a:avLst/>
+          </a:prstGeom>
+          <a:ln>
+            <a:noFill/>
+          </a:ln>
+          <a:effectLst>
+            <a:softEdge rad="112500"/>
+          </a:effectLst>
+        </p:spPr>
+      </p:pic>
+      <p:pic>
+        <p:nvPicPr>
+          <p:cNvPr id="5" name="Picture 4">
+            <a:extLst>
+              <a:ext uri="{FF2B5EF4-FFF2-40B4-BE49-F238E27FC236}">
+                <a16:creationId xmlns:a16="http://schemas.microsoft.com/office/drawing/2014/main" id="{F5A55644-F843-4D91-590F-1D3EC02DBAA7}"/>
+              </a:ext>
+            </a:extLst>
+          </p:cNvPr>
+          <p:cNvPicPr>
+            <a:picLocks noChangeAspect="1"/>
+          </p:cNvPicPr>
+          <p:nvPr/>
+        </p:nvPicPr>
+        <p:blipFill>
+          <a:blip r:embed="rId3"/>
+          <a:stretch>
+            <a:fillRect/>
+          </a:stretch>
+        </p:blipFill>
+        <p:spPr>
+          <a:xfrm>
+            <a:off x="3350360" y="136387"/>
+            <a:ext cx="1556061" cy="1556061"/>
+          </a:xfrm>
+          <a:prstGeom prst="rect">
+            <a:avLst/>
+          </a:prstGeom>
+          <a:ln>
+            <a:noFill/>
+          </a:ln>
+          <a:effectLst>
+            <a:softEdge rad="112500"/>
+          </a:effectLst>
+        </p:spPr>
+      </p:pic>
+      <p:sp>
+        <p:nvSpPr>
+          <p:cNvPr id="6" name="Arrow: Right 5">
+            <a:extLst>
+              <a:ext uri="{FF2B5EF4-FFF2-40B4-BE49-F238E27FC236}">
+                <a16:creationId xmlns:a16="http://schemas.microsoft.com/office/drawing/2014/main" id="{5AC1902A-216B-15A5-40C4-ABB22072FA8E}"/>
+              </a:ext>
+            </a:extLst>
+          </p:cNvPr>
+          <p:cNvSpPr/>
+          <p:nvPr/>
+        </p:nvSpPr>
+        <p:spPr>
+          <a:xfrm>
+            <a:off x="2670108" y="723762"/>
+            <a:ext cx="610820" cy="381310"/>
+          </a:xfrm>
+          <a:prstGeom prst="rightArrow">
+            <a:avLst/>
+          </a:prstGeom>
+          <a:solidFill>
+            <a:schemeClr val="accent1">
+              <a:lumMod val="60000"/>
+              <a:lumOff val="40000"/>
+            </a:schemeClr>
+          </a:solidFill>
+        </p:spPr>
+        <p:style>
+          <a:lnRef idx="2">
+            <a:schemeClr val="accent1">
+              <a:shade val="15000"/>
+            </a:schemeClr>
+          </a:lnRef>
+          <a:fillRef idx="1">
+            <a:schemeClr val="accent1"/>
+          </a:fillRef>
+          <a:effectRef idx="0">
+            <a:schemeClr val="accent1"/>
+          </a:effectRef>
+          <a:fontRef idx="minor">
+            <a:schemeClr val="lt1"/>
+          </a:fontRef>
+        </p:style>
+        <p:txBody>
+          <a:bodyPr rtlCol="0" anchor="ctr"/>
+          <a:lstStyle/>
+          <a:p>
+            <a:pPr algn="ctr"/>
+            <a:endParaRPr lang="en-US"/>
           </a:p>
         </p:txBody>
       </p:sp>
